--- a/folletos/2026-04/pptx/FIP_VANTRUST_LIQUIDEZ_I.pptx
+++ b/folletos/2026-04/pptx/FIP_VANTRUST_LIQUIDEZ_I.pptx
@@ -2927,7 +2927,7 @@
                 <a:ea typeface="Calibri" pitchFamily="34" charset="-122"/>
                 <a:cs typeface="Calibri" pitchFamily="34" charset="-120"/>
               </a:rPr>
-              <a:t>prueba CLP</a:t>
+              <a:t>prueba 2 CLP</a:t>
             </a:r>
             <a:endParaRPr lang="en-US" sz="800" dirty="0"/>
           </a:p>

--- a/folletos/2026-04/pptx/FIP_VANTRUST_LIQUIDEZ_I.pptx
+++ b/folletos/2026-04/pptx/FIP_VANTRUST_LIQUIDEZ_I.pptx
@@ -5363,7 +5363,7 @@
                 <a:ea typeface="Calibri" pitchFamily="34" charset="-122"/>
                 <a:cs typeface="Calibri" pitchFamily="34" charset="-120"/>
               </a:rPr>
-              <a:t>prueba CLP</a:t>
+              <a:t>prueba 3 CLP</a:t>
             </a:r>
             <a:endParaRPr lang="en-US" sz="800" dirty="0"/>
           </a:p>

--- a/folletos/2026-04/pptx/FIP_VANTRUST_LIQUIDEZ_I.pptx
+++ b/folletos/2026-04/pptx/FIP_VANTRUST_LIQUIDEZ_I.pptx
@@ -6323,7 +6323,7 @@
                 <a:ea typeface="Calibri" pitchFamily="34" charset="-122"/>
                 <a:cs typeface="Calibri" pitchFamily="34" charset="-120"/>
               </a:rPr>
-              <a:t>prueba CLP</a:t>
+              <a:t>prueba 4 CLP</a:t>
             </a:r>
             <a:endParaRPr lang="en-US" sz="800" dirty="0"/>
           </a:p>

--- a/folletos/2026-04/pptx/FIP_VANTRUST_LIQUIDEZ_I.pptx
+++ b/folletos/2026-04/pptx/FIP_VANTRUST_LIQUIDEZ_I.pptx
@@ -6373,7 +6373,7 @@
                 <a:ea typeface="Calibri" pitchFamily="34" charset="-122"/>
                 <a:cs typeface="Calibri" pitchFamily="34" charset="-120"/>
               </a:rPr>
-              <a:t>prueba CLP</a:t>
+              <a:t>prueba 6 CLP</a:t>
             </a:r>
             <a:endParaRPr lang="en-US" sz="800" dirty="0"/>
           </a:p>

--- a/folletos/2026-04/pptx/FIP_VANTRUST_LIQUIDEZ_I.pptx
+++ b/folletos/2026-04/pptx/FIP_VANTRUST_LIQUIDEZ_I.pptx
@@ -6373,7 +6373,7 @@
                 <a:ea typeface="Calibri" pitchFamily="34" charset="-122"/>
                 <a:cs typeface="Calibri" pitchFamily="34" charset="-120"/>
               </a:rPr>
-              <a:t>prueba 6 CLP</a:t>
+              <a:t>prueba CLP</a:t>
             </a:r>
             <a:endParaRPr lang="en-US" sz="800" dirty="0"/>
           </a:p>
@@ -33352,13 +33352,91 @@
       </p:sp>
       <p:sp>
         <p:nvSpPr>
-          <p:cNvPr id="8" name="Shape 6"/>
+          <p:cNvPr id="8" name="Text 6"/>
           <p:cNvSpPr/>
           <p:nvPr/>
         </p:nvSpPr>
         <p:spPr>
           <a:xfrm>
-            <a:off x="118872" y="1810512"/>
+            <a:off x="118872" y="1719072"/>
+            <a:ext cx="1188720" cy="173736"/>
+          </a:xfrm>
+          <a:prstGeom prst="rect">
+            <a:avLst/>
+          </a:prstGeom>
+          <a:noFill/>
+          <a:ln/>
+        </p:spPr>
+        <p:txBody>
+          <a:bodyPr wrap="square" lIns="0" tIns="0" rIns="0" bIns="0" rtlCol="0" anchor="ctr"/>
+          <a:lstStyle/>
+          <a:p>
+            <a:pPr indent="0" marL="0">
+              <a:buNone/>
+            </a:pPr>
+            <a:r>
+              <a:rPr lang="en-US" sz="750" dirty="0">
+                <a:solidFill>
+                  <a:srgbClr val="000000"/>
+                </a:solidFill>
+                <a:latin typeface="Calibri" pitchFamily="34" charset="0"/>
+                <a:ea typeface="Calibri" pitchFamily="34" charset="-122"/>
+                <a:cs typeface="Calibri" pitchFamily="34" charset="-120"/>
+              </a:rPr>
+              <a:t>CLP</a:t>
+            </a:r>
+            <a:endParaRPr lang="en-US" sz="750" dirty="0"/>
+          </a:p>
+        </p:txBody>
+      </p:sp>
+      <p:sp>
+        <p:nvSpPr>
+          <p:cNvPr id="9" name="Text 7"/>
+          <p:cNvSpPr/>
+          <p:nvPr/>
+        </p:nvSpPr>
+        <p:spPr>
+          <a:xfrm>
+            <a:off x="1307592" y="1719072"/>
+            <a:ext cx="1024128" cy="173736"/>
+          </a:xfrm>
+          <a:prstGeom prst="rect">
+            <a:avLst/>
+          </a:prstGeom>
+          <a:noFill/>
+          <a:ln/>
+        </p:spPr>
+        <p:txBody>
+          <a:bodyPr wrap="square" lIns="0" tIns="0" rIns="0" bIns="0" rtlCol="0" anchor="ctr"/>
+          <a:lstStyle/>
+          <a:p>
+            <a:pPr algn="r" indent="0" marL="0">
+              <a:buNone/>
+            </a:pPr>
+            <a:r>
+              <a:rPr lang="en-US" sz="750" b="1" dirty="0">
+                <a:solidFill>
+                  <a:srgbClr val="000000"/>
+                </a:solidFill>
+                <a:latin typeface="Calibri" pitchFamily="34" charset="0"/>
+                <a:ea typeface="Calibri" pitchFamily="34" charset="-122"/>
+                <a:cs typeface="Calibri" pitchFamily="34" charset="-120"/>
+              </a:rPr>
+              <a:t>100,00%</a:t>
+            </a:r>
+            <a:endParaRPr lang="en-US" sz="750" dirty="0"/>
+          </a:p>
+        </p:txBody>
+      </p:sp>
+      <p:sp>
+        <p:nvSpPr>
+          <p:cNvPr id="10" name="Shape 8"/>
+          <p:cNvSpPr/>
+          <p:nvPr/>
+        </p:nvSpPr>
+        <p:spPr>
+          <a:xfrm>
+            <a:off x="118872" y="2002536"/>
             <a:ext cx="2212848" cy="0"/>
           </a:xfrm>
           <a:prstGeom prst="line">
@@ -33375,13 +33453,13 @@
       </p:sp>
       <p:sp>
         <p:nvSpPr>
-          <p:cNvPr id="9" name="Text 7"/>
+          <p:cNvPr id="11" name="Text 9"/>
           <p:cNvSpPr/>
           <p:nvPr/>
         </p:nvSpPr>
         <p:spPr>
           <a:xfrm>
-            <a:off x="118872" y="1901952"/>
+            <a:off x="118872" y="2093976"/>
             <a:ext cx="2212848" cy="164592"/>
           </a:xfrm>
           <a:prstGeom prst="rect">
@@ -33414,13 +33492,13 @@
       </p:sp>
       <p:sp>
         <p:nvSpPr>
-          <p:cNvPr id="10" name="Shape 8"/>
+          <p:cNvPr id="12" name="Shape 10"/>
           <p:cNvSpPr/>
           <p:nvPr/>
         </p:nvSpPr>
         <p:spPr>
           <a:xfrm>
-            <a:off x="118872" y="2084832"/>
+            <a:off x="118872" y="2276856"/>
             <a:ext cx="2212848" cy="0"/>
           </a:xfrm>
           <a:prstGeom prst="line">
@@ -33437,13 +33515,13 @@
       </p:sp>
       <p:sp>
         <p:nvSpPr>
-          <p:cNvPr id="11" name="Text 9"/>
+          <p:cNvPr id="13" name="Text 11"/>
           <p:cNvSpPr/>
           <p:nvPr/>
         </p:nvSpPr>
         <p:spPr>
           <a:xfrm>
-            <a:off x="118872" y="2157984"/>
+            <a:off x="118872" y="2350008"/>
             <a:ext cx="1371600" cy="164592"/>
           </a:xfrm>
           <a:prstGeom prst="rect">
@@ -33476,13 +33554,13 @@
       </p:sp>
       <p:sp>
         <p:nvSpPr>
-          <p:cNvPr id="12" name="Text 10"/>
+          <p:cNvPr id="14" name="Text 12"/>
           <p:cNvSpPr/>
           <p:nvPr/>
         </p:nvSpPr>
         <p:spPr>
           <a:xfrm>
-            <a:off x="1490472" y="2157984"/>
+            <a:off x="1490472" y="2350008"/>
             <a:ext cx="841248" cy="164592"/>
           </a:xfrm>
           <a:prstGeom prst="rect">
@@ -33507,7 +33585,7 @@
                 <a:ea typeface="Calibri" pitchFamily="34" charset="-122"/>
                 <a:cs typeface="Calibri" pitchFamily="34" charset="-120"/>
               </a:rPr>
-              <a:t>100,00%</a:t>
+              <a:t>55,04%</a:t>
             </a:r>
             <a:endParaRPr lang="en-US" sz="700" dirty="0"/>
           </a:p>
@@ -33515,13 +33593,247 @@
       </p:sp>
       <p:sp>
         <p:nvSpPr>
-          <p:cNvPr id="13" name="Shape 11"/>
+          <p:cNvPr id="15" name="Text 13"/>
           <p:cNvSpPr/>
           <p:nvPr/>
         </p:nvSpPr>
         <p:spPr>
           <a:xfrm>
-            <a:off x="118872" y="2423160"/>
+            <a:off x="118872" y="2523744"/>
+            <a:ext cx="1371600" cy="164592"/>
+          </a:xfrm>
+          <a:prstGeom prst="rect">
+            <a:avLst/>
+          </a:prstGeom>
+          <a:noFill/>
+          <a:ln/>
+        </p:spPr>
+        <p:txBody>
+          <a:bodyPr wrap="square" lIns="0" tIns="0" rIns="0" bIns="0" rtlCol="0" anchor="ctr"/>
+          <a:lstStyle/>
+          <a:p>
+            <a:pPr indent="0" marL="0">
+              <a:buNone/>
+            </a:pPr>
+            <a:r>
+              <a:rPr lang="en-US" sz="700" dirty="0">
+                <a:solidFill>
+                  <a:srgbClr val="000000"/>
+                </a:solidFill>
+                <a:latin typeface="Calibri" pitchFamily="34" charset="0"/>
+                <a:ea typeface="Calibri" pitchFamily="34" charset="-122"/>
+                <a:cs typeface="Calibri" pitchFamily="34" charset="-120"/>
+              </a:rPr>
+              <a:t>Inmob</a:t>
+            </a:r>
+            <a:endParaRPr lang="en-US" sz="700" dirty="0"/>
+          </a:p>
+        </p:txBody>
+      </p:sp>
+      <p:sp>
+        <p:nvSpPr>
+          <p:cNvPr id="16" name="Text 14"/>
+          <p:cNvSpPr/>
+          <p:nvPr/>
+        </p:nvSpPr>
+        <p:spPr>
+          <a:xfrm>
+            <a:off x="1490472" y="2523744"/>
+            <a:ext cx="841248" cy="164592"/>
+          </a:xfrm>
+          <a:prstGeom prst="rect">
+            <a:avLst/>
+          </a:prstGeom>
+          <a:noFill/>
+          <a:ln/>
+        </p:spPr>
+        <p:txBody>
+          <a:bodyPr wrap="square" lIns="0" tIns="0" rIns="0" bIns="0" rtlCol="0" anchor="ctr"/>
+          <a:lstStyle/>
+          <a:p>
+            <a:pPr algn="r" indent="0" marL="0">
+              <a:buNone/>
+            </a:pPr>
+            <a:r>
+              <a:rPr lang="en-US" sz="700" b="1" dirty="0">
+                <a:solidFill>
+                  <a:srgbClr val="000000"/>
+                </a:solidFill>
+                <a:latin typeface="Calibri" pitchFamily="34" charset="0"/>
+                <a:ea typeface="Calibri" pitchFamily="34" charset="-122"/>
+                <a:cs typeface="Calibri" pitchFamily="34" charset="-120"/>
+              </a:rPr>
+              <a:t>33,45%</a:t>
+            </a:r>
+            <a:endParaRPr lang="en-US" sz="700" dirty="0"/>
+          </a:p>
+        </p:txBody>
+      </p:sp>
+      <p:sp>
+        <p:nvSpPr>
+          <p:cNvPr id="17" name="Text 15"/>
+          <p:cNvSpPr/>
+          <p:nvPr/>
+        </p:nvSpPr>
+        <p:spPr>
+          <a:xfrm>
+            <a:off x="118872" y="2697480"/>
+            <a:ext cx="1371600" cy="164592"/>
+          </a:xfrm>
+          <a:prstGeom prst="rect">
+            <a:avLst/>
+          </a:prstGeom>
+          <a:noFill/>
+          <a:ln/>
+        </p:spPr>
+        <p:txBody>
+          <a:bodyPr wrap="square" lIns="0" tIns="0" rIns="0" bIns="0" rtlCol="0" anchor="ctr"/>
+          <a:lstStyle/>
+          <a:p>
+            <a:pPr indent="0" marL="0">
+              <a:buNone/>
+            </a:pPr>
+            <a:r>
+              <a:rPr lang="en-US" sz="700" dirty="0">
+                <a:solidFill>
+                  <a:srgbClr val="000000"/>
+                </a:solidFill>
+                <a:latin typeface="Calibri" pitchFamily="34" charset="0"/>
+                <a:ea typeface="Calibri" pitchFamily="34" charset="-122"/>
+                <a:cs typeface="Calibri" pitchFamily="34" charset="-120"/>
+              </a:rPr>
+              <a:t>Nota estructurada</a:t>
+            </a:r>
+            <a:endParaRPr lang="en-US" sz="700" dirty="0"/>
+          </a:p>
+        </p:txBody>
+      </p:sp>
+      <p:sp>
+        <p:nvSpPr>
+          <p:cNvPr id="18" name="Text 16"/>
+          <p:cNvSpPr/>
+          <p:nvPr/>
+        </p:nvSpPr>
+        <p:spPr>
+          <a:xfrm>
+            <a:off x="1490472" y="2697480"/>
+            <a:ext cx="841248" cy="164592"/>
+          </a:xfrm>
+          <a:prstGeom prst="rect">
+            <a:avLst/>
+          </a:prstGeom>
+          <a:noFill/>
+          <a:ln/>
+        </p:spPr>
+        <p:txBody>
+          <a:bodyPr wrap="square" lIns="0" tIns="0" rIns="0" bIns="0" rtlCol="0" anchor="ctr"/>
+          <a:lstStyle/>
+          <a:p>
+            <a:pPr algn="r" indent="0" marL="0">
+              <a:buNone/>
+            </a:pPr>
+            <a:r>
+              <a:rPr lang="en-US" sz="700" b="1" dirty="0">
+                <a:solidFill>
+                  <a:srgbClr val="000000"/>
+                </a:solidFill>
+                <a:latin typeface="Calibri" pitchFamily="34" charset="0"/>
+                <a:ea typeface="Calibri" pitchFamily="34" charset="-122"/>
+                <a:cs typeface="Calibri" pitchFamily="34" charset="-120"/>
+              </a:rPr>
+              <a:t>8,84%</a:t>
+            </a:r>
+            <a:endParaRPr lang="en-US" sz="700" dirty="0"/>
+          </a:p>
+        </p:txBody>
+      </p:sp>
+      <p:sp>
+        <p:nvSpPr>
+          <p:cNvPr id="19" name="Text 17"/>
+          <p:cNvSpPr/>
+          <p:nvPr/>
+        </p:nvSpPr>
+        <p:spPr>
+          <a:xfrm>
+            <a:off x="118872" y="2871216"/>
+            <a:ext cx="1371600" cy="164592"/>
+          </a:xfrm>
+          <a:prstGeom prst="rect">
+            <a:avLst/>
+          </a:prstGeom>
+          <a:noFill/>
+          <a:ln/>
+        </p:spPr>
+        <p:txBody>
+          <a:bodyPr wrap="square" lIns="0" tIns="0" rIns="0" bIns="0" rtlCol="0" anchor="ctr"/>
+          <a:lstStyle/>
+          <a:p>
+            <a:pPr indent="0" marL="0">
+              <a:buNone/>
+            </a:pPr>
+            <a:r>
+              <a:rPr lang="en-US" sz="700" dirty="0">
+                <a:solidFill>
+                  <a:srgbClr val="000000"/>
+                </a:solidFill>
+                <a:latin typeface="Calibri" pitchFamily="34" charset="0"/>
+                <a:ea typeface="Calibri" pitchFamily="34" charset="-122"/>
+                <a:cs typeface="Calibri" pitchFamily="34" charset="-120"/>
+              </a:rPr>
+              <a:t>Revisar</a:t>
+            </a:r>
+            <a:endParaRPr lang="en-US" sz="700" dirty="0"/>
+          </a:p>
+        </p:txBody>
+      </p:sp>
+      <p:sp>
+        <p:nvSpPr>
+          <p:cNvPr id="20" name="Text 18"/>
+          <p:cNvSpPr/>
+          <p:nvPr/>
+        </p:nvSpPr>
+        <p:spPr>
+          <a:xfrm>
+            <a:off x="1490472" y="2871216"/>
+            <a:ext cx="841248" cy="164592"/>
+          </a:xfrm>
+          <a:prstGeom prst="rect">
+            <a:avLst/>
+          </a:prstGeom>
+          <a:noFill/>
+          <a:ln/>
+        </p:spPr>
+        <p:txBody>
+          <a:bodyPr wrap="square" lIns="0" tIns="0" rIns="0" bIns="0" rtlCol="0" anchor="ctr"/>
+          <a:lstStyle/>
+          <a:p>
+            <a:pPr algn="r" indent="0" marL="0">
+              <a:buNone/>
+            </a:pPr>
+            <a:r>
+              <a:rPr lang="en-US" sz="700" b="1" dirty="0">
+                <a:solidFill>
+                  <a:srgbClr val="000000"/>
+                </a:solidFill>
+                <a:latin typeface="Calibri" pitchFamily="34" charset="0"/>
+                <a:ea typeface="Calibri" pitchFamily="34" charset="-122"/>
+                <a:cs typeface="Calibri" pitchFamily="34" charset="-120"/>
+              </a:rPr>
+              <a:t>2,67%</a:t>
+            </a:r>
+            <a:endParaRPr lang="en-US" sz="700" dirty="0"/>
+          </a:p>
+        </p:txBody>
+      </p:sp>
+      <p:sp>
+        <p:nvSpPr>
+          <p:cNvPr id="21" name="Shape 19"/>
+          <p:cNvSpPr/>
+          <p:nvPr/>
+        </p:nvSpPr>
+        <p:spPr>
+          <a:xfrm>
+            <a:off x="118872" y="3136392"/>
             <a:ext cx="2212848" cy="0"/>
           </a:xfrm>
           <a:prstGeom prst="line">
@@ -33538,13 +33850,13 @@
       </p:sp>
       <p:sp>
         <p:nvSpPr>
-          <p:cNvPr id="14" name="Text 12"/>
+          <p:cNvPr id="22" name="Text 20"/>
           <p:cNvSpPr/>
           <p:nvPr/>
         </p:nvSpPr>
         <p:spPr>
           <a:xfrm>
-            <a:off x="118872" y="2514600"/>
+            <a:off x="118872" y="3227832"/>
             <a:ext cx="2212848" cy="164592"/>
           </a:xfrm>
           <a:prstGeom prst="rect">
@@ -33577,13 +33889,13 @@
       </p:sp>
       <p:sp>
         <p:nvSpPr>
-          <p:cNvPr id="15" name="Shape 13"/>
+          <p:cNvPr id="23" name="Shape 21"/>
           <p:cNvSpPr/>
           <p:nvPr/>
         </p:nvSpPr>
         <p:spPr>
           <a:xfrm>
-            <a:off x="118872" y="2697480"/>
+            <a:off x="118872" y="3410712"/>
             <a:ext cx="2212848" cy="0"/>
           </a:xfrm>
           <a:prstGeom prst="line">
@@ -33600,13 +33912,13 @@
       </p:sp>
       <p:sp>
         <p:nvSpPr>
-          <p:cNvPr id="16" name="Text 14"/>
+          <p:cNvPr id="24" name="Text 22"/>
           <p:cNvSpPr/>
           <p:nvPr/>
         </p:nvSpPr>
         <p:spPr>
           <a:xfrm>
-            <a:off x="118872" y="2770632"/>
+            <a:off x="118872" y="3483864"/>
             <a:ext cx="1371600" cy="182880"/>
           </a:xfrm>
           <a:prstGeom prst="rect">
@@ -33639,13 +33951,13 @@
       </p:sp>
       <p:sp>
         <p:nvSpPr>
-          <p:cNvPr id="17" name="Text 15"/>
+          <p:cNvPr id="25" name="Text 23"/>
           <p:cNvSpPr/>
           <p:nvPr/>
         </p:nvSpPr>
         <p:spPr>
           <a:xfrm>
-            <a:off x="1490472" y="2770632"/>
+            <a:off x="1490472" y="3483864"/>
             <a:ext cx="841248" cy="182880"/>
           </a:xfrm>
           <a:prstGeom prst="rect">
@@ -33670,7 +33982,7 @@
                 <a:ea typeface="Calibri" pitchFamily="34" charset="-122"/>
                 <a:cs typeface="Calibri" pitchFamily="34" charset="-120"/>
               </a:rPr>
-              <a:t>63,16%</a:t>
+              <a:t>78,10%</a:t>
             </a:r>
             <a:endParaRPr lang="en-US" sz="750" dirty="0"/>
           </a:p>
@@ -33678,13 +33990,13 @@
       </p:sp>
       <p:sp>
         <p:nvSpPr>
-          <p:cNvPr id="18" name="Text 16"/>
+          <p:cNvPr id="26" name="Text 24"/>
           <p:cNvSpPr/>
           <p:nvPr/>
         </p:nvSpPr>
         <p:spPr>
           <a:xfrm>
-            <a:off x="118872" y="2971800"/>
+            <a:off x="118872" y="3685032"/>
             <a:ext cx="1371600" cy="182880"/>
           </a:xfrm>
           <a:prstGeom prst="rect">
@@ -33717,13 +34029,13 @@
       </p:sp>
       <p:sp>
         <p:nvSpPr>
-          <p:cNvPr id="19" name="Text 17"/>
+          <p:cNvPr id="27" name="Text 25"/>
           <p:cNvSpPr/>
           <p:nvPr/>
         </p:nvSpPr>
         <p:spPr>
           <a:xfrm>
-            <a:off x="1490472" y="2971800"/>
+            <a:off x="1490472" y="3685032"/>
             <a:ext cx="841248" cy="182880"/>
           </a:xfrm>
           <a:prstGeom prst="rect">
@@ -33748,7 +34060,7 @@
                 <a:ea typeface="Calibri" pitchFamily="34" charset="-122"/>
                 <a:cs typeface="Calibri" pitchFamily="34" charset="-120"/>
               </a:rPr>
-              <a:t>28,00%</a:t>
+              <a:t>19,23%</a:t>
             </a:r>
             <a:endParaRPr lang="en-US" sz="750" dirty="0"/>
           </a:p>
@@ -33756,13 +34068,13 @@
       </p:sp>
       <p:sp>
         <p:nvSpPr>
-          <p:cNvPr id="20" name="Text 18"/>
+          <p:cNvPr id="28" name="Text 26"/>
           <p:cNvSpPr/>
           <p:nvPr/>
         </p:nvSpPr>
         <p:spPr>
           <a:xfrm>
-            <a:off x="118872" y="3172968"/>
+            <a:off x="118872" y="3886200"/>
             <a:ext cx="1371600" cy="182880"/>
           </a:xfrm>
           <a:prstGeom prst="rect">
@@ -33795,13 +34107,13 @@
       </p:sp>
       <p:sp>
         <p:nvSpPr>
-          <p:cNvPr id="21" name="Text 19"/>
+          <p:cNvPr id="29" name="Text 27"/>
           <p:cNvSpPr/>
           <p:nvPr/>
         </p:nvSpPr>
         <p:spPr>
           <a:xfrm>
-            <a:off x="1490472" y="3172968"/>
+            <a:off x="1490472" y="3886200"/>
             <a:ext cx="841248" cy="182880"/>
           </a:xfrm>
           <a:prstGeom prst="rect">
@@ -33826,7 +34138,7 @@
                 <a:ea typeface="Calibri" pitchFamily="34" charset="-122"/>
                 <a:cs typeface="Calibri" pitchFamily="34" charset="-120"/>
               </a:rPr>
-              <a:t>8,84%</a:t>
+              <a:t>2,67%</a:t>
             </a:r>
             <a:endParaRPr lang="en-US" sz="750" dirty="0"/>
           </a:p>
@@ -33834,13 +34146,13 @@
       </p:sp>
       <p:sp>
         <p:nvSpPr>
-          <p:cNvPr id="22" name="Text 20"/>
+          <p:cNvPr id="30" name="Text 28"/>
           <p:cNvSpPr/>
           <p:nvPr/>
         </p:nvSpPr>
         <p:spPr>
           <a:xfrm>
-            <a:off x="118872" y="3374136"/>
+            <a:off x="118872" y="4087368"/>
             <a:ext cx="1371600" cy="182880"/>
           </a:xfrm>
           <a:prstGeom prst="rect">
@@ -33873,13 +34185,13 @@
       </p:sp>
       <p:sp>
         <p:nvSpPr>
-          <p:cNvPr id="23" name="Text 21"/>
+          <p:cNvPr id="31" name="Text 29"/>
           <p:cNvSpPr/>
           <p:nvPr/>
         </p:nvSpPr>
         <p:spPr>
           <a:xfrm>
-            <a:off x="1490472" y="3374136"/>
+            <a:off x="1490472" y="4087368"/>
             <a:ext cx="841248" cy="182880"/>
           </a:xfrm>
           <a:prstGeom prst="rect">
@@ -33912,7 +34224,7 @@
       </p:sp>
       <p:sp>
         <p:nvSpPr>
-          <p:cNvPr id="24" name="Text 22"/>
+          <p:cNvPr id="32" name="Text 30"/>
           <p:cNvSpPr/>
           <p:nvPr/>
         </p:nvSpPr>
@@ -33951,7 +34263,7 @@
       </p:sp>
       <p:sp>
         <p:nvSpPr>
-          <p:cNvPr id="25" name="Shape 23"/>
+          <p:cNvPr id="33" name="Shape 31"/>
           <p:cNvSpPr/>
           <p:nvPr/>
         </p:nvSpPr>
@@ -33974,7 +34286,7 @@
       </p:sp>
       <p:sp>
         <p:nvSpPr>
-          <p:cNvPr id="26" name="Text 24"/>
+          <p:cNvPr id="34" name="Text 32"/>
           <p:cNvSpPr/>
           <p:nvPr/>
         </p:nvSpPr>
@@ -34030,7 +34342,7 @@
       </p:sp>
       <p:sp>
         <p:nvSpPr>
-          <p:cNvPr id="27" name="Text 25"/>
+          <p:cNvPr id="35" name="Text 33"/>
           <p:cNvSpPr/>
           <p:nvPr/>
         </p:nvSpPr>
@@ -34086,7 +34398,7 @@
       </p:sp>
       <p:sp>
         <p:nvSpPr>
-          <p:cNvPr id="28" name="Text 26"/>
+          <p:cNvPr id="36" name="Text 34"/>
           <p:cNvSpPr/>
           <p:nvPr/>
         </p:nvSpPr>
@@ -34142,7 +34454,7 @@
       </p:sp>
       <p:sp>
         <p:nvSpPr>
-          <p:cNvPr id="29" name="Text 27"/>
+          <p:cNvPr id="37" name="Text 35"/>
           <p:cNvSpPr/>
           <p:nvPr/>
         </p:nvSpPr>
@@ -34198,7 +34510,7 @@
       </p:sp>
       <p:sp>
         <p:nvSpPr>
-          <p:cNvPr id="30" name="Text 28"/>
+          <p:cNvPr id="38" name="Text 36"/>
           <p:cNvSpPr/>
           <p:nvPr/>
         </p:nvSpPr>
@@ -34254,7 +34566,7 @@
       </p:sp>
       <p:sp>
         <p:nvSpPr>
-          <p:cNvPr id="31" name="Text 29"/>
+          <p:cNvPr id="39" name="Text 37"/>
           <p:cNvSpPr/>
           <p:nvPr/>
         </p:nvSpPr>
@@ -34310,7 +34622,7 @@
       </p:sp>
       <p:sp>
         <p:nvSpPr>
-          <p:cNvPr id="32" name="Text 30"/>
+          <p:cNvPr id="40" name="Text 38"/>
           <p:cNvSpPr/>
           <p:nvPr/>
         </p:nvSpPr>
@@ -34366,7 +34678,7 @@
       </p:sp>
       <p:sp>
         <p:nvSpPr>
-          <p:cNvPr id="33" name="Text 31"/>
+          <p:cNvPr id="41" name="Text 39"/>
           <p:cNvSpPr/>
           <p:nvPr/>
         </p:nvSpPr>
@@ -34422,7 +34734,7 @@
       </p:sp>
       <p:sp>
         <p:nvSpPr>
-          <p:cNvPr id="34" name="Text 32"/>
+          <p:cNvPr id="42" name="Text 40"/>
           <p:cNvSpPr/>
           <p:nvPr/>
         </p:nvSpPr>
@@ -34478,7 +34790,7 @@
       </p:sp>
       <p:sp>
         <p:nvSpPr>
-          <p:cNvPr id="35" name="Shape 33"/>
+          <p:cNvPr id="43" name="Shape 41"/>
           <p:cNvSpPr/>
           <p:nvPr/>
         </p:nvSpPr>
@@ -34501,7 +34813,7 @@
       </p:sp>
       <p:sp>
         <p:nvSpPr>
-          <p:cNvPr id="36" name="Text 34"/>
+          <p:cNvPr id="44" name="Text 42"/>
           <p:cNvSpPr/>
           <p:nvPr/>
         </p:nvSpPr>
@@ -34540,7 +34852,7 @@
       </p:sp>
       <p:sp>
         <p:nvSpPr>
-          <p:cNvPr id="37" name="Shape 35"/>
+          <p:cNvPr id="45" name="Shape 43"/>
           <p:cNvSpPr/>
           <p:nvPr/>
         </p:nvSpPr>
@@ -34563,7 +34875,7 @@
       </p:sp>
       <p:sp>
         <p:nvSpPr>
-          <p:cNvPr id="38" name="Text 36"/>
+          <p:cNvPr id="46" name="Text 44"/>
           <p:cNvSpPr/>
           <p:nvPr/>
         </p:nvSpPr>

--- a/folletos/2026-04/pptx/FIP_VANTRUST_LIQUIDEZ_I.pptx
+++ b/folletos/2026-04/pptx/FIP_VANTRUST_LIQUIDEZ_I.pptx
@@ -6373,7 +6373,7 @@
                 <a:ea typeface="Calibri" pitchFamily="34" charset="-122"/>
                 <a:cs typeface="Calibri" pitchFamily="34" charset="-120"/>
               </a:rPr>
-              <a:t>prueba CLP</a:t>
+              <a:t>prueba 8 CLP</a:t>
             </a:r>
             <a:endParaRPr lang="en-US" sz="800" dirty="0"/>
           </a:p>

--- a/folletos/2026-04/pptx/FIP_VANTRUST_LIQUIDEZ_I.pptx
+++ b/folletos/2026-04/pptx/FIP_VANTRUST_LIQUIDEZ_I.pptx
@@ -3114,7 +3114,7 @@
                 <a:ea typeface="Calibri" pitchFamily="34" charset="-122"/>
                 <a:cs typeface="Calibri" pitchFamily="34" charset="-120"/>
               </a:rPr>
-              <a:t>prueba CLP</a:t>
+              <a:t>prueba 10 CLP</a:t>
             </a:r>
             <a:endParaRPr lang="en-US" sz="800" dirty="0"/>
           </a:p>

--- a/folletos/2026-04/pptx/FIP_VANTRUST_LIQUIDEZ_I.pptx
+++ b/folletos/2026-04/pptx/FIP_VANTRUST_LIQUIDEZ_I.pptx
@@ -3114,7 +3114,7 @@
                 <a:ea typeface="Calibri" pitchFamily="34" charset="-122"/>
                 <a:cs typeface="Calibri" pitchFamily="34" charset="-120"/>
               </a:rPr>
-              <a:t>prueba 10 CLP</a:t>
+              <a:t>prueba 11 CLP</a:t>
             </a:r>
             <a:endParaRPr lang="en-US" sz="800" dirty="0"/>
           </a:p>

--- a/folletos/2026-04/pptx/FIP_VANTRUST_LIQUIDEZ_I.pptx
+++ b/folletos/2026-04/pptx/FIP_VANTRUST_LIQUIDEZ_I.pptx
@@ -3131,7 +3131,7 @@
                 <a:ea typeface="Calibri" pitchFamily="34" charset="-122"/>
                 <a:cs typeface="Calibri" pitchFamily="34" charset="-120"/>
               </a:rPr>
-              <a:t>prueba CLP</a:t>
+              <a:t>prueba 11 CLP</a:t>
             </a:r>
             <a:endParaRPr lang="en-US" sz="800" dirty="0"/>
           </a:p>

--- a/folletos/2026-04/pptx/FIP_VANTRUST_LIQUIDEZ_I.pptx
+++ b/folletos/2026-04/pptx/FIP_VANTRUST_LIQUIDEZ_I.pptx
@@ -3131,7 +3131,7 @@
                 <a:ea typeface="Calibri" pitchFamily="34" charset="-122"/>
                 <a:cs typeface="Calibri" pitchFamily="34" charset="-120"/>
               </a:rPr>
-              <a:t>prueba 11 CLP</a:t>
+              <a:t>prueba 12 CLP</a:t>
             </a:r>
             <a:endParaRPr lang="en-US" sz="800" dirty="0"/>
           </a:p>

--- a/folletos/2026-04/pptx/FIP_VANTRUST_LIQUIDEZ_I.pptx
+++ b/folletos/2026-04/pptx/FIP_VANTRUST_LIQUIDEZ_I.pptx
@@ -3113,7 +3113,7 @@
                 <a:ea typeface="Calibri" pitchFamily="34" charset="-122"/>
                 <a:cs typeface="Calibri" pitchFamily="34" charset="-120"/>
               </a:rPr>
-              <a:t>prueba CLP</a:t>
+              <a:t>prueba 12 CLP</a:t>
             </a:r>
             <a:endParaRPr lang="en-US" sz="800" dirty="0"/>
           </a:p>

--- a/folletos/2026-04/pptx/FIP_VANTRUST_LIQUIDEZ_I.pptx
+++ b/folletos/2026-04/pptx/FIP_VANTRUST_LIQUIDEZ_I.pptx
@@ -3113,7 +3113,7 @@
                 <a:ea typeface="Calibri" pitchFamily="34" charset="-122"/>
                 <a:cs typeface="Calibri" pitchFamily="34" charset="-120"/>
               </a:rPr>
-              <a:t>prueba 12 CLP</a:t>
+              <a:t>prueba CLP</a:t>
             </a:r>
             <a:endParaRPr lang="en-US" sz="800" dirty="0"/>
           </a:p>
@@ -7350,7 +7350,7 @@
                           <a:ea typeface="Calibri" pitchFamily="34" charset="-122"/>
                           <a:cs typeface="Calibri" pitchFamily="34" charset="-120"/>
                         </a:rPr>
-                        <a:t>0.00%</a:t>
+                        <a:t>0.03%</a:t>
                       </a:r>
                       <a:endParaRPr lang="en-US" sz="500" dirty="0">
                         <a:latin typeface="Calibri" charset="0"/>
@@ -7415,7 +7415,7 @@
                           <a:ea typeface="Calibri" pitchFamily="34" charset="-122"/>
                           <a:cs typeface="Calibri" pitchFamily="34" charset="-120"/>
                         </a:rPr>
-                        <a:t>0.00%</a:t>
+                        <a:t>0.01%</a:t>
                       </a:r>
                       <a:endParaRPr lang="en-US" sz="500" dirty="0">
                         <a:latin typeface="Calibri" charset="0"/>
@@ -7480,7 +7480,7 @@
                           <a:ea typeface="Calibri" pitchFamily="34" charset="-122"/>
                           <a:cs typeface="Calibri" pitchFamily="34" charset="-120"/>
                         </a:rPr>
-                        <a:t>0.00%</a:t>
+                        <a:t>0.01%</a:t>
                       </a:r>
                       <a:endParaRPr lang="en-US" sz="500" dirty="0">
                         <a:latin typeface="Calibri" charset="0"/>
@@ -7545,7 +7545,7 @@
                           <a:ea typeface="Calibri" pitchFamily="34" charset="-122"/>
                           <a:cs typeface="Calibri" pitchFamily="34" charset="-120"/>
                         </a:rPr>
-                        <a:t>0.00%</a:t>
+                        <a:t>0.01%</a:t>
                       </a:r>
                       <a:endParaRPr lang="en-US" sz="500" dirty="0">
                         <a:latin typeface="Calibri" charset="0"/>
@@ -7610,7 +7610,7 @@
                           <a:ea typeface="Calibri" pitchFamily="34" charset="-122"/>
                           <a:cs typeface="Calibri" pitchFamily="34" charset="-120"/>
                         </a:rPr>
-                        <a:t>0.00%</a:t>
+                        <a:t>0.01%</a:t>
                       </a:r>
                       <a:endParaRPr lang="en-US" sz="500" dirty="0">
                         <a:latin typeface="Calibri" charset="0"/>
@@ -7675,7 +7675,7 @@
                           <a:ea typeface="Calibri" pitchFamily="34" charset="-122"/>
                           <a:cs typeface="Calibri" pitchFamily="34" charset="-120"/>
                         </a:rPr>
-                        <a:t>0.00%</a:t>
+                        <a:t>0.01%</a:t>
                       </a:r>
                       <a:endParaRPr lang="en-US" sz="500" dirty="0">
                         <a:latin typeface="Calibri" charset="0"/>
@@ -7740,7 +7740,7 @@
                           <a:ea typeface="Calibri" pitchFamily="34" charset="-122"/>
                           <a:cs typeface="Calibri" pitchFamily="34" charset="-120"/>
                         </a:rPr>
-                        <a:t>0.00%</a:t>
+                        <a:t>0.01%</a:t>
                       </a:r>
                       <a:endParaRPr lang="en-US" sz="500" dirty="0">
                         <a:latin typeface="Calibri" charset="0"/>
@@ -7870,7 +7870,7 @@
                           <a:ea typeface="Calibri" pitchFamily="34" charset="-122"/>
                           <a:cs typeface="Calibri" pitchFamily="34" charset="-120"/>
                         </a:rPr>
-                        <a:t>0.89%</a:t>
+                        <a:t>0.97%</a:t>
                       </a:r>
                       <a:endParaRPr lang="en-US" sz="500" dirty="0">
                         <a:latin typeface="Calibri" charset="0"/>
@@ -8272,7 +8272,7 @@
                           <a:ea typeface="Calibri" pitchFamily="34" charset="-122"/>
                           <a:cs typeface="Calibri" pitchFamily="34" charset="-120"/>
                         </a:rPr>
-                        <a:t>0.00%</a:t>
+                        <a:t>0.19%</a:t>
                       </a:r>
                       <a:endParaRPr lang="en-US" sz="500" dirty="0">
                         <a:latin typeface="Calibri" charset="0"/>
@@ -8337,7 +8337,7 @@
                           <a:ea typeface="Calibri" pitchFamily="34" charset="-122"/>
                           <a:cs typeface="Calibri" pitchFamily="34" charset="-120"/>
                         </a:rPr>
-                        <a:t>0.00%</a:t>
+                        <a:t>0.29%</a:t>
                       </a:r>
                       <a:endParaRPr lang="en-US" sz="500" dirty="0">
                         <a:latin typeface="Calibri" charset="0"/>
@@ -8402,7 +8402,7 @@
                           <a:ea typeface="Calibri" pitchFamily="34" charset="-122"/>
                           <a:cs typeface="Calibri" pitchFamily="34" charset="-120"/>
                         </a:rPr>
-                        <a:t>0.00%</a:t>
+                        <a:t>0.24%</a:t>
                       </a:r>
                       <a:endParaRPr lang="en-US" sz="500" dirty="0">
                         <a:latin typeface="Calibri" charset="0"/>
@@ -8467,7 +8467,7 @@
                           <a:ea typeface="Calibri" pitchFamily="34" charset="-122"/>
                           <a:cs typeface="Calibri" pitchFamily="34" charset="-120"/>
                         </a:rPr>
-                        <a:t>0.00%</a:t>
+                        <a:t>0.20%</a:t>
                       </a:r>
                       <a:endParaRPr lang="en-US" sz="500" dirty="0">
                         <a:latin typeface="Calibri" charset="0"/>
@@ -8532,7 +8532,7 @@
                           <a:ea typeface="Calibri" pitchFamily="34" charset="-122"/>
                           <a:cs typeface="Calibri" pitchFamily="34" charset="-120"/>
                         </a:rPr>
-                        <a:t>0.00%</a:t>
+                        <a:t>0.24%</a:t>
                       </a:r>
                       <a:endParaRPr lang="en-US" sz="500" dirty="0">
                         <a:latin typeface="Calibri" charset="0"/>
@@ -8597,7 +8597,7 @@
                           <a:ea typeface="Calibri" pitchFamily="34" charset="-122"/>
                           <a:cs typeface="Calibri" pitchFamily="34" charset="-120"/>
                         </a:rPr>
-                        <a:t>0.00%</a:t>
+                        <a:t>0.25%</a:t>
                       </a:r>
                       <a:endParaRPr lang="en-US" sz="500" dirty="0">
                         <a:latin typeface="Calibri" charset="0"/>
@@ -8662,7 +8662,7 @@
                           <a:ea typeface="Calibri" pitchFamily="34" charset="-122"/>
                           <a:cs typeface="Calibri" pitchFamily="34" charset="-120"/>
                         </a:rPr>
-                        <a:t>0.00%</a:t>
+                        <a:t>0.25%</a:t>
                       </a:r>
                       <a:endParaRPr lang="en-US" sz="500" dirty="0">
                         <a:latin typeface="Calibri" charset="0"/>
@@ -8727,7 +8727,7 @@
                           <a:ea typeface="Calibri" pitchFamily="34" charset="-122"/>
                           <a:cs typeface="Calibri" pitchFamily="34" charset="-120"/>
                         </a:rPr>
-                        <a:t>0.00%</a:t>
+                        <a:t>0.20%</a:t>
                       </a:r>
                       <a:endParaRPr lang="en-US" sz="500" dirty="0">
                         <a:latin typeface="Calibri" charset="0"/>
@@ -8792,7 +8792,7 @@
                           <a:ea typeface="Calibri" pitchFamily="34" charset="-122"/>
                           <a:cs typeface="Calibri" pitchFamily="34" charset="-120"/>
                         </a:rPr>
-                        <a:t>0.02%</a:t>
+                        <a:t>1.87%</a:t>
                       </a:r>
                       <a:endParaRPr lang="en-US" sz="500" dirty="0">
                         <a:latin typeface="Calibri" charset="0"/>
@@ -10020,7 +10020,7 @@
                           <a:ea typeface="Calibri" pitchFamily="34" charset="-122"/>
                           <a:cs typeface="Calibri" pitchFamily="34" charset="-120"/>
                         </a:rPr>
-                        <a:t>0.00%</a:t>
+                        <a:t>0.01%</a:t>
                       </a:r>
                       <a:endParaRPr lang="en-US" sz="500" dirty="0">
                         <a:latin typeface="Calibri" charset="0"/>
@@ -10085,7 +10085,7 @@
                           <a:ea typeface="Calibri" pitchFamily="34" charset="-122"/>
                           <a:cs typeface="Calibri" pitchFamily="34" charset="-120"/>
                         </a:rPr>
-                        <a:t>0.00%</a:t>
+                        <a:t>0.01%</a:t>
                       </a:r>
                       <a:endParaRPr lang="en-US" sz="500" dirty="0">
                         <a:latin typeface="Calibri" charset="0"/>
@@ -10150,7 +10150,7 @@
                           <a:ea typeface="Calibri" pitchFamily="34" charset="-122"/>
                           <a:cs typeface="Calibri" pitchFamily="34" charset="-120"/>
                         </a:rPr>
-                        <a:t>0.00%</a:t>
+                        <a:t>0.01%</a:t>
                       </a:r>
                       <a:endParaRPr lang="en-US" sz="500" dirty="0">
                         <a:latin typeface="Calibri" charset="0"/>
@@ -10215,7 +10215,7 @@
                           <a:ea typeface="Calibri" pitchFamily="34" charset="-122"/>
                           <a:cs typeface="Calibri" pitchFamily="34" charset="-120"/>
                         </a:rPr>
-                        <a:t>0.00%</a:t>
+                        <a:t>0.01%</a:t>
                       </a:r>
                       <a:endParaRPr lang="en-US" sz="500" dirty="0">
                         <a:latin typeface="Calibri" charset="0"/>
@@ -10280,7 +10280,7 @@
                           <a:ea typeface="Calibri" pitchFamily="34" charset="-122"/>
                           <a:cs typeface="Calibri" pitchFamily="34" charset="-120"/>
                         </a:rPr>
-                        <a:t>0.00%</a:t>
+                        <a:t>0.01%</a:t>
                       </a:r>
                       <a:endParaRPr lang="en-US" sz="500" dirty="0">
                         <a:latin typeface="Calibri" charset="0"/>
@@ -10345,7 +10345,7 @@
                           <a:ea typeface="Calibri" pitchFamily="34" charset="-122"/>
                           <a:cs typeface="Calibri" pitchFamily="34" charset="-120"/>
                         </a:rPr>
-                        <a:t>0.00%</a:t>
+                        <a:t>0.01%</a:t>
                       </a:r>
                       <a:endParaRPr lang="en-US" sz="500" dirty="0">
                         <a:latin typeface="Calibri" charset="0"/>
@@ -10410,7 +10410,7 @@
                           <a:ea typeface="Calibri" pitchFamily="34" charset="-122"/>
                           <a:cs typeface="Calibri" pitchFamily="34" charset="-120"/>
                         </a:rPr>
-                        <a:t>0.00%</a:t>
+                        <a:t>0.01%</a:t>
                       </a:r>
                       <a:endParaRPr lang="en-US" sz="500" dirty="0">
                         <a:latin typeface="Calibri" charset="0"/>
@@ -10475,7 +10475,7 @@
                           <a:ea typeface="Calibri" pitchFamily="34" charset="-122"/>
                           <a:cs typeface="Calibri" pitchFamily="34" charset="-120"/>
                         </a:rPr>
-                        <a:t>-0.00%</a:t>
+                        <a:t>-0.01%</a:t>
                       </a:r>
                       <a:endParaRPr lang="en-US" sz="500" dirty="0">
                         <a:latin typeface="Calibri" charset="0"/>
@@ -10540,7 +10540,7 @@
                           <a:ea typeface="Calibri" pitchFamily="34" charset="-122"/>
                           <a:cs typeface="Calibri" pitchFamily="34" charset="-120"/>
                         </a:rPr>
-                        <a:t>0.00%</a:t>
+                        <a:t>0.10%</a:t>
                       </a:r>
                       <a:endParaRPr lang="en-US" sz="500" dirty="0">
                         <a:latin typeface="Calibri" charset="0"/>
@@ -10605,7 +10605,7 @@
                           <a:ea typeface="Calibri" pitchFamily="34" charset="-122"/>
                           <a:cs typeface="Calibri" pitchFamily="34" charset="-120"/>
                         </a:rPr>
-                        <a:t>0.00%</a:t>
+                        <a:t>0.13%</a:t>
                       </a:r>
                       <a:endParaRPr lang="en-US" sz="500" dirty="0">
                         <a:latin typeface="Calibri" charset="0"/>
@@ -10735,7 +10735,7 @@
                           <a:ea typeface="Calibri" pitchFamily="34" charset="-122"/>
                           <a:cs typeface="Calibri" pitchFamily="34" charset="-120"/>
                         </a:rPr>
-                        <a:t>0.60%</a:t>
+                        <a:t>0.86%</a:t>
                       </a:r>
                       <a:endParaRPr lang="en-US" sz="500" dirty="0">
                         <a:latin typeface="Calibri" charset="0"/>
@@ -10921,7 +10921,7 @@
                           <a:ea typeface="Calibri" pitchFamily="34" charset="-122"/>
                           <a:cs typeface="Calibri" pitchFamily="34" charset="-120"/>
                         </a:rPr>
-                        <a:t>0.00%</a:t>
+                        <a:t>0.19%</a:t>
                       </a:r>
                       <a:endParaRPr lang="en-US" sz="500" dirty="0">
                         <a:latin typeface="Calibri" charset="0"/>
@@ -10986,7 +10986,7 @@
                           <a:ea typeface="Calibri" pitchFamily="34" charset="-122"/>
                           <a:cs typeface="Calibri" pitchFamily="34" charset="-120"/>
                         </a:rPr>
-                        <a:t>0.00%</a:t>
+                        <a:t>0.16%</a:t>
                       </a:r>
                       <a:endParaRPr lang="en-US" sz="500" dirty="0">
                         <a:latin typeface="Calibri" charset="0"/>
@@ -11051,7 +11051,7 @@
                           <a:ea typeface="Calibri" pitchFamily="34" charset="-122"/>
                           <a:cs typeface="Calibri" pitchFamily="34" charset="-120"/>
                         </a:rPr>
-                        <a:t>0.00%</a:t>
+                        <a:t>0.15%</a:t>
                       </a:r>
                       <a:endParaRPr lang="en-US" sz="500" dirty="0">
                         <a:latin typeface="Calibri" charset="0"/>
@@ -11116,7 +11116,7 @@
                           <a:ea typeface="Calibri" pitchFamily="34" charset="-122"/>
                           <a:cs typeface="Calibri" pitchFamily="34" charset="-120"/>
                         </a:rPr>
-                        <a:t>0.00%</a:t>
+                        <a:t>0.15%</a:t>
                       </a:r>
                       <a:endParaRPr lang="en-US" sz="500" dirty="0">
                         <a:latin typeface="Calibri" charset="0"/>
@@ -11181,7 +11181,7 @@
                           <a:ea typeface="Calibri" pitchFamily="34" charset="-122"/>
                           <a:cs typeface="Calibri" pitchFamily="34" charset="-120"/>
                         </a:rPr>
-                        <a:t>0.00%</a:t>
+                        <a:t>0.18%</a:t>
                       </a:r>
                       <a:endParaRPr lang="en-US" sz="500" dirty="0">
                         <a:latin typeface="Calibri" charset="0"/>
@@ -11246,7 +11246,7 @@
                           <a:ea typeface="Calibri" pitchFamily="34" charset="-122"/>
                           <a:cs typeface="Calibri" pitchFamily="34" charset="-120"/>
                         </a:rPr>
-                        <a:t>0.00%</a:t>
+                        <a:t>0.14%</a:t>
                       </a:r>
                       <a:endParaRPr lang="en-US" sz="500" dirty="0">
                         <a:latin typeface="Calibri" charset="0"/>
@@ -11311,7 +11311,7 @@
                           <a:ea typeface="Calibri" pitchFamily="34" charset="-122"/>
                           <a:cs typeface="Calibri" pitchFamily="34" charset="-120"/>
                         </a:rPr>
-                        <a:t>0.00%</a:t>
+                        <a:t>0.17%</a:t>
                       </a:r>
                       <a:endParaRPr lang="en-US" sz="500" dirty="0">
                         <a:latin typeface="Calibri" charset="0"/>
@@ -11376,7 +11376,7 @@
                           <a:ea typeface="Calibri" pitchFamily="34" charset="-122"/>
                           <a:cs typeface="Calibri" pitchFamily="34" charset="-120"/>
                         </a:rPr>
-                        <a:t>0.00%</a:t>
+                        <a:t>0.12%</a:t>
                       </a:r>
                       <a:endParaRPr lang="en-US" sz="500" dirty="0">
                         <a:latin typeface="Calibri" charset="0"/>
@@ -11441,7 +11441,7 @@
                           <a:ea typeface="Calibri" pitchFamily="34" charset="-122"/>
                           <a:cs typeface="Calibri" pitchFamily="34" charset="-120"/>
                         </a:rPr>
-                        <a:t>0.00%</a:t>
+                        <a:t>0.15%</a:t>
                       </a:r>
                       <a:endParaRPr lang="en-US" sz="500" dirty="0">
                         <a:latin typeface="Calibri" charset="0"/>
@@ -11506,7 +11506,7 @@
                           <a:ea typeface="Calibri" pitchFamily="34" charset="-122"/>
                           <a:cs typeface="Calibri" pitchFamily="34" charset="-120"/>
                         </a:rPr>
-                        <a:t>0.00%</a:t>
+                        <a:t>0.15%</a:t>
                       </a:r>
                       <a:endParaRPr lang="en-US" sz="500" dirty="0">
                         <a:latin typeface="Calibri" charset="0"/>
@@ -11571,7 +11571,7 @@
                           <a:ea typeface="Calibri" pitchFamily="34" charset="-122"/>
                           <a:cs typeface="Calibri" pitchFamily="34" charset="-120"/>
                         </a:rPr>
-                        <a:t>0.00%</a:t>
+                        <a:t>0.16%</a:t>
                       </a:r>
                       <a:endParaRPr lang="en-US" sz="500" dirty="0">
                         <a:latin typeface="Calibri" charset="0"/>
@@ -11636,7 +11636,7 @@
                           <a:ea typeface="Calibri" pitchFamily="34" charset="-122"/>
                           <a:cs typeface="Calibri" pitchFamily="34" charset="-120"/>
                         </a:rPr>
-                        <a:t>0.00%</a:t>
+                        <a:t>0.24%</a:t>
                       </a:r>
                       <a:endParaRPr lang="en-US" sz="500" dirty="0">
                         <a:latin typeface="Calibri" charset="0"/>
@@ -11701,7 +11701,7 @@
                           <a:ea typeface="Calibri" pitchFamily="34" charset="-122"/>
                           <a:cs typeface="Calibri" pitchFamily="34" charset="-120"/>
                         </a:rPr>
-                        <a:t>0.02%</a:t>
+                        <a:t>2.00%</a:t>
                       </a:r>
                       <a:endParaRPr lang="en-US" sz="500" dirty="0">
                         <a:latin typeface="Calibri" charset="0"/>
@@ -12929,7 +12929,7 @@
                           <a:ea typeface="Calibri" pitchFamily="34" charset="-122"/>
                           <a:cs typeface="Calibri" pitchFamily="34" charset="-120"/>
                         </a:rPr>
-                        <a:t>0.00%</a:t>
+                        <a:t>0.33%</a:t>
                       </a:r>
                       <a:endParaRPr lang="en-US" sz="500" dirty="0">
                         <a:latin typeface="Calibri" charset="0"/>
@@ -12994,7 +12994,7 @@
                           <a:ea typeface="Calibri" pitchFamily="34" charset="-122"/>
                           <a:cs typeface="Calibri" pitchFamily="34" charset="-120"/>
                         </a:rPr>
-                        <a:t>0.00%</a:t>
+                        <a:t>0.38%</a:t>
                       </a:r>
                       <a:endParaRPr lang="en-US" sz="500" dirty="0">
                         <a:latin typeface="Calibri" charset="0"/>
@@ -13059,7 +13059,7 @@
                           <a:ea typeface="Calibri" pitchFamily="34" charset="-122"/>
                           <a:cs typeface="Calibri" pitchFamily="34" charset="-120"/>
                         </a:rPr>
-                        <a:t>0.00%</a:t>
+                        <a:t>0.46%</a:t>
                       </a:r>
                       <a:endParaRPr lang="en-US" sz="500" dirty="0">
                         <a:latin typeface="Calibri" charset="0"/>
@@ -13124,7 +13124,7 @@
                           <a:ea typeface="Calibri" pitchFamily="34" charset="-122"/>
                           <a:cs typeface="Calibri" pitchFamily="34" charset="-120"/>
                         </a:rPr>
-                        <a:t>0.01%</a:t>
+                        <a:t>0.55%</a:t>
                       </a:r>
                       <a:endParaRPr lang="en-US" sz="500" dirty="0">
                         <a:latin typeface="Calibri" charset="0"/>
@@ -13189,7 +13189,7 @@
                           <a:ea typeface="Calibri" pitchFamily="34" charset="-122"/>
                           <a:cs typeface="Calibri" pitchFamily="34" charset="-120"/>
                         </a:rPr>
-                        <a:t>0.01%</a:t>
+                        <a:t>0.59%</a:t>
                       </a:r>
                       <a:endParaRPr lang="en-US" sz="500" dirty="0">
                         <a:latin typeface="Calibri" charset="0"/>
@@ -13254,7 +13254,7 @@
                           <a:ea typeface="Calibri" pitchFamily="34" charset="-122"/>
                           <a:cs typeface="Calibri" pitchFamily="34" charset="-120"/>
                         </a:rPr>
-                        <a:t>0.01%</a:t>
+                        <a:t>0.65%</a:t>
                       </a:r>
                       <a:endParaRPr lang="en-US" sz="500" dirty="0">
                         <a:latin typeface="Calibri" charset="0"/>
@@ -13319,7 +13319,7 @@
                           <a:ea typeface="Calibri" pitchFamily="34" charset="-122"/>
                           <a:cs typeface="Calibri" pitchFamily="34" charset="-120"/>
                         </a:rPr>
-                        <a:t>0.01%</a:t>
+                        <a:t>0.70%</a:t>
                       </a:r>
                       <a:endParaRPr lang="en-US" sz="500" dirty="0">
                         <a:latin typeface="Calibri" charset="0"/>
@@ -13384,7 +13384,7 @@
                           <a:ea typeface="Calibri" pitchFamily="34" charset="-122"/>
                           <a:cs typeface="Calibri" pitchFamily="34" charset="-120"/>
                         </a:rPr>
-                        <a:t>0.01%</a:t>
+                        <a:t>0.73%</a:t>
                       </a:r>
                       <a:endParaRPr lang="en-US" sz="500" dirty="0">
                         <a:latin typeface="Calibri" charset="0"/>
@@ -13449,7 +13449,7 @@
                           <a:ea typeface="Calibri" pitchFamily="34" charset="-122"/>
                           <a:cs typeface="Calibri" pitchFamily="34" charset="-120"/>
                         </a:rPr>
-                        <a:t>0.01%</a:t>
+                        <a:t>0.72%</a:t>
                       </a:r>
                       <a:endParaRPr lang="en-US" sz="500" dirty="0">
                         <a:latin typeface="Calibri" charset="0"/>
@@ -13514,7 +13514,7 @@
                           <a:ea typeface="Calibri" pitchFamily="34" charset="-122"/>
                           <a:cs typeface="Calibri" pitchFamily="34" charset="-120"/>
                         </a:rPr>
-                        <a:t>0.01%</a:t>
+                        <a:t>0.87%</a:t>
                       </a:r>
                       <a:endParaRPr lang="en-US" sz="500" dirty="0">
                         <a:latin typeface="Calibri" charset="0"/>
@@ -13644,7 +13644,7 @@
                           <a:ea typeface="Calibri" pitchFamily="34" charset="-122"/>
                           <a:cs typeface="Calibri" pitchFamily="34" charset="-120"/>
                         </a:rPr>
-                        <a:t>8.50%</a:t>
+                        <a:t>15.11%</a:t>
                       </a:r>
                       <a:endParaRPr lang="en-US" sz="500" dirty="0">
                         <a:latin typeface="Calibri" charset="0"/>
@@ -13830,7 +13830,7 @@
                           <a:ea typeface="Calibri" pitchFamily="34" charset="-122"/>
                           <a:cs typeface="Calibri" pitchFamily="34" charset="-120"/>
                         </a:rPr>
-                        <a:t>0.00%</a:t>
+                        <a:t>0.34%</a:t>
                       </a:r>
                       <a:endParaRPr lang="en-US" sz="500" dirty="0">
                         <a:latin typeface="Calibri" charset="0"/>
@@ -13895,7 +13895,7 @@
                           <a:ea typeface="Calibri" pitchFamily="34" charset="-122"/>
                           <a:cs typeface="Calibri" pitchFamily="34" charset="-120"/>
                         </a:rPr>
-                        <a:t>0.00%</a:t>
+                        <a:t>0.41%</a:t>
                       </a:r>
                       <a:endParaRPr lang="en-US" sz="500" dirty="0">
                         <a:latin typeface="Calibri" charset="0"/>
@@ -13960,7 +13960,7 @@
                           <a:ea typeface="Calibri" pitchFamily="34" charset="-122"/>
                           <a:cs typeface="Calibri" pitchFamily="34" charset="-120"/>
                         </a:rPr>
-                        <a:t>0.00%</a:t>
+                        <a:t>0.47%</a:t>
                       </a:r>
                       <a:endParaRPr lang="en-US" sz="500" dirty="0">
                         <a:latin typeface="Calibri" charset="0"/>
@@ -14025,7 +14025,7 @@
                           <a:ea typeface="Calibri" pitchFamily="34" charset="-122"/>
                           <a:cs typeface="Calibri" pitchFamily="34" charset="-120"/>
                         </a:rPr>
-                        <a:t>0.01%</a:t>
+                        <a:t>0.63%</a:t>
                       </a:r>
                       <a:endParaRPr lang="en-US" sz="500" dirty="0">
                         <a:latin typeface="Calibri" charset="0"/>
@@ -14090,7 +14090,7 @@
                           <a:ea typeface="Calibri" pitchFamily="34" charset="-122"/>
                           <a:cs typeface="Calibri" pitchFamily="34" charset="-120"/>
                         </a:rPr>
-                        <a:t>0.01%</a:t>
+                        <a:t>0.82%</a:t>
                       </a:r>
                       <a:endParaRPr lang="en-US" sz="500" dirty="0">
                         <a:latin typeface="Calibri" charset="0"/>
@@ -14155,7 +14155,7 @@
                           <a:ea typeface="Calibri" pitchFamily="34" charset="-122"/>
                           <a:cs typeface="Calibri" pitchFamily="34" charset="-120"/>
                         </a:rPr>
-                        <a:t>0.01%</a:t>
+                        <a:t>0.78%</a:t>
                       </a:r>
                       <a:endParaRPr lang="en-US" sz="500" dirty="0">
                         <a:latin typeface="Calibri" charset="0"/>
@@ -14220,7 +14220,7 @@
                           <a:ea typeface="Calibri" pitchFamily="34" charset="-122"/>
                           <a:cs typeface="Calibri" pitchFamily="34" charset="-120"/>
                         </a:rPr>
-                        <a:t>0.01%</a:t>
+                        <a:t>0.82%</a:t>
                       </a:r>
                       <a:endParaRPr lang="en-US" sz="500" dirty="0">
                         <a:latin typeface="Calibri" charset="0"/>
@@ -14285,7 +14285,7 @@
                           <a:ea typeface="Calibri" pitchFamily="34" charset="-122"/>
                           <a:cs typeface="Calibri" pitchFamily="34" charset="-120"/>
                         </a:rPr>
-                        <a:t>0.01%</a:t>
+                        <a:t>0.88%</a:t>
                       </a:r>
                       <a:endParaRPr lang="en-US" sz="500" dirty="0">
                         <a:latin typeface="Calibri" charset="0"/>
@@ -14350,7 +14350,7 @@
                           <a:ea typeface="Calibri" pitchFamily="34" charset="-122"/>
                           <a:cs typeface="Calibri" pitchFamily="34" charset="-120"/>
                         </a:rPr>
-                        <a:t>0.01%</a:t>
+                        <a:t>0.87%</a:t>
                       </a:r>
                       <a:endParaRPr lang="en-US" sz="500" dirty="0">
                         <a:latin typeface="Calibri" charset="0"/>
@@ -14415,7 +14415,7 @@
                           <a:ea typeface="Calibri" pitchFamily="34" charset="-122"/>
                           <a:cs typeface="Calibri" pitchFamily="34" charset="-120"/>
                         </a:rPr>
-                        <a:t>0.01%</a:t>
+                        <a:t>0.92%</a:t>
                       </a:r>
                       <a:endParaRPr lang="en-US" sz="500" dirty="0">
                         <a:latin typeface="Calibri" charset="0"/>
@@ -14480,7 +14480,7 @@
                           <a:ea typeface="Calibri" pitchFamily="34" charset="-122"/>
                           <a:cs typeface="Calibri" pitchFamily="34" charset="-120"/>
                         </a:rPr>
-                        <a:t>0.01%</a:t>
+                        <a:t>1.11%</a:t>
                       </a:r>
                       <a:endParaRPr lang="en-US" sz="500" dirty="0">
                         <a:latin typeface="Calibri" charset="0"/>
@@ -14545,7 +14545,7 @@
                           <a:ea typeface="Calibri" pitchFamily="34" charset="-122"/>
                           <a:cs typeface="Calibri" pitchFamily="34" charset="-120"/>
                         </a:rPr>
-                        <a:t>0.01%</a:t>
+                        <a:t>1.00%</a:t>
                       </a:r>
                       <a:endParaRPr lang="en-US" sz="500" dirty="0">
                         <a:latin typeface="Calibri" charset="0"/>
@@ -14610,7 +14610,7 @@
                           <a:ea typeface="Calibri" pitchFamily="34" charset="-122"/>
                           <a:cs typeface="Calibri" pitchFamily="34" charset="-120"/>
                         </a:rPr>
-                        <a:t>0.09%</a:t>
+                        <a:t>9.43%</a:t>
                       </a:r>
                       <a:endParaRPr lang="en-US" sz="500" dirty="0">
                         <a:latin typeface="Calibri" charset="0"/>
@@ -15838,7 +15838,7 @@
                           <a:ea typeface="Calibri" pitchFamily="34" charset="-122"/>
                           <a:cs typeface="Calibri" pitchFamily="34" charset="-120"/>
                         </a:rPr>
-                        <a:t>0.01%</a:t>
+                        <a:t>0.74%</a:t>
                       </a:r>
                       <a:endParaRPr lang="en-US" sz="500" dirty="0">
                         <a:latin typeface="Calibri" charset="0"/>
@@ -15903,7 +15903,7 @@
                           <a:ea typeface="Calibri" pitchFamily="34" charset="-122"/>
                           <a:cs typeface="Calibri" pitchFamily="34" charset="-120"/>
                         </a:rPr>
-                        <a:t>0.01%</a:t>
+                        <a:t>0.82%</a:t>
                       </a:r>
                       <a:endParaRPr lang="en-US" sz="500" dirty="0">
                         <a:latin typeface="Calibri" charset="0"/>
@@ -15968,7 +15968,7 @@
                           <a:ea typeface="Calibri" pitchFamily="34" charset="-122"/>
                           <a:cs typeface="Calibri" pitchFamily="34" charset="-120"/>
                         </a:rPr>
-                        <a:t>0.01%</a:t>
+                        <a:t>0.75%</a:t>
                       </a:r>
                       <a:endParaRPr lang="en-US" sz="500" dirty="0">
                         <a:latin typeface="Calibri" charset="0"/>
@@ -16033,7 +16033,7 @@
                           <a:ea typeface="Calibri" pitchFamily="34" charset="-122"/>
                           <a:cs typeface="Calibri" pitchFamily="34" charset="-120"/>
                         </a:rPr>
-                        <a:t>0.01%</a:t>
+                        <a:t>0.88%</a:t>
                       </a:r>
                       <a:endParaRPr lang="en-US" sz="500" dirty="0">
                         <a:latin typeface="Calibri" charset="0"/>
@@ -16098,7 +16098,7 @@
                           <a:ea typeface="Calibri" pitchFamily="34" charset="-122"/>
                           <a:cs typeface="Calibri" pitchFamily="34" charset="-120"/>
                         </a:rPr>
-                        <a:t>0.01%</a:t>
+                        <a:t>0.80%</a:t>
                       </a:r>
                       <a:endParaRPr lang="en-US" sz="500" dirty="0">
                         <a:latin typeface="Calibri" charset="0"/>
@@ -16163,7 +16163,7 @@
                           <a:ea typeface="Calibri" pitchFamily="34" charset="-122"/>
                           <a:cs typeface="Calibri" pitchFamily="34" charset="-120"/>
                         </a:rPr>
-                        <a:t>0.01%</a:t>
+                        <a:t>0.82%</a:t>
                       </a:r>
                       <a:endParaRPr lang="en-US" sz="500" dirty="0">
                         <a:latin typeface="Calibri" charset="0"/>
@@ -16228,7 +16228,7 @@
                           <a:ea typeface="Calibri" pitchFamily="34" charset="-122"/>
                           <a:cs typeface="Calibri" pitchFamily="34" charset="-120"/>
                         </a:rPr>
-                        <a:t>0.01%</a:t>
+                        <a:t>0.76%</a:t>
                       </a:r>
                       <a:endParaRPr lang="en-US" sz="500" dirty="0">
                         <a:latin typeface="Calibri" charset="0"/>
@@ -16293,7 +16293,7 @@
                           <a:ea typeface="Calibri" pitchFamily="34" charset="-122"/>
                           <a:cs typeface="Calibri" pitchFamily="34" charset="-120"/>
                         </a:rPr>
-                        <a:t>0.01%</a:t>
+                        <a:t>0.68%</a:t>
                       </a:r>
                       <a:endParaRPr lang="en-US" sz="500" dirty="0">
                         <a:latin typeface="Calibri" charset="0"/>
@@ -16358,7 +16358,7 @@
                           <a:ea typeface="Calibri" pitchFamily="34" charset="-122"/>
                           <a:cs typeface="Calibri" pitchFamily="34" charset="-120"/>
                         </a:rPr>
-                        <a:t>0.01%</a:t>
+                        <a:t>0.67%</a:t>
                       </a:r>
                       <a:endParaRPr lang="en-US" sz="500" dirty="0">
                         <a:latin typeface="Calibri" charset="0"/>
@@ -16423,7 +16423,7 @@
                           <a:ea typeface="Calibri" pitchFamily="34" charset="-122"/>
                           <a:cs typeface="Calibri" pitchFamily="34" charset="-120"/>
                         </a:rPr>
-                        <a:t>0.01%</a:t>
+                        <a:t>0.62%</a:t>
                       </a:r>
                       <a:endParaRPr lang="en-US" sz="500" dirty="0">
                         <a:latin typeface="Calibri" charset="0"/>
@@ -16553,7 +16553,7 @@
                           <a:ea typeface="Calibri" pitchFamily="34" charset="-122"/>
                           <a:cs typeface="Calibri" pitchFamily="34" charset="-120"/>
                         </a:rPr>
-                        <a:t>7.57%</a:t>
+                        <a:t>15.86%</a:t>
                       </a:r>
                       <a:endParaRPr lang="en-US" sz="500" dirty="0">
                         <a:latin typeface="Calibri" charset="0"/>
@@ -16739,7 +16739,7 @@
                           <a:ea typeface="Calibri" pitchFamily="34" charset="-122"/>
                           <a:cs typeface="Calibri" pitchFamily="34" charset="-120"/>
                         </a:rPr>
-                        <a:t>0.01%</a:t>
+                        <a:t>1.12%</a:t>
                       </a:r>
                       <a:endParaRPr lang="en-US" sz="500" dirty="0">
                         <a:latin typeface="Calibri" charset="0"/>
@@ -16804,7 +16804,7 @@
                           <a:ea typeface="Calibri" pitchFamily="34" charset="-122"/>
                           <a:cs typeface="Calibri" pitchFamily="34" charset="-120"/>
                         </a:rPr>
-                        <a:t>0.01%</a:t>
+                        <a:t>1.02%</a:t>
                       </a:r>
                       <a:endParaRPr lang="en-US" sz="500" dirty="0">
                         <a:latin typeface="Calibri" charset="0"/>
@@ -16869,7 +16869,7 @@
                           <a:ea typeface="Calibri" pitchFamily="34" charset="-122"/>
                           <a:cs typeface="Calibri" pitchFamily="34" charset="-120"/>
                         </a:rPr>
-                        <a:t>0.01%</a:t>
+                        <a:t>1.07%</a:t>
                       </a:r>
                       <a:endParaRPr lang="en-US" sz="500" dirty="0">
                         <a:latin typeface="Calibri" charset="0"/>
@@ -16934,7 +16934,7 @@
                           <a:ea typeface="Calibri" pitchFamily="34" charset="-122"/>
                           <a:cs typeface="Calibri" pitchFamily="34" charset="-120"/>
                         </a:rPr>
-                        <a:t>0.01%</a:t>
+                        <a:t>0.98%</a:t>
                       </a:r>
                       <a:endParaRPr lang="en-US" sz="500" dirty="0">
                         <a:latin typeface="Calibri" charset="0"/>
@@ -16999,7 +16999,7 @@
                           <a:ea typeface="Calibri" pitchFamily="34" charset="-122"/>
                           <a:cs typeface="Calibri" pitchFamily="34" charset="-120"/>
                         </a:rPr>
-                        <a:t>0.01%</a:t>
+                        <a:t>1.13%</a:t>
                       </a:r>
                       <a:endParaRPr lang="en-US" sz="500" dirty="0">
                         <a:latin typeface="Calibri" charset="0"/>
@@ -17064,7 +17064,7 @@
                           <a:ea typeface="Calibri" pitchFamily="34" charset="-122"/>
                           <a:cs typeface="Calibri" pitchFamily="34" charset="-120"/>
                         </a:rPr>
-                        <a:t>0.01%</a:t>
+                        <a:t>1.03%</a:t>
                       </a:r>
                       <a:endParaRPr lang="en-US" sz="500" dirty="0">
                         <a:latin typeface="Calibri" charset="0"/>
@@ -17129,7 +17129,7 @@
                           <a:ea typeface="Calibri" pitchFamily="34" charset="-122"/>
                           <a:cs typeface="Calibri" pitchFamily="34" charset="-120"/>
                         </a:rPr>
-                        <a:t>0.01%</a:t>
+                        <a:t>1.07%</a:t>
                       </a:r>
                       <a:endParaRPr lang="en-US" sz="500" dirty="0">
                         <a:latin typeface="Calibri" charset="0"/>
@@ -17194,7 +17194,7 @@
                           <a:ea typeface="Calibri" pitchFamily="34" charset="-122"/>
                           <a:cs typeface="Calibri" pitchFamily="34" charset="-120"/>
                         </a:rPr>
-                        <a:t>0.01%</a:t>
+                        <a:t>0.97%</a:t>
                       </a:r>
                       <a:endParaRPr lang="en-US" sz="500" dirty="0">
                         <a:latin typeface="Calibri" charset="0"/>
@@ -17259,7 +17259,7 @@
                           <a:ea typeface="Calibri" pitchFamily="34" charset="-122"/>
                           <a:cs typeface="Calibri" pitchFamily="34" charset="-120"/>
                         </a:rPr>
-                        <a:t>0.01%</a:t>
+                        <a:t>0.93%</a:t>
                       </a:r>
                       <a:endParaRPr lang="en-US" sz="500" dirty="0">
                         <a:latin typeface="Calibri" charset="0"/>
@@ -17324,7 +17324,7 @@
                           <a:ea typeface="Calibri" pitchFamily="34" charset="-122"/>
                           <a:cs typeface="Calibri" pitchFamily="34" charset="-120"/>
                         </a:rPr>
-                        <a:t>0.01%</a:t>
+                        <a:t>0.92%</a:t>
                       </a:r>
                       <a:endParaRPr lang="en-US" sz="500" dirty="0">
                         <a:latin typeface="Calibri" charset="0"/>
@@ -17389,7 +17389,7 @@
                           <a:ea typeface="Calibri" pitchFamily="34" charset="-122"/>
                           <a:cs typeface="Calibri" pitchFamily="34" charset="-120"/>
                         </a:rPr>
-                        <a:t>0.01%</a:t>
+                        <a:t>0.87%</a:t>
                       </a:r>
                       <a:endParaRPr lang="en-US" sz="500" dirty="0">
                         <a:latin typeface="Calibri" charset="0"/>
@@ -17454,7 +17454,7 @@
                           <a:ea typeface="Calibri" pitchFamily="34" charset="-122"/>
                           <a:cs typeface="Calibri" pitchFamily="34" charset="-120"/>
                         </a:rPr>
-                        <a:t>0.01%</a:t>
+                        <a:t>0.83%</a:t>
                       </a:r>
                       <a:endParaRPr lang="en-US" sz="500" dirty="0">
                         <a:latin typeface="Calibri" charset="0"/>
@@ -17519,7 +17519,7 @@
                           <a:ea typeface="Calibri" pitchFamily="34" charset="-122"/>
                           <a:cs typeface="Calibri" pitchFamily="34" charset="-120"/>
                         </a:rPr>
-                        <a:t>0.12%</a:t>
+                        <a:t>12.62%</a:t>
                       </a:r>
                       <a:endParaRPr lang="en-US" sz="500" dirty="0">
                         <a:latin typeface="Calibri" charset="0"/>
@@ -18747,7 +18747,7 @@
                           <a:ea typeface="Calibri" pitchFamily="34" charset="-122"/>
                           <a:cs typeface="Calibri" pitchFamily="34" charset="-120"/>
                         </a:rPr>
-                        <a:t>0.01%</a:t>
+                        <a:t>0.51%</a:t>
                       </a:r>
                       <a:endParaRPr lang="en-US" sz="500" dirty="0">
                         <a:latin typeface="Calibri" charset="0"/>
@@ -18812,7 +18812,7 @@
                           <a:ea typeface="Calibri" pitchFamily="34" charset="-122"/>
                           <a:cs typeface="Calibri" pitchFamily="34" charset="-120"/>
                         </a:rPr>
-                        <a:t>0.00%</a:t>
+                        <a:t>0.45%</a:t>
                       </a:r>
                       <a:endParaRPr lang="en-US" sz="500" dirty="0">
                         <a:latin typeface="Calibri" charset="0"/>
@@ -18877,7 +18877,7 @@
                           <a:ea typeface="Calibri" pitchFamily="34" charset="-122"/>
                           <a:cs typeface="Calibri" pitchFamily="34" charset="-120"/>
                         </a:rPr>
-                        <a:t>0.00%</a:t>
+                        <a:t>0.47%</a:t>
                       </a:r>
                       <a:endParaRPr lang="en-US" sz="500" dirty="0">
                         <a:latin typeface="Calibri" charset="0"/>
@@ -18942,7 +18942,7 @@
                           <a:ea typeface="Calibri" pitchFamily="34" charset="-122"/>
                           <a:cs typeface="Calibri" pitchFamily="34" charset="-120"/>
                         </a:rPr>
-                        <a:t>0.00%</a:t>
+                        <a:t>0.42%</a:t>
                       </a:r>
                       <a:endParaRPr lang="en-US" sz="500" dirty="0">
                         <a:latin typeface="Calibri" charset="0"/>
@@ -19007,7 +19007,7 @@
                           <a:ea typeface="Calibri" pitchFamily="34" charset="-122"/>
                           <a:cs typeface="Calibri" pitchFamily="34" charset="-120"/>
                         </a:rPr>
-                        <a:t>0.00%</a:t>
+                        <a:t>0.37%</a:t>
                       </a:r>
                       <a:endParaRPr lang="en-US" sz="500" dirty="0">
                         <a:latin typeface="Calibri" charset="0"/>
@@ -19072,7 +19072,7 @@
                           <a:ea typeface="Calibri" pitchFamily="34" charset="-122"/>
                           <a:cs typeface="Calibri" pitchFamily="34" charset="-120"/>
                         </a:rPr>
-                        <a:t>0.00%</a:t>
+                        <a:t>0.36%</a:t>
                       </a:r>
                       <a:endParaRPr lang="en-US" sz="500" dirty="0">
                         <a:latin typeface="Calibri" charset="0"/>
@@ -19137,7 +19137,7 @@
                           <a:ea typeface="Calibri" pitchFamily="34" charset="-122"/>
                           <a:cs typeface="Calibri" pitchFamily="34" charset="-120"/>
                         </a:rPr>
-                        <a:t>0.00%</a:t>
+                        <a:t>0.36%</a:t>
                       </a:r>
                       <a:endParaRPr lang="en-US" sz="500" dirty="0">
                         <a:latin typeface="Calibri" charset="0"/>
@@ -19202,7 +19202,7 @@
                           <a:ea typeface="Calibri" pitchFamily="34" charset="-122"/>
                           <a:cs typeface="Calibri" pitchFamily="34" charset="-120"/>
                         </a:rPr>
-                        <a:t>0.00%</a:t>
+                        <a:t>0.34%</a:t>
                       </a:r>
                       <a:endParaRPr lang="en-US" sz="500" dirty="0">
                         <a:latin typeface="Calibri" charset="0"/>
@@ -19267,7 +19267,7 @@
                           <a:ea typeface="Calibri" pitchFamily="34" charset="-122"/>
                           <a:cs typeface="Calibri" pitchFamily="34" charset="-120"/>
                         </a:rPr>
-                        <a:t>0.00%</a:t>
+                        <a:t>0.34%</a:t>
                       </a:r>
                       <a:endParaRPr lang="en-US" sz="500" dirty="0">
                         <a:latin typeface="Calibri" charset="0"/>
@@ -19332,7 +19332,7 @@
                           <a:ea typeface="Calibri" pitchFamily="34" charset="-122"/>
                           <a:cs typeface="Calibri" pitchFamily="34" charset="-120"/>
                         </a:rPr>
-                        <a:t>0.00%</a:t>
+                        <a:t>0.32%</a:t>
                       </a:r>
                       <a:endParaRPr lang="en-US" sz="500" dirty="0">
                         <a:latin typeface="Calibri" charset="0"/>
@@ -19462,7 +19462,7 @@
                           <a:ea typeface="Calibri" pitchFamily="34" charset="-122"/>
                           <a:cs typeface="Calibri" pitchFamily="34" charset="-120"/>
                         </a:rPr>
-                        <a:t>-2.95%</a:t>
+                        <a:t>0.90%</a:t>
                       </a:r>
                       <a:endParaRPr lang="en-US" sz="500" dirty="0">
                         <a:latin typeface="Calibri" charset="0"/>
@@ -19648,7 +19648,7 @@
                           <a:ea typeface="Calibri" pitchFamily="34" charset="-122"/>
                           <a:cs typeface="Calibri" pitchFamily="34" charset="-120"/>
                         </a:rPr>
-                        <a:t>0.01%</a:t>
+                        <a:t>0.84%</a:t>
                       </a:r>
                       <a:endParaRPr lang="en-US" sz="500" dirty="0">
                         <a:latin typeface="Calibri" charset="0"/>
@@ -19713,7 +19713,7 @@
                           <a:ea typeface="Calibri" pitchFamily="34" charset="-122"/>
                           <a:cs typeface="Calibri" pitchFamily="34" charset="-120"/>
                         </a:rPr>
-                        <a:t>0.01%</a:t>
+                        <a:t>0.67%</a:t>
                       </a:r>
                       <a:endParaRPr lang="en-US" sz="500" dirty="0">
                         <a:latin typeface="Calibri" charset="0"/>
@@ -19778,7 +19778,7 @@
                           <a:ea typeface="Calibri" pitchFamily="34" charset="-122"/>
                           <a:cs typeface="Calibri" pitchFamily="34" charset="-120"/>
                         </a:rPr>
-                        <a:t>0.01%</a:t>
+                        <a:t>0.61%</a:t>
                       </a:r>
                       <a:endParaRPr lang="en-US" sz="500" dirty="0">
                         <a:latin typeface="Calibri" charset="0"/>
@@ -19843,7 +19843,7 @@
                           <a:ea typeface="Calibri" pitchFamily="34" charset="-122"/>
                           <a:cs typeface="Calibri" pitchFamily="34" charset="-120"/>
                         </a:rPr>
-                        <a:t>0.01%</a:t>
+                        <a:t>0.70%</a:t>
                       </a:r>
                       <a:endParaRPr lang="en-US" sz="500" dirty="0">
                         <a:latin typeface="Calibri" charset="0"/>
@@ -19908,7 +19908,7 @@
                           <a:ea typeface="Calibri" pitchFamily="34" charset="-122"/>
                           <a:cs typeface="Calibri" pitchFamily="34" charset="-120"/>
                         </a:rPr>
-                        <a:t>0.01%</a:t>
+                        <a:t>0.60%</a:t>
                       </a:r>
                       <a:endParaRPr lang="en-US" sz="500" dirty="0">
                         <a:latin typeface="Calibri" charset="0"/>
@@ -19973,7 +19973,7 @@
                           <a:ea typeface="Calibri" pitchFamily="34" charset="-122"/>
                           <a:cs typeface="Calibri" pitchFamily="34" charset="-120"/>
                         </a:rPr>
-                        <a:t>0.01%</a:t>
+                        <a:t>0.54%</a:t>
                       </a:r>
                       <a:endParaRPr lang="en-US" sz="500" dirty="0">
                         <a:latin typeface="Calibri" charset="0"/>
@@ -20038,7 +20038,7 @@
                           <a:ea typeface="Calibri" pitchFamily="34" charset="-122"/>
                           <a:cs typeface="Calibri" pitchFamily="34" charset="-120"/>
                         </a:rPr>
-                        <a:t>0.01%</a:t>
+                        <a:t>0.51%</a:t>
                       </a:r>
                       <a:endParaRPr lang="en-US" sz="500" dirty="0">
                         <a:latin typeface="Calibri" charset="0"/>
@@ -20103,7 +20103,7 @@
                           <a:ea typeface="Calibri" pitchFamily="34" charset="-122"/>
                           <a:cs typeface="Calibri" pitchFamily="34" charset="-120"/>
                         </a:rPr>
-                        <a:t>0.01%</a:t>
+                        <a:t>0.55%</a:t>
                       </a:r>
                       <a:endParaRPr lang="en-US" sz="500" dirty="0">
                         <a:latin typeface="Calibri" charset="0"/>
@@ -20168,7 +20168,7 @@
                           <a:ea typeface="Calibri" pitchFamily="34" charset="-122"/>
                           <a:cs typeface="Calibri" pitchFamily="34" charset="-120"/>
                         </a:rPr>
-                        <a:t>0.01%</a:t>
+                        <a:t>0.53%</a:t>
                       </a:r>
                       <a:endParaRPr lang="en-US" sz="500" dirty="0">
                         <a:latin typeface="Calibri" charset="0"/>
@@ -20233,7 +20233,7 @@
                           <a:ea typeface="Calibri" pitchFamily="34" charset="-122"/>
                           <a:cs typeface="Calibri" pitchFamily="34" charset="-120"/>
                         </a:rPr>
-                        <a:t>0.00%</a:t>
+                        <a:t>0.50%</a:t>
                       </a:r>
                       <a:endParaRPr lang="en-US" sz="500" dirty="0">
                         <a:latin typeface="Calibri" charset="0"/>
@@ -20298,7 +20298,7 @@
                           <a:ea typeface="Calibri" pitchFamily="34" charset="-122"/>
                           <a:cs typeface="Calibri" pitchFamily="34" charset="-120"/>
                         </a:rPr>
-                        <a:t>0.01%</a:t>
+                        <a:t>0.50%</a:t>
                       </a:r>
                       <a:endParaRPr lang="en-US" sz="500" dirty="0">
                         <a:latin typeface="Calibri" charset="0"/>
@@ -20363,7 +20363,7 @@
                           <a:ea typeface="Calibri" pitchFamily="34" charset="-122"/>
                           <a:cs typeface="Calibri" pitchFamily="34" charset="-120"/>
                         </a:rPr>
-                        <a:t>0.00%</a:t>
+                        <a:t>0.48%</a:t>
                       </a:r>
                       <a:endParaRPr lang="en-US" sz="500" dirty="0">
                         <a:latin typeface="Calibri" charset="0"/>
@@ -20428,7 +20428,7 @@
                           <a:ea typeface="Calibri" pitchFamily="34" charset="-122"/>
                           <a:cs typeface="Calibri" pitchFamily="34" charset="-120"/>
                         </a:rPr>
-                        <a:t>0.07%</a:t>
+                        <a:t>7.26%</a:t>
                       </a:r>
                       <a:endParaRPr lang="en-US" sz="500" dirty="0">
                         <a:latin typeface="Calibri" charset="0"/>
@@ -22557,7 +22557,7 @@
                           <a:ea typeface="Calibri" pitchFamily="34" charset="-122"/>
                           <a:cs typeface="Calibri" pitchFamily="34" charset="-120"/>
                         </a:rPr>
-                        <a:t>0.00%</a:t>
+                        <a:t>0.46%</a:t>
                       </a:r>
                       <a:endParaRPr lang="en-US" sz="500" dirty="0">
                         <a:latin typeface="Calibri" charset="0"/>
@@ -22622,7 +22622,7 @@
                           <a:ea typeface="Calibri" pitchFamily="34" charset="-122"/>
                           <a:cs typeface="Calibri" pitchFamily="34" charset="-120"/>
                         </a:rPr>
-                        <a:t>0.00%</a:t>
+                        <a:t>0.47%</a:t>
                       </a:r>
                       <a:endParaRPr lang="en-US" sz="500" dirty="0">
                         <a:latin typeface="Calibri" charset="0"/>
@@ -22687,7 +22687,7 @@
                           <a:ea typeface="Calibri" pitchFamily="34" charset="-122"/>
                           <a:cs typeface="Calibri" pitchFamily="34" charset="-120"/>
                         </a:rPr>
-                        <a:t>0.01%</a:t>
+                        <a:t>0.60%</a:t>
                       </a:r>
                       <a:endParaRPr lang="en-US" sz="500" dirty="0">
                         <a:latin typeface="Calibri" charset="0"/>
@@ -22752,7 +22752,7 @@
                           <a:ea typeface="Calibri" pitchFamily="34" charset="-122"/>
                           <a:cs typeface="Calibri" pitchFamily="34" charset="-120"/>
                         </a:rPr>
-                        <a:t>0.01%</a:t>
+                        <a:t>0.63%</a:t>
                       </a:r>
                       <a:endParaRPr lang="en-US" sz="500" dirty="0">
                         <a:latin typeface="Calibri" charset="0"/>
@@ -22817,7 +22817,7 @@
                           <a:ea typeface="Calibri" pitchFamily="34" charset="-122"/>
                           <a:cs typeface="Calibri" pitchFamily="34" charset="-120"/>
                         </a:rPr>
-                        <a:t>0.01%</a:t>
+                        <a:t>0.64%</a:t>
                       </a:r>
                       <a:endParaRPr lang="en-US" sz="500" dirty="0">
                         <a:latin typeface="Calibri" charset="0"/>
@@ -22882,7 +22882,7 @@
                           <a:ea typeface="Calibri" pitchFamily="34" charset="-122"/>
                           <a:cs typeface="Calibri" pitchFamily="34" charset="-120"/>
                         </a:rPr>
-                        <a:t>0.01%</a:t>
+                        <a:t>0.58%</a:t>
                       </a:r>
                       <a:endParaRPr lang="en-US" sz="500" dirty="0">
                         <a:latin typeface="Calibri" charset="0"/>
@@ -22947,7 +22947,7 @@
                           <a:ea typeface="Calibri" pitchFamily="34" charset="-122"/>
                           <a:cs typeface="Calibri" pitchFamily="34" charset="-120"/>
                         </a:rPr>
-                        <a:t>0.01%</a:t>
+                        <a:t>0.56%</a:t>
                       </a:r>
                       <a:endParaRPr lang="en-US" sz="500" dirty="0">
                         <a:latin typeface="Calibri" charset="0"/>
@@ -23337,7 +23337,7 @@
                           <a:ea typeface="Calibri" pitchFamily="34" charset="-122"/>
                           <a:cs typeface="Calibri" pitchFamily="34" charset="-120"/>
                         </a:rPr>
-                        <a:t>2.74%</a:t>
+                        <a:t>6.80%</a:t>
                       </a:r>
                       <a:endParaRPr lang="en-US" sz="500" dirty="0">
                         <a:latin typeface="Calibri" charset="0"/>

--- a/folletos/2026-04/pptx/FIP_VANTRUST_LIQUIDEZ_I.pptx
+++ b/folletos/2026-04/pptx/FIP_VANTRUST_LIQUIDEZ_I.pptx
@@ -3113,7 +3113,7 @@
                 <a:ea typeface="Calibri" pitchFamily="34" charset="-122"/>
                 <a:cs typeface="Calibri" pitchFamily="34" charset="-120"/>
               </a:rPr>
-              <a:t>prueba CLP</a:t>
+              <a:t>prueba 13 CLP</a:t>
             </a:r>
             <a:endParaRPr lang="en-US" sz="800" dirty="0"/>
           </a:p>

--- a/folletos/2026-04/pptx/FIP_VANTRUST_LIQUIDEZ_I.pptx
+++ b/folletos/2026-04/pptx/FIP_VANTRUST_LIQUIDEZ_I.pptx
@@ -189,38 +189,227 @@
           </c:marker>
           <c:cat>
             <c:multiLvlStrRef>
-              <c:f>Sheet1!$A$2:$A$11</c:f>
+              <c:f>Sheet1!$A$2:$A$74</c:f>
               <c:multiLvlStrCache>
-                <c:ptCount val="10"/>
+                <c:ptCount val="73"/>
                 <c:lvl>
                   <c:pt idx="0">
+                    <c:v>Apr 2020</c:v>
+                  </c:pt>
+                  <c:pt idx="1">
+                    <c:v>May 2020</c:v>
+                  </c:pt>
+                  <c:pt idx="2">
+                    <c:v>Jun 2020</c:v>
+                  </c:pt>
+                  <c:pt idx="3">
+                    <c:v>Jul 2020</c:v>
+                  </c:pt>
+                  <c:pt idx="4">
+                    <c:v>Aug 2020</c:v>
+                  </c:pt>
+                  <c:pt idx="5">
+                    <c:v>Sep 2020</c:v>
+                  </c:pt>
+                  <c:pt idx="6">
+                    <c:v>Oct 2020</c:v>
+                  </c:pt>
+                  <c:pt idx="7">
+                    <c:v>Nov 2020</c:v>
+                  </c:pt>
+                  <c:pt idx="8">
+                    <c:v>Dec 2020</c:v>
+                  </c:pt>
+                  <c:pt idx="9">
+                    <c:v>Jan 2021</c:v>
+                  </c:pt>
+                  <c:pt idx="10">
+                    <c:v>Feb 2021</c:v>
+                  </c:pt>
+                  <c:pt idx="11">
+                    <c:v>Mar 2021</c:v>
+                  </c:pt>
+                  <c:pt idx="12">
+                    <c:v>Apr 2021</c:v>
+                  </c:pt>
+                  <c:pt idx="13">
+                    <c:v>May 2021</c:v>
+                  </c:pt>
+                  <c:pt idx="14">
+                    <c:v>Jun 2021</c:v>
+                  </c:pt>
+                  <c:pt idx="15">
+                    <c:v>Jul 2021</c:v>
+                  </c:pt>
+                  <c:pt idx="16">
+                    <c:v>Aug 2021</c:v>
+                  </c:pt>
+                  <c:pt idx="17">
+                    <c:v>Sep 2021</c:v>
+                  </c:pt>
+                  <c:pt idx="18">
+                    <c:v>Oct 2021</c:v>
+                  </c:pt>
+                  <c:pt idx="19">
+                    <c:v>Nov 2021</c:v>
+                  </c:pt>
+                  <c:pt idx="20">
+                    <c:v>Dec 2021</c:v>
+                  </c:pt>
+                  <c:pt idx="21">
+                    <c:v>Jan 2022</c:v>
+                  </c:pt>
+                  <c:pt idx="22">
+                    <c:v>Feb 2022</c:v>
+                  </c:pt>
+                  <c:pt idx="23">
+                    <c:v>Mar 2022</c:v>
+                  </c:pt>
+                  <c:pt idx="24">
+                    <c:v>Apr 2022</c:v>
+                  </c:pt>
+                  <c:pt idx="25">
+                    <c:v>May 2022</c:v>
+                  </c:pt>
+                  <c:pt idx="26">
+                    <c:v>Jun 2022</c:v>
+                  </c:pt>
+                  <c:pt idx="27">
+                    <c:v>Jul 2022</c:v>
+                  </c:pt>
+                  <c:pt idx="28">
+                    <c:v>Aug 2022</c:v>
+                  </c:pt>
+                  <c:pt idx="29">
+                    <c:v>Sep 2022</c:v>
+                  </c:pt>
+                  <c:pt idx="30">
+                    <c:v>Oct 2022</c:v>
+                  </c:pt>
+                  <c:pt idx="31">
+                    <c:v>Nov 2022</c:v>
+                  </c:pt>
+                  <c:pt idx="32">
+                    <c:v>Dec 2022</c:v>
+                  </c:pt>
+                  <c:pt idx="33">
+                    <c:v>Jan 2023</c:v>
+                  </c:pt>
+                  <c:pt idx="34">
+                    <c:v>Feb 2023</c:v>
+                  </c:pt>
+                  <c:pt idx="35">
+                    <c:v>Mar 2023</c:v>
+                  </c:pt>
+                  <c:pt idx="36">
+                    <c:v>Apr 2023</c:v>
+                  </c:pt>
+                  <c:pt idx="37">
+                    <c:v>May 2023</c:v>
+                  </c:pt>
+                  <c:pt idx="38">
+                    <c:v>Jun 2023</c:v>
+                  </c:pt>
+                  <c:pt idx="39">
+                    <c:v>Jul 2023</c:v>
+                  </c:pt>
+                  <c:pt idx="40">
+                    <c:v>Aug 2023</c:v>
+                  </c:pt>
+                  <c:pt idx="41">
+                    <c:v>Sep 2023</c:v>
+                  </c:pt>
+                  <c:pt idx="42">
+                    <c:v>Oct 2023</c:v>
+                  </c:pt>
+                  <c:pt idx="43">
+                    <c:v>Nov 2023</c:v>
+                  </c:pt>
+                  <c:pt idx="44">
+                    <c:v>Dec 2023</c:v>
+                  </c:pt>
+                  <c:pt idx="45">
+                    <c:v>Jan 2024</c:v>
+                  </c:pt>
+                  <c:pt idx="46">
+                    <c:v>Feb 2024</c:v>
+                  </c:pt>
+                  <c:pt idx="47">
+                    <c:v>Mar 2024</c:v>
+                  </c:pt>
+                  <c:pt idx="48">
+                    <c:v>Apr 2024</c:v>
+                  </c:pt>
+                  <c:pt idx="49">
+                    <c:v>May 2024</c:v>
+                  </c:pt>
+                  <c:pt idx="50">
+                    <c:v>Jun 2024</c:v>
+                  </c:pt>
+                  <c:pt idx="51">
+                    <c:v>Jul 2024</c:v>
+                  </c:pt>
+                  <c:pt idx="52">
+                    <c:v>Aug 2024</c:v>
+                  </c:pt>
+                  <c:pt idx="53">
+                    <c:v>Sep 2024</c:v>
+                  </c:pt>
+                  <c:pt idx="54">
+                    <c:v>Oct 2024</c:v>
+                  </c:pt>
+                  <c:pt idx="55">
+                    <c:v>Nov 2024</c:v>
+                  </c:pt>
+                  <c:pt idx="56">
+                    <c:v>Dec 2024</c:v>
+                  </c:pt>
+                  <c:pt idx="57">
+                    <c:v>Jan 2025</c:v>
+                  </c:pt>
+                  <c:pt idx="58">
+                    <c:v>Feb 2025</c:v>
+                  </c:pt>
+                  <c:pt idx="59">
+                    <c:v>Mar 2025</c:v>
+                  </c:pt>
+                  <c:pt idx="60">
+                    <c:v>Apr 2025</c:v>
+                  </c:pt>
+                  <c:pt idx="61">
+                    <c:v>May 2025</c:v>
+                  </c:pt>
+                  <c:pt idx="62">
+                    <c:v>Jun 2025</c:v>
+                  </c:pt>
+                  <c:pt idx="63">
                     <c:v>Jul 2025</c:v>
                   </c:pt>
-                  <c:pt idx="1">
+                  <c:pt idx="64">
                     <c:v>Aug 2025</c:v>
                   </c:pt>
-                  <c:pt idx="2">
+                  <c:pt idx="65">
                     <c:v>Sep 2025</c:v>
                   </c:pt>
-                  <c:pt idx="3">
+                  <c:pt idx="66">
                     <c:v>Oct 2025</c:v>
                   </c:pt>
-                  <c:pt idx="4">
+                  <c:pt idx="67">
                     <c:v>Nov 2025</c:v>
                   </c:pt>
-                  <c:pt idx="5">
+                  <c:pt idx="68">
                     <c:v>Dec 2025</c:v>
                   </c:pt>
-                  <c:pt idx="6">
+                  <c:pt idx="69">
                     <c:v>Jan 2026</c:v>
                   </c:pt>
-                  <c:pt idx="7">
+                  <c:pt idx="70">
                     <c:v>Feb 2026</c:v>
                   </c:pt>
-                  <c:pt idx="8">
+                  <c:pt idx="71">
                     <c:v>Mar 2026</c:v>
                   </c:pt>
-                  <c:pt idx="9">
+                  <c:pt idx="72">
                     <c:v>Apr 2026</c:v>
                   </c:pt>
                 </c:lvl>
@@ -229,39 +418,228 @@
           </c:cat>
           <c:val>
             <c:numRef>
-              <c:f>Sheet1!$B$2:$B$11</c:f>
+              <c:f>Sheet1!$B$2:$B$74</c:f>
               <c:numCache>
                 <c:formatCode>General</c:formatCode>
-                <c:ptCount val="10"/>
+                <c:ptCount val="73"/>
                 <c:pt idx="0">
                   <c:v>100</c:v>
                 </c:pt>
                 <c:pt idx="1">
-                  <c:v>100.4</c:v>
+                  <c:v>100.04</c:v>
                 </c:pt>
                 <c:pt idx="2">
-                  <c:v>100.79</c:v>
+                  <c:v>100.08</c:v>
                 </c:pt>
                 <c:pt idx="3">
-                  <c:v>101.19</c:v>
+                  <c:v>100.12</c:v>
                 </c:pt>
                 <c:pt idx="4">
-                  <c:v>101.59</c:v>
+                  <c:v>100.16</c:v>
                 </c:pt>
                 <c:pt idx="5">
-                  <c:v>101.98</c:v>
+                  <c:v>100.2</c:v>
                 </c:pt>
                 <c:pt idx="6">
-                  <c:v>102.37</c:v>
+                  <c:v>100.24</c:v>
                 </c:pt>
                 <c:pt idx="7">
-                  <c:v>102.75</c:v>
+                  <c:v>100.27</c:v>
                 </c:pt>
                 <c:pt idx="8">
-                  <c:v>103.14</c:v>
+                  <c:v>100.31</c:v>
                 </c:pt>
                 <c:pt idx="9">
-                  <c:v>103.52</c:v>
+                  <c:v>100.34</c:v>
+                </c:pt>
+                <c:pt idx="10">
+                  <c:v>100.36</c:v>
+                </c:pt>
+                <c:pt idx="11">
+                  <c:v>100.39</c:v>
+                </c:pt>
+                <c:pt idx="12">
+                  <c:v>100.42</c:v>
+                </c:pt>
+                <c:pt idx="13">
+                  <c:v>100.44</c:v>
+                </c:pt>
+                <c:pt idx="14">
+                  <c:v>100.47</c:v>
+                </c:pt>
+                <c:pt idx="15">
+                  <c:v>100.52</c:v>
+                </c:pt>
+                <c:pt idx="16">
+                  <c:v>100.58</c:v>
+                </c:pt>
+                <c:pt idx="17">
+                  <c:v>100.71</c:v>
+                </c:pt>
+                <c:pt idx="18">
+                  <c:v>100.92</c:v>
+                </c:pt>
+                <c:pt idx="19">
+                  <c:v>101.13</c:v>
+                </c:pt>
+                <c:pt idx="20">
+                  <c:v>101.46</c:v>
+                </c:pt>
+                <c:pt idx="21">
+                  <c:v>101.8</c:v>
+                </c:pt>
+                <c:pt idx="22">
+                  <c:v>102.24</c:v>
+                </c:pt>
+                <c:pt idx="23">
+                  <c:v>102.74</c:v>
+                </c:pt>
+                <c:pt idx="24">
+                  <c:v>103.3</c:v>
+                </c:pt>
+                <c:pt idx="25">
+                  <c:v>104.03</c:v>
+                </c:pt>
+                <c:pt idx="26">
+                  <c:v>104.8</c:v>
+                </c:pt>
+                <c:pt idx="27">
+                  <c:v>105.59</c:v>
+                </c:pt>
+                <c:pt idx="28">
+                  <c:v>106.54</c:v>
+                </c:pt>
+                <c:pt idx="29">
+                  <c:v>107.48</c:v>
+                </c:pt>
+                <c:pt idx="30">
+                  <c:v>108.4</c:v>
+                </c:pt>
+                <c:pt idx="31">
+                  <c:v>109.52</c:v>
+                </c:pt>
+                <c:pt idx="32">
+                  <c:v>110.56</c:v>
+                </c:pt>
+                <c:pt idx="33">
+                  <c:v>111.67</c:v>
+                </c:pt>
+                <c:pt idx="34">
+                  <c:v>112.65</c:v>
+                </c:pt>
+                <c:pt idx="35">
+                  <c:v>113.74</c:v>
+                </c:pt>
+                <c:pt idx="36">
+                  <c:v>114.74</c:v>
+                </c:pt>
+                <c:pt idx="37">
+                  <c:v>115.93</c:v>
+                </c:pt>
+                <c:pt idx="38">
+                  <c:v>117.02</c:v>
+                </c:pt>
+                <c:pt idx="39">
+                  <c:v>118.16</c:v>
+                </c:pt>
+                <c:pt idx="40">
+                  <c:v>119.21</c:v>
+                </c:pt>
+                <c:pt idx="41">
+                  <c:v>120.14</c:v>
+                </c:pt>
+                <c:pt idx="42">
+                  <c:v>121.15</c:v>
+                </c:pt>
+                <c:pt idx="43">
+                  <c:v>122.07</c:v>
+                </c:pt>
+                <c:pt idx="44">
+                  <c:v>122.93</c:v>
+                </c:pt>
+                <c:pt idx="45">
+                  <c:v>123.84</c:v>
+                </c:pt>
+                <c:pt idx="46">
+                  <c:v>124.59</c:v>
+                </c:pt>
+                <c:pt idx="47">
+                  <c:v>125.3</c:v>
+                </c:pt>
+                <c:pt idx="48">
+                  <c:v>126.06</c:v>
+                </c:pt>
+                <c:pt idx="49">
+                  <c:v>126.75</c:v>
+                </c:pt>
+                <c:pt idx="50">
+                  <c:v>127.34</c:v>
+                </c:pt>
+                <c:pt idx="51">
+                  <c:v>128.01</c:v>
+                </c:pt>
+                <c:pt idx="52">
+                  <c:v>128.63</c:v>
+                </c:pt>
+                <c:pt idx="53">
+                  <c:v>129.24</c:v>
+                </c:pt>
+                <c:pt idx="54">
+                  <c:v>129.83</c:v>
+                </c:pt>
+                <c:pt idx="55">
+                  <c:v>130.39</c:v>
+                </c:pt>
+                <c:pt idx="56">
+                  <c:v>130.97</c:v>
+                </c:pt>
+                <c:pt idx="57">
+                  <c:v>131.56</c:v>
+                </c:pt>
+                <c:pt idx="58">
+                  <c:v>132.07</c:v>
+                </c:pt>
+                <c:pt idx="59">
+                  <c:v>132.64</c:v>
+                </c:pt>
+                <c:pt idx="60">
+                  <c:v>133.19</c:v>
+                </c:pt>
+                <c:pt idx="61">
+                  <c:v>133.75</c:v>
+                </c:pt>
+                <c:pt idx="62">
+                  <c:v>134.33</c:v>
+                </c:pt>
+                <c:pt idx="63">
+                  <c:v>134.91</c:v>
+                </c:pt>
+                <c:pt idx="64">
+                  <c:v>135.42</c:v>
+                </c:pt>
+                <c:pt idx="65">
+                  <c:v>136</c:v>
+                </c:pt>
+                <c:pt idx="66">
+                  <c:v>136.53</c:v>
+                </c:pt>
+                <c:pt idx="67">
+                  <c:v>137.06</c:v>
+                </c:pt>
+                <c:pt idx="68">
+                  <c:v>137.63</c:v>
+                </c:pt>
+                <c:pt idx="69">
+                  <c:v>138.16</c:v>
+                </c:pt>
+                <c:pt idx="70">
+                  <c:v>138.66</c:v>
+                </c:pt>
+                <c:pt idx="71">
+                  <c:v>139.2</c:v>
+                </c:pt>
+                <c:pt idx="72">
+                  <c:v>139.72</c:v>
                 </c:pt>
               </c:numCache>
             </c:numRef>
@@ -339,38 +717,227 @@
           </c:marker>
           <c:cat>
             <c:multiLvlStrRef>
-              <c:f>Sheet1!$A$2:$A$11</c:f>
+              <c:f>Sheet1!$A$2:$A$74</c:f>
               <c:multiLvlStrCache>
-                <c:ptCount val="10"/>
+                <c:ptCount val="73"/>
                 <c:lvl>
                   <c:pt idx="0">
+                    <c:v>Apr 2020</c:v>
+                  </c:pt>
+                  <c:pt idx="1">
+                    <c:v>May 2020</c:v>
+                  </c:pt>
+                  <c:pt idx="2">
+                    <c:v>Jun 2020</c:v>
+                  </c:pt>
+                  <c:pt idx="3">
+                    <c:v>Jul 2020</c:v>
+                  </c:pt>
+                  <c:pt idx="4">
+                    <c:v>Aug 2020</c:v>
+                  </c:pt>
+                  <c:pt idx="5">
+                    <c:v>Sep 2020</c:v>
+                  </c:pt>
+                  <c:pt idx="6">
+                    <c:v>Oct 2020</c:v>
+                  </c:pt>
+                  <c:pt idx="7">
+                    <c:v>Nov 2020</c:v>
+                  </c:pt>
+                  <c:pt idx="8">
+                    <c:v>Dec 2020</c:v>
+                  </c:pt>
+                  <c:pt idx="9">
+                    <c:v>Jan 2021</c:v>
+                  </c:pt>
+                  <c:pt idx="10">
+                    <c:v>Feb 2021</c:v>
+                  </c:pt>
+                  <c:pt idx="11">
+                    <c:v>Mar 2021</c:v>
+                  </c:pt>
+                  <c:pt idx="12">
+                    <c:v>Apr 2021</c:v>
+                  </c:pt>
+                  <c:pt idx="13">
+                    <c:v>May 2021</c:v>
+                  </c:pt>
+                  <c:pt idx="14">
+                    <c:v>Jun 2021</c:v>
+                  </c:pt>
+                  <c:pt idx="15">
+                    <c:v>Jul 2021</c:v>
+                  </c:pt>
+                  <c:pt idx="16">
+                    <c:v>Aug 2021</c:v>
+                  </c:pt>
+                  <c:pt idx="17">
+                    <c:v>Sep 2021</c:v>
+                  </c:pt>
+                  <c:pt idx="18">
+                    <c:v>Oct 2021</c:v>
+                  </c:pt>
+                  <c:pt idx="19">
+                    <c:v>Nov 2021</c:v>
+                  </c:pt>
+                  <c:pt idx="20">
+                    <c:v>Dec 2021</c:v>
+                  </c:pt>
+                  <c:pt idx="21">
+                    <c:v>Jan 2022</c:v>
+                  </c:pt>
+                  <c:pt idx="22">
+                    <c:v>Feb 2022</c:v>
+                  </c:pt>
+                  <c:pt idx="23">
+                    <c:v>Mar 2022</c:v>
+                  </c:pt>
+                  <c:pt idx="24">
+                    <c:v>Apr 2022</c:v>
+                  </c:pt>
+                  <c:pt idx="25">
+                    <c:v>May 2022</c:v>
+                  </c:pt>
+                  <c:pt idx="26">
+                    <c:v>Jun 2022</c:v>
+                  </c:pt>
+                  <c:pt idx="27">
+                    <c:v>Jul 2022</c:v>
+                  </c:pt>
+                  <c:pt idx="28">
+                    <c:v>Aug 2022</c:v>
+                  </c:pt>
+                  <c:pt idx="29">
+                    <c:v>Sep 2022</c:v>
+                  </c:pt>
+                  <c:pt idx="30">
+                    <c:v>Oct 2022</c:v>
+                  </c:pt>
+                  <c:pt idx="31">
+                    <c:v>Nov 2022</c:v>
+                  </c:pt>
+                  <c:pt idx="32">
+                    <c:v>Dec 2022</c:v>
+                  </c:pt>
+                  <c:pt idx="33">
+                    <c:v>Jan 2023</c:v>
+                  </c:pt>
+                  <c:pt idx="34">
+                    <c:v>Feb 2023</c:v>
+                  </c:pt>
+                  <c:pt idx="35">
+                    <c:v>Mar 2023</c:v>
+                  </c:pt>
+                  <c:pt idx="36">
+                    <c:v>Apr 2023</c:v>
+                  </c:pt>
+                  <c:pt idx="37">
+                    <c:v>May 2023</c:v>
+                  </c:pt>
+                  <c:pt idx="38">
+                    <c:v>Jun 2023</c:v>
+                  </c:pt>
+                  <c:pt idx="39">
+                    <c:v>Jul 2023</c:v>
+                  </c:pt>
+                  <c:pt idx="40">
+                    <c:v>Aug 2023</c:v>
+                  </c:pt>
+                  <c:pt idx="41">
+                    <c:v>Sep 2023</c:v>
+                  </c:pt>
+                  <c:pt idx="42">
+                    <c:v>Oct 2023</c:v>
+                  </c:pt>
+                  <c:pt idx="43">
+                    <c:v>Nov 2023</c:v>
+                  </c:pt>
+                  <c:pt idx="44">
+                    <c:v>Dec 2023</c:v>
+                  </c:pt>
+                  <c:pt idx="45">
+                    <c:v>Jan 2024</c:v>
+                  </c:pt>
+                  <c:pt idx="46">
+                    <c:v>Feb 2024</c:v>
+                  </c:pt>
+                  <c:pt idx="47">
+                    <c:v>Mar 2024</c:v>
+                  </c:pt>
+                  <c:pt idx="48">
+                    <c:v>Apr 2024</c:v>
+                  </c:pt>
+                  <c:pt idx="49">
+                    <c:v>May 2024</c:v>
+                  </c:pt>
+                  <c:pt idx="50">
+                    <c:v>Jun 2024</c:v>
+                  </c:pt>
+                  <c:pt idx="51">
+                    <c:v>Jul 2024</c:v>
+                  </c:pt>
+                  <c:pt idx="52">
+                    <c:v>Aug 2024</c:v>
+                  </c:pt>
+                  <c:pt idx="53">
+                    <c:v>Sep 2024</c:v>
+                  </c:pt>
+                  <c:pt idx="54">
+                    <c:v>Oct 2024</c:v>
+                  </c:pt>
+                  <c:pt idx="55">
+                    <c:v>Nov 2024</c:v>
+                  </c:pt>
+                  <c:pt idx="56">
+                    <c:v>Dec 2024</c:v>
+                  </c:pt>
+                  <c:pt idx="57">
+                    <c:v>Jan 2025</c:v>
+                  </c:pt>
+                  <c:pt idx="58">
+                    <c:v>Feb 2025</c:v>
+                  </c:pt>
+                  <c:pt idx="59">
+                    <c:v>Mar 2025</c:v>
+                  </c:pt>
+                  <c:pt idx="60">
+                    <c:v>Apr 2025</c:v>
+                  </c:pt>
+                  <c:pt idx="61">
+                    <c:v>May 2025</c:v>
+                  </c:pt>
+                  <c:pt idx="62">
+                    <c:v>Jun 2025</c:v>
+                  </c:pt>
+                  <c:pt idx="63">
                     <c:v>Jul 2025</c:v>
                   </c:pt>
-                  <c:pt idx="1">
+                  <c:pt idx="64">
                     <c:v>Aug 2025</c:v>
                   </c:pt>
-                  <c:pt idx="2">
+                  <c:pt idx="65">
                     <c:v>Sep 2025</c:v>
                   </c:pt>
-                  <c:pt idx="3">
+                  <c:pt idx="66">
                     <c:v>Oct 2025</c:v>
                   </c:pt>
-                  <c:pt idx="4">
+                  <c:pt idx="67">
                     <c:v>Nov 2025</c:v>
                   </c:pt>
-                  <c:pt idx="5">
+                  <c:pt idx="68">
                     <c:v>Dec 2025</c:v>
                   </c:pt>
-                  <c:pt idx="6">
+                  <c:pt idx="69">
                     <c:v>Jan 2026</c:v>
                   </c:pt>
-                  <c:pt idx="7">
+                  <c:pt idx="70">
                     <c:v>Feb 2026</c:v>
                   </c:pt>
-                  <c:pt idx="8">
+                  <c:pt idx="71">
                     <c:v>Mar 2026</c:v>
                   </c:pt>
-                  <c:pt idx="9">
+                  <c:pt idx="72">
                     <c:v>Apr 2026</c:v>
                   </c:pt>
                 </c:lvl>
@@ -379,39 +946,228 @@
           </c:cat>
           <c:val>
             <c:numRef>
-              <c:f>Sheet1!$C$2:$C$11</c:f>
+              <c:f>Sheet1!$C$2:$C$74</c:f>
               <c:numCache>
                 <c:formatCode>General</c:formatCode>
-                <c:ptCount val="10"/>
+                <c:ptCount val="73"/>
                 <c:pt idx="0">
                   <c:v>100</c:v>
                 </c:pt>
                 <c:pt idx="1">
-                  <c:v>100.56</c:v>
+                  <c:v>100.19</c:v>
                 </c:pt>
                 <c:pt idx="2">
-                  <c:v>101.07</c:v>
+                  <c:v>100.47</c:v>
                 </c:pt>
                 <c:pt idx="3">
-                  <c:v>101.61</c:v>
+                  <c:v>100.71</c:v>
                 </c:pt>
                 <c:pt idx="4">
-                  <c:v>102.14</c:v>
+                  <c:v>100.92</c:v>
                 </c:pt>
                 <c:pt idx="5">
-                  <c:v>102.7</c:v>
+                  <c:v>101.16</c:v>
                 </c:pt>
                 <c:pt idx="6">
-                  <c:v>103.26</c:v>
+                  <c:v>101.43</c:v>
                 </c:pt>
                 <c:pt idx="7">
-                  <c:v>103.8</c:v>
+                  <c:v>101.68</c:v>
                 </c:pt>
                 <c:pt idx="8">
-                  <c:v>104.38</c:v>
+                  <c:v>101.89</c:v>
                 </c:pt>
                 <c:pt idx="9">
-                  <c:v>104.97</c:v>
+                  <c:v>102.09</c:v>
+                </c:pt>
+                <c:pt idx="10">
+                  <c:v>102.26</c:v>
+                </c:pt>
+                <c:pt idx="11">
+                  <c:v>102.42</c:v>
+                </c:pt>
+                <c:pt idx="12">
+                  <c:v>102.57</c:v>
+                </c:pt>
+                <c:pt idx="13">
+                  <c:v>102.76</c:v>
+                </c:pt>
+                <c:pt idx="14">
+                  <c:v>102.9</c:v>
+                </c:pt>
+                <c:pt idx="15">
+                  <c:v>103.08</c:v>
+                </c:pt>
+                <c:pt idx="16">
+                  <c:v>103.2</c:v>
+                </c:pt>
+                <c:pt idx="17">
+                  <c:v>103.36</c:v>
+                </c:pt>
+                <c:pt idx="18">
+                  <c:v>103.51</c:v>
+                </c:pt>
+                <c:pt idx="19">
+                  <c:v>103.68</c:v>
+                </c:pt>
+                <c:pt idx="20">
+                  <c:v>103.93</c:v>
+                </c:pt>
+                <c:pt idx="21">
+                  <c:v>104.29</c:v>
+                </c:pt>
+                <c:pt idx="22">
+                  <c:v>104.72</c:v>
+                </c:pt>
+                <c:pt idx="23">
+                  <c:v>105.2</c:v>
+                </c:pt>
+                <c:pt idx="24">
+                  <c:v>105.87</c:v>
+                </c:pt>
+                <c:pt idx="25">
+                  <c:v>106.73</c:v>
+                </c:pt>
+                <c:pt idx="26">
+                  <c:v>107.57</c:v>
+                </c:pt>
+                <c:pt idx="27">
+                  <c:v>108.45</c:v>
+                </c:pt>
+                <c:pt idx="28">
+                  <c:v>109.4</c:v>
+                </c:pt>
+                <c:pt idx="29">
+                  <c:v>110.35</c:v>
+                </c:pt>
+                <c:pt idx="30">
+                  <c:v>111.37</c:v>
+                </c:pt>
+                <c:pt idx="31">
+                  <c:v>112.6</c:v>
+                </c:pt>
+                <c:pt idx="32">
+                  <c:v>113.73</c:v>
+                </c:pt>
+                <c:pt idx="33">
+                  <c:v>115.01</c:v>
+                </c:pt>
+                <c:pt idx="34">
+                  <c:v>116.19</c:v>
+                </c:pt>
+                <c:pt idx="35">
+                  <c:v>117.43</c:v>
+                </c:pt>
+                <c:pt idx="36">
+                  <c:v>118.59</c:v>
+                </c:pt>
+                <c:pt idx="37">
+                  <c:v>119.93</c:v>
+                </c:pt>
+                <c:pt idx="38">
+                  <c:v>121.16</c:v>
+                </c:pt>
+                <c:pt idx="39">
+                  <c:v>122.46</c:v>
+                </c:pt>
+                <c:pt idx="40">
+                  <c:v>123.65</c:v>
+                </c:pt>
+                <c:pt idx="41">
+                  <c:v>124.79</c:v>
+                </c:pt>
+                <c:pt idx="42">
+                  <c:v>125.94</c:v>
+                </c:pt>
+                <c:pt idx="43">
+                  <c:v>127.03</c:v>
+                </c:pt>
+                <c:pt idx="44">
+                  <c:v>128.08</c:v>
+                </c:pt>
+                <c:pt idx="45">
+                  <c:v>129.15</c:v>
+                </c:pt>
+                <c:pt idx="46">
+                  <c:v>130.02</c:v>
+                </c:pt>
+                <c:pt idx="47">
+                  <c:v>130.81</c:v>
+                </c:pt>
+                <c:pt idx="48">
+                  <c:v>131.72</c:v>
+                </c:pt>
+                <c:pt idx="49">
+                  <c:v>132.52</c:v>
+                </c:pt>
+                <c:pt idx="50">
+                  <c:v>133.24</c:v>
+                </c:pt>
+                <c:pt idx="51">
+                  <c:v>133.91</c:v>
+                </c:pt>
+                <c:pt idx="52">
+                  <c:v>134.65</c:v>
+                </c:pt>
+                <c:pt idx="53">
+                  <c:v>135.36</c:v>
+                </c:pt>
+                <c:pt idx="54">
+                  <c:v>136.03</c:v>
+                </c:pt>
+                <c:pt idx="55">
+                  <c:v>136.72</c:v>
+                </c:pt>
+                <c:pt idx="56">
+                  <c:v>137.37</c:v>
+                </c:pt>
+                <c:pt idx="57">
+                  <c:v>138.01</c:v>
+                </c:pt>
+                <c:pt idx="58">
+                  <c:v>138.66</c:v>
+                </c:pt>
+                <c:pt idx="59">
+                  <c:v>139.49</c:v>
+                </c:pt>
+                <c:pt idx="60">
+                  <c:v>140.37</c:v>
+                </c:pt>
+                <c:pt idx="61">
+                  <c:v>141.26</c:v>
+                </c:pt>
+                <c:pt idx="62">
+                  <c:v>142.08</c:v>
+                </c:pt>
+                <c:pt idx="63">
+                  <c:v>142.87</c:v>
+                </c:pt>
+                <c:pt idx="64">
+                  <c:v>143.7</c:v>
+                </c:pt>
+                <c:pt idx="65">
+                  <c:v>144.48</c:v>
+                </c:pt>
+                <c:pt idx="66">
+                  <c:v>145.28</c:v>
+                </c:pt>
+                <c:pt idx="67">
+                  <c:v>146.09</c:v>
+                </c:pt>
+                <c:pt idx="68">
+                  <c:v>146.92</c:v>
+                </c:pt>
+                <c:pt idx="69">
+                  <c:v>147.77</c:v>
+                </c:pt>
+                <c:pt idx="70">
+                  <c:v>148.57</c:v>
+                </c:pt>
+                <c:pt idx="71">
+                  <c:v>149.45</c:v>
+                </c:pt>
+                <c:pt idx="72">
+                  <c:v>150.33</c:v>
                 </c:pt>
               </c:numCache>
             </c:numRef>
@@ -489,38 +1245,227 @@
           </c:marker>
           <c:cat>
             <c:multiLvlStrRef>
-              <c:f>Sheet1!$A$2:$A$11</c:f>
+              <c:f>Sheet1!$A$2:$A$74</c:f>
               <c:multiLvlStrCache>
-                <c:ptCount val="10"/>
+                <c:ptCount val="73"/>
                 <c:lvl>
                   <c:pt idx="0">
+                    <c:v>Apr 2020</c:v>
+                  </c:pt>
+                  <c:pt idx="1">
+                    <c:v>May 2020</c:v>
+                  </c:pt>
+                  <c:pt idx="2">
+                    <c:v>Jun 2020</c:v>
+                  </c:pt>
+                  <c:pt idx="3">
+                    <c:v>Jul 2020</c:v>
+                  </c:pt>
+                  <c:pt idx="4">
+                    <c:v>Aug 2020</c:v>
+                  </c:pt>
+                  <c:pt idx="5">
+                    <c:v>Sep 2020</c:v>
+                  </c:pt>
+                  <c:pt idx="6">
+                    <c:v>Oct 2020</c:v>
+                  </c:pt>
+                  <c:pt idx="7">
+                    <c:v>Nov 2020</c:v>
+                  </c:pt>
+                  <c:pt idx="8">
+                    <c:v>Dec 2020</c:v>
+                  </c:pt>
+                  <c:pt idx="9">
+                    <c:v>Jan 2021</c:v>
+                  </c:pt>
+                  <c:pt idx="10">
+                    <c:v>Feb 2021</c:v>
+                  </c:pt>
+                  <c:pt idx="11">
+                    <c:v>Mar 2021</c:v>
+                  </c:pt>
+                  <c:pt idx="12">
+                    <c:v>Apr 2021</c:v>
+                  </c:pt>
+                  <c:pt idx="13">
+                    <c:v>May 2021</c:v>
+                  </c:pt>
+                  <c:pt idx="14">
+                    <c:v>Jun 2021</c:v>
+                  </c:pt>
+                  <c:pt idx="15">
+                    <c:v>Jul 2021</c:v>
+                  </c:pt>
+                  <c:pt idx="16">
+                    <c:v>Aug 2021</c:v>
+                  </c:pt>
+                  <c:pt idx="17">
+                    <c:v>Sep 2021</c:v>
+                  </c:pt>
+                  <c:pt idx="18">
+                    <c:v>Oct 2021</c:v>
+                  </c:pt>
+                  <c:pt idx="19">
+                    <c:v>Nov 2021</c:v>
+                  </c:pt>
+                  <c:pt idx="20">
+                    <c:v>Dec 2021</c:v>
+                  </c:pt>
+                  <c:pt idx="21">
+                    <c:v>Jan 2022</c:v>
+                  </c:pt>
+                  <c:pt idx="22">
+                    <c:v>Feb 2022</c:v>
+                  </c:pt>
+                  <c:pt idx="23">
+                    <c:v>Mar 2022</c:v>
+                  </c:pt>
+                  <c:pt idx="24">
+                    <c:v>Apr 2022</c:v>
+                  </c:pt>
+                  <c:pt idx="25">
+                    <c:v>May 2022</c:v>
+                  </c:pt>
+                  <c:pt idx="26">
+                    <c:v>Jun 2022</c:v>
+                  </c:pt>
+                  <c:pt idx="27">
+                    <c:v>Jul 2022</c:v>
+                  </c:pt>
+                  <c:pt idx="28">
+                    <c:v>Aug 2022</c:v>
+                  </c:pt>
+                  <c:pt idx="29">
+                    <c:v>Sep 2022</c:v>
+                  </c:pt>
+                  <c:pt idx="30">
+                    <c:v>Oct 2022</c:v>
+                  </c:pt>
+                  <c:pt idx="31">
+                    <c:v>Nov 2022</c:v>
+                  </c:pt>
+                  <c:pt idx="32">
+                    <c:v>Dec 2022</c:v>
+                  </c:pt>
+                  <c:pt idx="33">
+                    <c:v>Jan 2023</c:v>
+                  </c:pt>
+                  <c:pt idx="34">
+                    <c:v>Feb 2023</c:v>
+                  </c:pt>
+                  <c:pt idx="35">
+                    <c:v>Mar 2023</c:v>
+                  </c:pt>
+                  <c:pt idx="36">
+                    <c:v>Apr 2023</c:v>
+                  </c:pt>
+                  <c:pt idx="37">
+                    <c:v>May 2023</c:v>
+                  </c:pt>
+                  <c:pt idx="38">
+                    <c:v>Jun 2023</c:v>
+                  </c:pt>
+                  <c:pt idx="39">
+                    <c:v>Jul 2023</c:v>
+                  </c:pt>
+                  <c:pt idx="40">
+                    <c:v>Aug 2023</c:v>
+                  </c:pt>
+                  <c:pt idx="41">
+                    <c:v>Sep 2023</c:v>
+                  </c:pt>
+                  <c:pt idx="42">
+                    <c:v>Oct 2023</c:v>
+                  </c:pt>
+                  <c:pt idx="43">
+                    <c:v>Nov 2023</c:v>
+                  </c:pt>
+                  <c:pt idx="44">
+                    <c:v>Dec 2023</c:v>
+                  </c:pt>
+                  <c:pt idx="45">
+                    <c:v>Jan 2024</c:v>
+                  </c:pt>
+                  <c:pt idx="46">
+                    <c:v>Feb 2024</c:v>
+                  </c:pt>
+                  <c:pt idx="47">
+                    <c:v>Mar 2024</c:v>
+                  </c:pt>
+                  <c:pt idx="48">
+                    <c:v>Apr 2024</c:v>
+                  </c:pt>
+                  <c:pt idx="49">
+                    <c:v>May 2024</c:v>
+                  </c:pt>
+                  <c:pt idx="50">
+                    <c:v>Jun 2024</c:v>
+                  </c:pt>
+                  <c:pt idx="51">
+                    <c:v>Jul 2024</c:v>
+                  </c:pt>
+                  <c:pt idx="52">
+                    <c:v>Aug 2024</c:v>
+                  </c:pt>
+                  <c:pt idx="53">
+                    <c:v>Sep 2024</c:v>
+                  </c:pt>
+                  <c:pt idx="54">
+                    <c:v>Oct 2024</c:v>
+                  </c:pt>
+                  <c:pt idx="55">
+                    <c:v>Nov 2024</c:v>
+                  </c:pt>
+                  <c:pt idx="56">
+                    <c:v>Dec 2024</c:v>
+                  </c:pt>
+                  <c:pt idx="57">
+                    <c:v>Jan 2025</c:v>
+                  </c:pt>
+                  <c:pt idx="58">
+                    <c:v>Feb 2025</c:v>
+                  </c:pt>
+                  <c:pt idx="59">
+                    <c:v>Mar 2025</c:v>
+                  </c:pt>
+                  <c:pt idx="60">
+                    <c:v>Apr 2025</c:v>
+                  </c:pt>
+                  <c:pt idx="61">
+                    <c:v>May 2025</c:v>
+                  </c:pt>
+                  <c:pt idx="62">
+                    <c:v>Jun 2025</c:v>
+                  </c:pt>
+                  <c:pt idx="63">
                     <c:v>Jul 2025</c:v>
                   </c:pt>
-                  <c:pt idx="1">
+                  <c:pt idx="64">
                     <c:v>Aug 2025</c:v>
                   </c:pt>
-                  <c:pt idx="2">
+                  <c:pt idx="65">
                     <c:v>Sep 2025</c:v>
                   </c:pt>
-                  <c:pt idx="3">
+                  <c:pt idx="66">
                     <c:v>Oct 2025</c:v>
                   </c:pt>
-                  <c:pt idx="4">
+                  <c:pt idx="67">
                     <c:v>Nov 2025</c:v>
                   </c:pt>
-                  <c:pt idx="5">
+                  <c:pt idx="68">
                     <c:v>Dec 2025</c:v>
                   </c:pt>
-                  <c:pt idx="6">
+                  <c:pt idx="69">
                     <c:v>Jan 2026</c:v>
                   </c:pt>
-                  <c:pt idx="7">
+                  <c:pt idx="70">
                     <c:v>Feb 2026</c:v>
                   </c:pt>
-                  <c:pt idx="8">
+                  <c:pt idx="71">
                     <c:v>Mar 2026</c:v>
                   </c:pt>
-                  <c:pt idx="9">
+                  <c:pt idx="72">
                     <c:v>Apr 2026</c:v>
                   </c:pt>
                 </c:lvl>
@@ -529,39 +1474,228 @@
           </c:cat>
           <c:val>
             <c:numRef>
-              <c:f>Sheet1!$D$2:$D$11</c:f>
+              <c:f>Sheet1!$D$2:$D$74</c:f>
               <c:numCache>
                 <c:formatCode>General</c:formatCode>
-                <c:ptCount val="10"/>
+                <c:ptCount val="73"/>
                 <c:pt idx="0">
                   <c:v>100</c:v>
                 </c:pt>
                 <c:pt idx="1">
-                  <c:v>100.3</c:v>
+                  <c:v>100.02</c:v>
                 </c:pt>
                 <c:pt idx="2">
-                  <c:v>100.58</c:v>
+                  <c:v>100.03</c:v>
                 </c:pt>
                 <c:pt idx="3">
-                  <c:v>100.87</c:v>
+                  <c:v>100.04</c:v>
                 </c:pt>
                 <c:pt idx="4">
-                  <c:v>101.15</c:v>
+                  <c:v>100.06</c:v>
                 </c:pt>
                 <c:pt idx="5">
-                  <c:v>101.71</c:v>
+                  <c:v>100.07</c:v>
                 </c:pt>
                 <c:pt idx="6">
-                  <c:v>101.71</c:v>
+                  <c:v>100.08</c:v>
                 </c:pt>
                 <c:pt idx="7">
-                  <c:v>101.96</c:v>
+                  <c:v>100.08</c:v>
                 </c:pt>
                 <c:pt idx="8">
-                  <c:v>102.23</c:v>
+                  <c:v>100.09</c:v>
                 </c:pt>
                 <c:pt idx="9">
-                  <c:v>102.5</c:v>
+                  <c:v>100.09</c:v>
+                </c:pt>
+                <c:pt idx="10">
+                  <c:v>100.1</c:v>
+                </c:pt>
+                <c:pt idx="11">
+                  <c:v>100.1</c:v>
+                </c:pt>
+                <c:pt idx="12">
+                  <c:v>100.11</c:v>
+                </c:pt>
+                <c:pt idx="13">
+                  <c:v>100.12</c:v>
+                </c:pt>
+                <c:pt idx="14">
+                  <c:v>100.12</c:v>
+                </c:pt>
+                <c:pt idx="15">
+                  <c:v>100.13</c:v>
+                </c:pt>
+                <c:pt idx="16">
+                  <c:v>100.13</c:v>
+                </c:pt>
+                <c:pt idx="17">
+                  <c:v>100.12</c:v>
+                </c:pt>
+                <c:pt idx="18">
+                  <c:v>100.22</c:v>
+                </c:pt>
+                <c:pt idx="19">
+                  <c:v>100.35</c:v>
+                </c:pt>
+                <c:pt idx="20">
+                  <c:v>100.53</c:v>
+                </c:pt>
+                <c:pt idx="21">
+                  <c:v>100.79</c:v>
+                </c:pt>
+                <c:pt idx="22">
+                  <c:v>101.13</c:v>
+                </c:pt>
+                <c:pt idx="23">
+                  <c:v>101.51</c:v>
+                </c:pt>
+                <c:pt idx="24">
+                  <c:v>101.97</c:v>
+                </c:pt>
+                <c:pt idx="25">
+                  <c:v>102.53</c:v>
+                </c:pt>
+                <c:pt idx="26">
+                  <c:v>103.14</c:v>
+                </c:pt>
+                <c:pt idx="27">
+                  <c:v>103.81</c:v>
+                </c:pt>
+                <c:pt idx="28">
+                  <c:v>104.54</c:v>
+                </c:pt>
+                <c:pt idx="29">
+                  <c:v>105.31</c:v>
+                </c:pt>
+                <c:pt idx="30">
+                  <c:v>106.07</c:v>
+                </c:pt>
+                <c:pt idx="31">
+                  <c:v>107</c:v>
+                </c:pt>
+                <c:pt idx="32">
+                  <c:v>107.84</c:v>
+                </c:pt>
+                <c:pt idx="33">
+                  <c:v>108.75</c:v>
+                </c:pt>
+                <c:pt idx="34">
+                  <c:v>109.56</c:v>
+                </c:pt>
+                <c:pt idx="35">
+                  <c:v>110.46</c:v>
+                </c:pt>
+                <c:pt idx="36">
+                  <c:v>111.28</c:v>
+                </c:pt>
+                <c:pt idx="37">
+                  <c:v>112.26</c:v>
+                </c:pt>
+                <c:pt idx="38">
+                  <c:v>113.16</c:v>
+                </c:pt>
+                <c:pt idx="39">
+                  <c:v>114.09</c:v>
+                </c:pt>
+                <c:pt idx="40">
+                  <c:v>114.96</c:v>
+                </c:pt>
+                <c:pt idx="41">
+                  <c:v>115.74</c:v>
+                </c:pt>
+                <c:pt idx="42">
+                  <c:v>116.51</c:v>
+                </c:pt>
+                <c:pt idx="43">
+                  <c:v>117.23</c:v>
+                </c:pt>
+                <c:pt idx="44">
+                  <c:v>117.94</c:v>
+                </c:pt>
+                <c:pt idx="45">
+                  <c:v>118.64</c:v>
+                </c:pt>
+                <c:pt idx="46">
+                  <c:v>119.24</c:v>
+                </c:pt>
+                <c:pt idx="47">
+                  <c:v>119.77</c:v>
+                </c:pt>
+                <c:pt idx="48">
+                  <c:v>120.34</c:v>
+                </c:pt>
+                <c:pt idx="49">
+                  <c:v>120.84</c:v>
+                </c:pt>
+                <c:pt idx="50">
+                  <c:v>121.28</c:v>
+                </c:pt>
+                <c:pt idx="51">
+                  <c:v>121.72</c:v>
+                </c:pt>
+                <c:pt idx="52">
+                  <c:v>122.16</c:v>
+                </c:pt>
+                <c:pt idx="53">
+                  <c:v>122.57</c:v>
+                </c:pt>
+                <c:pt idx="54">
+                  <c:v>122.99</c:v>
+                </c:pt>
+                <c:pt idx="55">
+                  <c:v>123.39</c:v>
+                </c:pt>
+                <c:pt idx="56">
+                  <c:v>123.79</c:v>
+                </c:pt>
+                <c:pt idx="57">
+                  <c:v>124.16</c:v>
+                </c:pt>
+                <c:pt idx="58">
+                  <c:v>124.5</c:v>
+                </c:pt>
+                <c:pt idx="59">
+                  <c:v>124.88</c:v>
+                </c:pt>
+                <c:pt idx="60">
+                  <c:v>125.26</c:v>
+                </c:pt>
+                <c:pt idx="61">
+                  <c:v>125.64</c:v>
+                </c:pt>
+                <c:pt idx="62">
+                  <c:v>126.02</c:v>
+                </c:pt>
+                <c:pt idx="63">
+                  <c:v>126.39</c:v>
+                </c:pt>
+                <c:pt idx="64">
+                  <c:v>126.77</c:v>
+                </c:pt>
+                <c:pt idx="65">
+                  <c:v>127.12</c:v>
+                </c:pt>
+                <c:pt idx="66">
+                  <c:v>127.48</c:v>
+                </c:pt>
+                <c:pt idx="67">
+                  <c:v>127.84</c:v>
+                </c:pt>
+                <c:pt idx="68">
+                  <c:v>128.2</c:v>
+                </c:pt>
+                <c:pt idx="69">
+                  <c:v>128.55</c:v>
+                </c:pt>
+                <c:pt idx="70">
+                  <c:v>128.87</c:v>
+                </c:pt>
+                <c:pt idx="71">
+                  <c:v>129.21</c:v>
+                </c:pt>
+                <c:pt idx="72">
+                  <c:v>129.55</c:v>
                 </c:pt>
               </c:numCache>
             </c:numRef>
@@ -637,7 +1771,7 @@
         <c:auto val="1"/>
         <c:lblAlgn val="ctr"/>
         <c:noMultiLvlLbl val="1"/>
-        <c:tickLblSkip val="1"/>
+        <c:tickLblSkip val="7"/>
       </c:catAx>
       <c:valAx>
         <c:axId val="2094734552"/>
@@ -3113,7 +4247,7 @@
                 <a:ea typeface="Calibri" pitchFamily="34" charset="-122"/>
                 <a:cs typeface="Calibri" pitchFamily="34" charset="-120"/>
               </a:rPr>
-              <a:t>prueba 13 CLP</a:t>
+              <a:t>prueba CLP</a:t>
             </a:r>
             <a:endParaRPr lang="en-US" sz="800" dirty="0"/>
           </a:p>
@@ -3762,7 +4896,7 @@
                           <a:ea typeface="Calibri" pitchFamily="34" charset="-122"/>
                           <a:cs typeface="Calibri" pitchFamily="34" charset="-120"/>
                         </a:rPr>
-                        <a:t>0.37%</a:t>
+                        <a:t>0.38%</a:t>
                       </a:r>
                       <a:endParaRPr lang="en-US" sz="750" dirty="0">
                         <a:latin typeface="Calibri" charset="0"/>
@@ -3898,7 +5032,7 @@
                           <a:ea typeface="Calibri" pitchFamily="34" charset="-122"/>
                           <a:cs typeface="Calibri" pitchFamily="34" charset="-120"/>
                         </a:rPr>
-                        <a:t>2.30%</a:t>
+                        <a:t>2.33%</a:t>
                       </a:r>
                       <a:endParaRPr lang="en-US" sz="750" dirty="0">
                         <a:latin typeface="Calibri" charset="0"/>
@@ -3966,7 +5100,7 @@
                           <a:ea typeface="Calibri" pitchFamily="34" charset="-122"/>
                           <a:cs typeface="Calibri" pitchFamily="34" charset="-120"/>
                         </a:rPr>
-                        <a:t>4.82%</a:t>
+                        <a:t>4.90%</a:t>
                       </a:r>
                       <a:endParaRPr lang="en-US" sz="750" dirty="0">
                         <a:latin typeface="Calibri" charset="0"/>
@@ -4582,7 +5716,7 @@
                           <a:ea typeface="Calibri" pitchFamily="34" charset="-122"/>
                           <a:cs typeface="Calibri" pitchFamily="34" charset="-120"/>
                         </a:rPr>
-                        <a:t>0.56%</a:t>
+                        <a:t>0.59%</a:t>
                       </a:r>
                       <a:endParaRPr lang="en-US" sz="750" dirty="0">
                         <a:latin typeface="Calibri" charset="0"/>
@@ -4650,7 +5784,7 @@
                           <a:ea typeface="Calibri" pitchFamily="34" charset="-122"/>
                           <a:cs typeface="Calibri" pitchFamily="34" charset="-120"/>
                         </a:rPr>
-                        <a:t>1.65%</a:t>
+                        <a:t>1.73%</a:t>
                       </a:r>
                       <a:endParaRPr lang="en-US" sz="750" dirty="0">
                         <a:latin typeface="Calibri" charset="0"/>
@@ -4718,7 +5852,7 @@
                           <a:ea typeface="Calibri" pitchFamily="34" charset="-122"/>
                           <a:cs typeface="Calibri" pitchFamily="34" charset="-120"/>
                         </a:rPr>
-                        <a:t>3.30%</a:t>
+                        <a:t>3.47%</a:t>
                       </a:r>
                       <a:endParaRPr lang="en-US" sz="750" dirty="0">
                         <a:latin typeface="Calibri" charset="0"/>
@@ -4786,7 +5920,7 @@
                           <a:ea typeface="Calibri" pitchFamily="34" charset="-122"/>
                           <a:cs typeface="Calibri" pitchFamily="34" charset="-120"/>
                         </a:rPr>
-                        <a:t>—</a:t>
+                        <a:t>7.10%</a:t>
                       </a:r>
                       <a:endParaRPr lang="en-US" sz="750" dirty="0">
                         <a:latin typeface="Calibri" charset="0"/>
@@ -4854,7 +5988,7 @@
                           <a:ea typeface="Calibri" pitchFamily="34" charset="-122"/>
                           <a:cs typeface="Calibri" pitchFamily="34" charset="-120"/>
                         </a:rPr>
-                        <a:t>4.94%</a:t>
+                        <a:t>5.19%</a:t>
                       </a:r>
                       <a:endParaRPr lang="en-US" sz="750" dirty="0">
                         <a:latin typeface="Calibri" charset="0"/>
@@ -4996,20 +6130,20 @@
               <a:tblPr/>
               <a:tblGrid>
                 <a:gridCol w="201168"/>
-                <a:gridCol w="822960"/>
-                <a:gridCol w="246888"/>
-                <a:gridCol w="246888"/>
-                <a:gridCol w="246888"/>
-                <a:gridCol w="246888"/>
-                <a:gridCol w="246888"/>
-                <a:gridCol w="246888"/>
-                <a:gridCol w="246888"/>
-                <a:gridCol w="246888"/>
-                <a:gridCol w="246888"/>
-                <a:gridCol w="246888"/>
-                <a:gridCol w="246888"/>
-                <a:gridCol w="246888"/>
-                <a:gridCol w="283464"/>
+                <a:gridCol w="804672"/>
+                <a:gridCol w="292608"/>
+                <a:gridCol w="292608"/>
+                <a:gridCol w="292608"/>
+                <a:gridCol w="292608"/>
+                <a:gridCol w="292608"/>
+                <a:gridCol w="292608"/>
+                <a:gridCol w="292608"/>
+                <a:gridCol w="292608"/>
+                <a:gridCol w="292608"/>
+                <a:gridCol w="292608"/>
+                <a:gridCol w="292608"/>
+                <a:gridCol w="292608"/>
+                <a:gridCol w="301752"/>
               </a:tblGrid>
               <a:tr h="123444">
                 <a:tc>
@@ -6148,6 +7282,222 @@
                       <a:pPr algn="ctr" indent="0" marL="0">
                         <a:buNone/>
                       </a:pPr>
+                      <a:endParaRPr lang="en-US" sz="500" dirty="0">
+                        <a:latin typeface="Calibri" charset="0"/>
+                        <a:ea typeface="Calibri" charset="0"/>
+                        <a:cs typeface="Calibri" charset="0"/>
+                      </a:endParaRPr>
+                    </a:p>
+                  </a:txBody>
+                  <a:tcPr marL="91440" marR="91440" marT="45720" marB="45720">
+                    <a:lnL w="2540" cap="flat" cmpd="sng" algn="ctr">
+                      <a:solidFill>
+                        <a:srgbClr val="EEEEEE"/>
+                      </a:solidFill>
+                      <a:prstDash val="solid"/>
+                      <a:round/>
+                      <a:headEnd type="none" w="med" len="med"/>
+                      <a:tailEnd type="none" w="med" len="med"/>
+                    </a:lnL>
+                    <a:lnR w="2540" cap="flat" cmpd="sng" algn="ctr">
+                      <a:solidFill>
+                        <a:srgbClr val="EEEEEE"/>
+                      </a:solidFill>
+                      <a:prstDash val="solid"/>
+                      <a:round/>
+                      <a:headEnd type="none" w="med" len="med"/>
+                      <a:tailEnd type="none" w="med" len="med"/>
+                    </a:lnR>
+                    <a:lnT w="2540" cap="flat" cmpd="sng" algn="ctr">
+                      <a:solidFill>
+                        <a:srgbClr val="EEEEEE"/>
+                      </a:solidFill>
+                      <a:prstDash val="solid"/>
+                      <a:round/>
+                      <a:headEnd type="none" w="med" len="med"/>
+                      <a:tailEnd type="none" w="med" len="med"/>
+                    </a:lnT>
+                    <a:lnB w="2540" cap="flat" cmpd="sng" algn="ctr">
+                      <a:solidFill>
+                        <a:srgbClr val="EEEEEE"/>
+                      </a:solidFill>
+                      <a:prstDash val="solid"/>
+                      <a:round/>
+                      <a:headEnd type="none" w="med" len="med"/>
+                      <a:tailEnd type="none" w="med" len="med"/>
+                    </a:lnB>
+                  </a:tcPr>
+                </a:tc>
+                <a:tc>
+                  <a:txBody>
+                    <a:bodyPr/>
+                    <a:lstStyle/>
+                    <a:p>
+                      <a:pPr algn="ctr" indent="0" marL="0">
+                        <a:buNone/>
+                      </a:pPr>
+                      <a:endParaRPr lang="en-US" sz="500" dirty="0">
+                        <a:latin typeface="Calibri" charset="0"/>
+                        <a:ea typeface="Calibri" charset="0"/>
+                        <a:cs typeface="Calibri" charset="0"/>
+                      </a:endParaRPr>
+                    </a:p>
+                  </a:txBody>
+                  <a:tcPr marL="91440" marR="91440" marT="45720" marB="45720">
+                    <a:lnL w="2540" cap="flat" cmpd="sng" algn="ctr">
+                      <a:solidFill>
+                        <a:srgbClr val="EEEEEE"/>
+                      </a:solidFill>
+                      <a:prstDash val="solid"/>
+                      <a:round/>
+                      <a:headEnd type="none" w="med" len="med"/>
+                      <a:tailEnd type="none" w="med" len="med"/>
+                    </a:lnL>
+                    <a:lnR w="2540" cap="flat" cmpd="sng" algn="ctr">
+                      <a:solidFill>
+                        <a:srgbClr val="EEEEEE"/>
+                      </a:solidFill>
+                      <a:prstDash val="solid"/>
+                      <a:round/>
+                      <a:headEnd type="none" w="med" len="med"/>
+                      <a:tailEnd type="none" w="med" len="med"/>
+                    </a:lnR>
+                    <a:lnT w="2540" cap="flat" cmpd="sng" algn="ctr">
+                      <a:solidFill>
+                        <a:srgbClr val="EEEEEE"/>
+                      </a:solidFill>
+                      <a:prstDash val="solid"/>
+                      <a:round/>
+                      <a:headEnd type="none" w="med" len="med"/>
+                      <a:tailEnd type="none" w="med" len="med"/>
+                    </a:lnT>
+                    <a:lnB w="2540" cap="flat" cmpd="sng" algn="ctr">
+                      <a:solidFill>
+                        <a:srgbClr val="EEEEEE"/>
+                      </a:solidFill>
+                      <a:prstDash val="solid"/>
+                      <a:round/>
+                      <a:headEnd type="none" w="med" len="med"/>
+                      <a:tailEnd type="none" w="med" len="med"/>
+                    </a:lnB>
+                  </a:tcPr>
+                </a:tc>
+                <a:tc>
+                  <a:txBody>
+                    <a:bodyPr/>
+                    <a:lstStyle/>
+                    <a:p>
+                      <a:pPr algn="ctr" indent="0" marL="0">
+                        <a:buNone/>
+                      </a:pPr>
+                      <a:endParaRPr lang="en-US" sz="500" dirty="0">
+                        <a:latin typeface="Calibri" charset="0"/>
+                        <a:ea typeface="Calibri" charset="0"/>
+                        <a:cs typeface="Calibri" charset="0"/>
+                      </a:endParaRPr>
+                    </a:p>
+                  </a:txBody>
+                  <a:tcPr marL="91440" marR="91440" marT="45720" marB="45720">
+                    <a:lnL w="2540" cap="flat" cmpd="sng" algn="ctr">
+                      <a:solidFill>
+                        <a:srgbClr val="EEEEEE"/>
+                      </a:solidFill>
+                      <a:prstDash val="solid"/>
+                      <a:round/>
+                      <a:headEnd type="none" w="med" len="med"/>
+                      <a:tailEnd type="none" w="med" len="med"/>
+                    </a:lnL>
+                    <a:lnR w="2540" cap="flat" cmpd="sng" algn="ctr">
+                      <a:solidFill>
+                        <a:srgbClr val="EEEEEE"/>
+                      </a:solidFill>
+                      <a:prstDash val="solid"/>
+                      <a:round/>
+                      <a:headEnd type="none" w="med" len="med"/>
+                      <a:tailEnd type="none" w="med" len="med"/>
+                    </a:lnR>
+                    <a:lnT w="2540" cap="flat" cmpd="sng" algn="ctr">
+                      <a:solidFill>
+                        <a:srgbClr val="EEEEEE"/>
+                      </a:solidFill>
+                      <a:prstDash val="solid"/>
+                      <a:round/>
+                      <a:headEnd type="none" w="med" len="med"/>
+                      <a:tailEnd type="none" w="med" len="med"/>
+                    </a:lnT>
+                    <a:lnB w="2540" cap="flat" cmpd="sng" algn="ctr">
+                      <a:solidFill>
+                        <a:srgbClr val="EEEEEE"/>
+                      </a:solidFill>
+                      <a:prstDash val="solid"/>
+                      <a:round/>
+                      <a:headEnd type="none" w="med" len="med"/>
+                      <a:tailEnd type="none" w="med" len="med"/>
+                    </a:lnB>
+                  </a:tcPr>
+                </a:tc>
+                <a:tc>
+                  <a:txBody>
+                    <a:bodyPr/>
+                    <a:lstStyle/>
+                    <a:p>
+                      <a:pPr algn="ctr" indent="0" marL="0">
+                        <a:buNone/>
+                      </a:pPr>
+                      <a:endParaRPr lang="en-US" sz="500" dirty="0">
+                        <a:latin typeface="Calibri" charset="0"/>
+                        <a:ea typeface="Calibri" charset="0"/>
+                        <a:cs typeface="Calibri" charset="0"/>
+                      </a:endParaRPr>
+                    </a:p>
+                  </a:txBody>
+                  <a:tcPr marL="91440" marR="91440" marT="45720" marB="45720">
+                    <a:lnL w="2540" cap="flat" cmpd="sng" algn="ctr">
+                      <a:solidFill>
+                        <a:srgbClr val="EEEEEE"/>
+                      </a:solidFill>
+                      <a:prstDash val="solid"/>
+                      <a:round/>
+                      <a:headEnd type="none" w="med" len="med"/>
+                      <a:tailEnd type="none" w="med" len="med"/>
+                    </a:lnL>
+                    <a:lnR w="2540" cap="flat" cmpd="sng" algn="ctr">
+                      <a:solidFill>
+                        <a:srgbClr val="EEEEEE"/>
+                      </a:solidFill>
+                      <a:prstDash val="solid"/>
+                      <a:round/>
+                      <a:headEnd type="none" w="med" len="med"/>
+                      <a:tailEnd type="none" w="med" len="med"/>
+                    </a:lnR>
+                    <a:lnT w="2540" cap="flat" cmpd="sng" algn="ctr">
+                      <a:solidFill>
+                        <a:srgbClr val="EEEEEE"/>
+                      </a:solidFill>
+                      <a:prstDash val="solid"/>
+                      <a:round/>
+                      <a:headEnd type="none" w="med" len="med"/>
+                      <a:tailEnd type="none" w="med" len="med"/>
+                    </a:lnT>
+                    <a:lnB w="2540" cap="flat" cmpd="sng" algn="ctr">
+                      <a:solidFill>
+                        <a:srgbClr val="EEEEEE"/>
+                      </a:solidFill>
+                      <a:prstDash val="solid"/>
+                      <a:round/>
+                      <a:headEnd type="none" w="med" len="med"/>
+                      <a:tailEnd type="none" w="med" len="med"/>
+                    </a:lnB>
+                  </a:tcPr>
+                </a:tc>
+                <a:tc>
+                  <a:txBody>
+                    <a:bodyPr/>
+                    <a:lstStyle/>
+                    <a:p>
+                      <a:pPr algn="ctr" indent="0" marL="0">
+                        <a:buNone/>
+                      </a:pPr>
                       <a:r>
                         <a:rPr lang="en-US" sz="500" dirty="0">
                           <a:solidFill>
@@ -6157,7 +7507,7 @@
                           <a:ea typeface="Calibri" pitchFamily="34" charset="-122"/>
                           <a:cs typeface="Calibri" pitchFamily="34" charset="-120"/>
                         </a:rPr>
-                        <a:t>0.15%</a:t>
+                        <a:t>0.05%</a:t>
                       </a:r>
                       <a:endParaRPr lang="en-US" sz="500" dirty="0">
                         <a:latin typeface="Calibri" charset="0"/>
@@ -6222,7 +7572,7 @@
                           <a:ea typeface="Calibri" pitchFamily="34" charset="-122"/>
                           <a:cs typeface="Calibri" pitchFamily="34" charset="-120"/>
                         </a:rPr>
-                        <a:t>0.15%</a:t>
+                        <a:t>0.05%</a:t>
                       </a:r>
                       <a:endParaRPr lang="en-US" sz="500" dirty="0">
                         <a:latin typeface="Calibri" charset="0"/>
@@ -6287,7 +7637,7 @@
                           <a:ea typeface="Calibri" pitchFamily="34" charset="-122"/>
                           <a:cs typeface="Calibri" pitchFamily="34" charset="-120"/>
                         </a:rPr>
-                        <a:t>0.11%</a:t>
+                        <a:t>0.05%</a:t>
                       </a:r>
                       <a:endParaRPr lang="en-US" sz="500" dirty="0">
                         <a:latin typeface="Calibri" charset="0"/>
@@ -6352,6 +7702,71 @@
                           <a:ea typeface="Calibri" pitchFamily="34" charset="-122"/>
                           <a:cs typeface="Calibri" pitchFamily="34" charset="-120"/>
                         </a:rPr>
+                        <a:t>0.03%</a:t>
+                      </a:r>
+                      <a:endParaRPr lang="en-US" sz="500" dirty="0">
+                        <a:latin typeface="Calibri" charset="0"/>
+                        <a:ea typeface="Calibri" charset="0"/>
+                        <a:cs typeface="Calibri" charset="0"/>
+                      </a:endParaRPr>
+                    </a:p>
+                  </a:txBody>
+                  <a:tcPr marL="91440" marR="91440" marT="45720" marB="45720">
+                    <a:lnL w="2540" cap="flat" cmpd="sng" algn="ctr">
+                      <a:solidFill>
+                        <a:srgbClr val="EEEEEE"/>
+                      </a:solidFill>
+                      <a:prstDash val="solid"/>
+                      <a:round/>
+                      <a:headEnd type="none" w="med" len="med"/>
+                      <a:tailEnd type="none" w="med" len="med"/>
+                    </a:lnL>
+                    <a:lnR w="2540" cap="flat" cmpd="sng" algn="ctr">
+                      <a:solidFill>
+                        <a:srgbClr val="EEEEEE"/>
+                      </a:solidFill>
+                      <a:prstDash val="solid"/>
+                      <a:round/>
+                      <a:headEnd type="none" w="med" len="med"/>
+                      <a:tailEnd type="none" w="med" len="med"/>
+                    </a:lnR>
+                    <a:lnT w="2540" cap="flat" cmpd="sng" algn="ctr">
+                      <a:solidFill>
+                        <a:srgbClr val="EEEEEE"/>
+                      </a:solidFill>
+                      <a:prstDash val="solid"/>
+                      <a:round/>
+                      <a:headEnd type="none" w="med" len="med"/>
+                      <a:tailEnd type="none" w="med" len="med"/>
+                    </a:lnT>
+                    <a:lnB w="2540" cap="flat" cmpd="sng" algn="ctr">
+                      <a:solidFill>
+                        <a:srgbClr val="EEEEEE"/>
+                      </a:solidFill>
+                      <a:prstDash val="solid"/>
+                      <a:round/>
+                      <a:headEnd type="none" w="med" len="med"/>
+                      <a:tailEnd type="none" w="med" len="med"/>
+                    </a:lnB>
+                  </a:tcPr>
+                </a:tc>
+                <a:tc>
+                  <a:txBody>
+                    <a:bodyPr/>
+                    <a:lstStyle/>
+                    <a:p>
+                      <a:pPr algn="ctr" indent="0" marL="0">
+                        <a:buNone/>
+                      </a:pPr>
+                      <a:r>
+                        <a:rPr lang="en-US" sz="500" dirty="0">
+                          <a:solidFill>
+                            <a:srgbClr val="777777"/>
+                          </a:solidFill>
+                          <a:latin typeface="Calibri" pitchFamily="34" charset="0"/>
+                          <a:ea typeface="Calibri" pitchFamily="34" charset="-122"/>
+                          <a:cs typeface="Calibri" pitchFamily="34" charset="-120"/>
+                        </a:rPr>
                         <a:t>0.04%</a:t>
                       </a:r>
                       <a:endParaRPr lang="en-US" sz="500" dirty="0">
@@ -6482,6 +7897,71 @@
                           <a:ea typeface="Calibri" pitchFamily="34" charset="-122"/>
                           <a:cs typeface="Calibri" pitchFamily="34" charset="-120"/>
                         </a:rPr>
+                        <a:t>0.03%</a:t>
+                      </a:r>
+                      <a:endParaRPr lang="en-US" sz="500" dirty="0">
+                        <a:latin typeface="Calibri" charset="0"/>
+                        <a:ea typeface="Calibri" charset="0"/>
+                        <a:cs typeface="Calibri" charset="0"/>
+                      </a:endParaRPr>
+                    </a:p>
+                  </a:txBody>
+                  <a:tcPr marL="91440" marR="91440" marT="45720" marB="45720">
+                    <a:lnL w="2540" cap="flat" cmpd="sng" algn="ctr">
+                      <a:solidFill>
+                        <a:srgbClr val="EEEEEE"/>
+                      </a:solidFill>
+                      <a:prstDash val="solid"/>
+                      <a:round/>
+                      <a:headEnd type="none" w="med" len="med"/>
+                      <a:tailEnd type="none" w="med" len="med"/>
+                    </a:lnL>
+                    <a:lnR w="2540" cap="flat" cmpd="sng" algn="ctr">
+                      <a:solidFill>
+                        <a:srgbClr val="EEEEEE"/>
+                      </a:solidFill>
+                      <a:prstDash val="solid"/>
+                      <a:round/>
+                      <a:headEnd type="none" w="med" len="med"/>
+                      <a:tailEnd type="none" w="med" len="med"/>
+                    </a:lnR>
+                    <a:lnT w="2540" cap="flat" cmpd="sng" algn="ctr">
+                      <a:solidFill>
+                        <a:srgbClr val="EEEEEE"/>
+                      </a:solidFill>
+                      <a:prstDash val="solid"/>
+                      <a:round/>
+                      <a:headEnd type="none" w="med" len="med"/>
+                      <a:tailEnd type="none" w="med" len="med"/>
+                    </a:lnT>
+                    <a:lnB w="2540" cap="flat" cmpd="sng" algn="ctr">
+                      <a:solidFill>
+                        <a:srgbClr val="EEEEEE"/>
+                      </a:solidFill>
+                      <a:prstDash val="solid"/>
+                      <a:round/>
+                      <a:headEnd type="none" w="med" len="med"/>
+                      <a:tailEnd type="none" w="med" len="med"/>
+                    </a:lnB>
+                  </a:tcPr>
+                </a:tc>
+                <a:tc>
+                  <a:txBody>
+                    <a:bodyPr/>
+                    <a:lstStyle/>
+                    <a:p>
+                      <a:pPr algn="ctr" indent="0" marL="0">
+                        <a:buNone/>
+                      </a:pPr>
+                      <a:r>
+                        <a:rPr lang="en-US" sz="500" dirty="0">
+                          <a:solidFill>
+                            <a:srgbClr val="777777"/>
+                          </a:solidFill>
+                          <a:latin typeface="Calibri" pitchFamily="34" charset="0"/>
+                          <a:ea typeface="Calibri" pitchFamily="34" charset="-122"/>
+                          <a:cs typeface="Calibri" pitchFamily="34" charset="-120"/>
+                        </a:rPr>
                         <a:t>0.04%</a:t>
                       </a:r>
                       <a:endParaRPr lang="en-US" sz="500" dirty="0">
@@ -6539,7 +8019,7 @@
                         <a:buNone/>
                       </a:pPr>
                       <a:r>
-                        <a:rPr lang="en-US" sz="500" dirty="0">
+                        <a:rPr lang="en-US" sz="500" b="1" dirty="0">
                           <a:solidFill>
                             <a:srgbClr val="777777"/>
                           </a:solidFill>
@@ -6547,397 +8027,7 @@
                           <a:ea typeface="Calibri" pitchFamily="34" charset="-122"/>
                           <a:cs typeface="Calibri" pitchFamily="34" charset="-120"/>
                         </a:rPr>
-                        <a:t>0.04%</a:t>
-                      </a:r>
-                      <a:endParaRPr lang="en-US" sz="500" dirty="0">
-                        <a:latin typeface="Calibri" charset="0"/>
-                        <a:ea typeface="Calibri" charset="0"/>
-                        <a:cs typeface="Calibri" charset="0"/>
-                      </a:endParaRPr>
-                    </a:p>
-                  </a:txBody>
-                  <a:tcPr marL="91440" marR="91440" marT="45720" marB="45720">
-                    <a:lnL w="2540" cap="flat" cmpd="sng" algn="ctr">
-                      <a:solidFill>
-                        <a:srgbClr val="EEEEEE"/>
-                      </a:solidFill>
-                      <a:prstDash val="solid"/>
-                      <a:round/>
-                      <a:headEnd type="none" w="med" len="med"/>
-                      <a:tailEnd type="none" w="med" len="med"/>
-                    </a:lnL>
-                    <a:lnR w="2540" cap="flat" cmpd="sng" algn="ctr">
-                      <a:solidFill>
-                        <a:srgbClr val="EEEEEE"/>
-                      </a:solidFill>
-                      <a:prstDash val="solid"/>
-                      <a:round/>
-                      <a:headEnd type="none" w="med" len="med"/>
-                      <a:tailEnd type="none" w="med" len="med"/>
-                    </a:lnR>
-                    <a:lnT w="2540" cap="flat" cmpd="sng" algn="ctr">
-                      <a:solidFill>
-                        <a:srgbClr val="EEEEEE"/>
-                      </a:solidFill>
-                      <a:prstDash val="solid"/>
-                      <a:round/>
-                      <a:headEnd type="none" w="med" len="med"/>
-                      <a:tailEnd type="none" w="med" len="med"/>
-                    </a:lnT>
-                    <a:lnB w="2540" cap="flat" cmpd="sng" algn="ctr">
-                      <a:solidFill>
-                        <a:srgbClr val="EEEEEE"/>
-                      </a:solidFill>
-                      <a:prstDash val="solid"/>
-                      <a:round/>
-                      <a:headEnd type="none" w="med" len="med"/>
-                      <a:tailEnd type="none" w="med" len="med"/>
-                    </a:lnB>
-                  </a:tcPr>
-                </a:tc>
-                <a:tc>
-                  <a:txBody>
-                    <a:bodyPr/>
-                    <a:lstStyle/>
-                    <a:p>
-                      <a:pPr algn="ctr" indent="0" marL="0">
-                        <a:buNone/>
-                      </a:pPr>
-                      <a:r>
-                        <a:rPr lang="en-US" sz="500" dirty="0">
-                          <a:solidFill>
-                            <a:srgbClr val="777777"/>
-                          </a:solidFill>
-                          <a:latin typeface="Calibri" pitchFamily="34" charset="0"/>
-                          <a:ea typeface="Calibri" pitchFamily="34" charset="-122"/>
-                          <a:cs typeface="Calibri" pitchFamily="34" charset="-120"/>
-                        </a:rPr>
-                        <a:t>0.04%</a:t>
-                      </a:r>
-                      <a:endParaRPr lang="en-US" sz="500" dirty="0">
-                        <a:latin typeface="Calibri" charset="0"/>
-                        <a:ea typeface="Calibri" charset="0"/>
-                        <a:cs typeface="Calibri" charset="0"/>
-                      </a:endParaRPr>
-                    </a:p>
-                  </a:txBody>
-                  <a:tcPr marL="91440" marR="91440" marT="45720" marB="45720">
-                    <a:lnL w="2540" cap="flat" cmpd="sng" algn="ctr">
-                      <a:solidFill>
-                        <a:srgbClr val="EEEEEE"/>
-                      </a:solidFill>
-                      <a:prstDash val="solid"/>
-                      <a:round/>
-                      <a:headEnd type="none" w="med" len="med"/>
-                      <a:tailEnd type="none" w="med" len="med"/>
-                    </a:lnL>
-                    <a:lnR w="2540" cap="flat" cmpd="sng" algn="ctr">
-                      <a:solidFill>
-                        <a:srgbClr val="EEEEEE"/>
-                      </a:solidFill>
-                      <a:prstDash val="solid"/>
-                      <a:round/>
-                      <a:headEnd type="none" w="med" len="med"/>
-                      <a:tailEnd type="none" w="med" len="med"/>
-                    </a:lnR>
-                    <a:lnT w="2540" cap="flat" cmpd="sng" algn="ctr">
-                      <a:solidFill>
-                        <a:srgbClr val="EEEEEE"/>
-                      </a:solidFill>
-                      <a:prstDash val="solid"/>
-                      <a:round/>
-                      <a:headEnd type="none" w="med" len="med"/>
-                      <a:tailEnd type="none" w="med" len="med"/>
-                    </a:lnT>
-                    <a:lnB w="2540" cap="flat" cmpd="sng" algn="ctr">
-                      <a:solidFill>
-                        <a:srgbClr val="EEEEEE"/>
-                      </a:solidFill>
-                      <a:prstDash val="solid"/>
-                      <a:round/>
-                      <a:headEnd type="none" w="med" len="med"/>
-                      <a:tailEnd type="none" w="med" len="med"/>
-                    </a:lnB>
-                  </a:tcPr>
-                </a:tc>
-                <a:tc>
-                  <a:txBody>
-                    <a:bodyPr/>
-                    <a:lstStyle/>
-                    <a:p>
-                      <a:pPr algn="ctr" indent="0" marL="0">
-                        <a:buNone/>
-                      </a:pPr>
-                      <a:r>
-                        <a:rPr lang="en-US" sz="500" dirty="0">
-                          <a:solidFill>
-                            <a:srgbClr val="777777"/>
-                          </a:solidFill>
-                          <a:latin typeface="Calibri" pitchFamily="34" charset="0"/>
-                          <a:ea typeface="Calibri" pitchFamily="34" charset="-122"/>
-                          <a:cs typeface="Calibri" pitchFamily="34" charset="-120"/>
-                        </a:rPr>
-                        <a:t>0.04%</a:t>
-                      </a:r>
-                      <a:endParaRPr lang="en-US" sz="500" dirty="0">
-                        <a:latin typeface="Calibri" charset="0"/>
-                        <a:ea typeface="Calibri" charset="0"/>
-                        <a:cs typeface="Calibri" charset="0"/>
-                      </a:endParaRPr>
-                    </a:p>
-                  </a:txBody>
-                  <a:tcPr marL="91440" marR="91440" marT="45720" marB="45720">
-                    <a:lnL w="2540" cap="flat" cmpd="sng" algn="ctr">
-                      <a:solidFill>
-                        <a:srgbClr val="EEEEEE"/>
-                      </a:solidFill>
-                      <a:prstDash val="solid"/>
-                      <a:round/>
-                      <a:headEnd type="none" w="med" len="med"/>
-                      <a:tailEnd type="none" w="med" len="med"/>
-                    </a:lnL>
-                    <a:lnR w="2540" cap="flat" cmpd="sng" algn="ctr">
-                      <a:solidFill>
-                        <a:srgbClr val="EEEEEE"/>
-                      </a:solidFill>
-                      <a:prstDash val="solid"/>
-                      <a:round/>
-                      <a:headEnd type="none" w="med" len="med"/>
-                      <a:tailEnd type="none" w="med" len="med"/>
-                    </a:lnR>
-                    <a:lnT w="2540" cap="flat" cmpd="sng" algn="ctr">
-                      <a:solidFill>
-                        <a:srgbClr val="EEEEEE"/>
-                      </a:solidFill>
-                      <a:prstDash val="solid"/>
-                      <a:round/>
-                      <a:headEnd type="none" w="med" len="med"/>
-                      <a:tailEnd type="none" w="med" len="med"/>
-                    </a:lnT>
-                    <a:lnB w="2540" cap="flat" cmpd="sng" algn="ctr">
-                      <a:solidFill>
-                        <a:srgbClr val="EEEEEE"/>
-                      </a:solidFill>
-                      <a:prstDash val="solid"/>
-                      <a:round/>
-                      <a:headEnd type="none" w="med" len="med"/>
-                      <a:tailEnd type="none" w="med" len="med"/>
-                    </a:lnB>
-                  </a:tcPr>
-                </a:tc>
-                <a:tc>
-                  <a:txBody>
-                    <a:bodyPr/>
-                    <a:lstStyle/>
-                    <a:p>
-                      <a:pPr algn="ctr" indent="0" marL="0">
-                        <a:buNone/>
-                      </a:pPr>
-                      <a:r>
-                        <a:rPr lang="en-US" sz="500" dirty="0">
-                          <a:solidFill>
-                            <a:srgbClr val="777777"/>
-                          </a:solidFill>
-                          <a:latin typeface="Calibri" pitchFamily="34" charset="0"/>
-                          <a:ea typeface="Calibri" pitchFamily="34" charset="-122"/>
-                          <a:cs typeface="Calibri" pitchFamily="34" charset="-120"/>
-                        </a:rPr>
-                        <a:t>0.04%</a:t>
-                      </a:r>
-                      <a:endParaRPr lang="en-US" sz="500" dirty="0">
-                        <a:latin typeface="Calibri" charset="0"/>
-                        <a:ea typeface="Calibri" charset="0"/>
-                        <a:cs typeface="Calibri" charset="0"/>
-                      </a:endParaRPr>
-                    </a:p>
-                  </a:txBody>
-                  <a:tcPr marL="91440" marR="91440" marT="45720" marB="45720">
-                    <a:lnL w="2540" cap="flat" cmpd="sng" algn="ctr">
-                      <a:solidFill>
-                        <a:srgbClr val="EEEEEE"/>
-                      </a:solidFill>
-                      <a:prstDash val="solid"/>
-                      <a:round/>
-                      <a:headEnd type="none" w="med" len="med"/>
-                      <a:tailEnd type="none" w="med" len="med"/>
-                    </a:lnL>
-                    <a:lnR w="2540" cap="flat" cmpd="sng" algn="ctr">
-                      <a:solidFill>
-                        <a:srgbClr val="EEEEEE"/>
-                      </a:solidFill>
-                      <a:prstDash val="solid"/>
-                      <a:round/>
-                      <a:headEnd type="none" w="med" len="med"/>
-                      <a:tailEnd type="none" w="med" len="med"/>
-                    </a:lnR>
-                    <a:lnT w="2540" cap="flat" cmpd="sng" algn="ctr">
-                      <a:solidFill>
-                        <a:srgbClr val="EEEEEE"/>
-                      </a:solidFill>
-                      <a:prstDash val="solid"/>
-                      <a:round/>
-                      <a:headEnd type="none" w="med" len="med"/>
-                      <a:tailEnd type="none" w="med" len="med"/>
-                    </a:lnT>
-                    <a:lnB w="2540" cap="flat" cmpd="sng" algn="ctr">
-                      <a:solidFill>
-                        <a:srgbClr val="EEEEEE"/>
-                      </a:solidFill>
-                      <a:prstDash val="solid"/>
-                      <a:round/>
-                      <a:headEnd type="none" w="med" len="med"/>
-                      <a:tailEnd type="none" w="med" len="med"/>
-                    </a:lnB>
-                  </a:tcPr>
-                </a:tc>
-                <a:tc>
-                  <a:txBody>
-                    <a:bodyPr/>
-                    <a:lstStyle/>
-                    <a:p>
-                      <a:pPr algn="ctr" indent="0" marL="0">
-                        <a:buNone/>
-                      </a:pPr>
-                      <a:r>
-                        <a:rPr lang="en-US" sz="500" dirty="0">
-                          <a:solidFill>
-                            <a:srgbClr val="777777"/>
-                          </a:solidFill>
-                          <a:latin typeface="Calibri" pitchFamily="34" charset="0"/>
-                          <a:ea typeface="Calibri" pitchFamily="34" charset="-122"/>
-                          <a:cs typeface="Calibri" pitchFamily="34" charset="-120"/>
-                        </a:rPr>
-                        <a:t>0.04%</a:t>
-                      </a:r>
-                      <a:endParaRPr lang="en-US" sz="500" dirty="0">
-                        <a:latin typeface="Calibri" charset="0"/>
-                        <a:ea typeface="Calibri" charset="0"/>
-                        <a:cs typeface="Calibri" charset="0"/>
-                      </a:endParaRPr>
-                    </a:p>
-                  </a:txBody>
-                  <a:tcPr marL="91440" marR="91440" marT="45720" marB="45720">
-                    <a:lnL w="2540" cap="flat" cmpd="sng" algn="ctr">
-                      <a:solidFill>
-                        <a:srgbClr val="EEEEEE"/>
-                      </a:solidFill>
-                      <a:prstDash val="solid"/>
-                      <a:round/>
-                      <a:headEnd type="none" w="med" len="med"/>
-                      <a:tailEnd type="none" w="med" len="med"/>
-                    </a:lnL>
-                    <a:lnR w="2540" cap="flat" cmpd="sng" algn="ctr">
-                      <a:solidFill>
-                        <a:srgbClr val="EEEEEE"/>
-                      </a:solidFill>
-                      <a:prstDash val="solid"/>
-                      <a:round/>
-                      <a:headEnd type="none" w="med" len="med"/>
-                      <a:tailEnd type="none" w="med" len="med"/>
-                    </a:lnR>
-                    <a:lnT w="2540" cap="flat" cmpd="sng" algn="ctr">
-                      <a:solidFill>
-                        <a:srgbClr val="EEEEEE"/>
-                      </a:solidFill>
-                      <a:prstDash val="solid"/>
-                      <a:round/>
-                      <a:headEnd type="none" w="med" len="med"/>
-                      <a:tailEnd type="none" w="med" len="med"/>
-                    </a:lnT>
-                    <a:lnB w="2540" cap="flat" cmpd="sng" algn="ctr">
-                      <a:solidFill>
-                        <a:srgbClr val="EEEEEE"/>
-                      </a:solidFill>
-                      <a:prstDash val="solid"/>
-                      <a:round/>
-                      <a:headEnd type="none" w="med" len="med"/>
-                      <a:tailEnd type="none" w="med" len="med"/>
-                    </a:lnB>
-                  </a:tcPr>
-                </a:tc>
-                <a:tc>
-                  <a:txBody>
-                    <a:bodyPr/>
-                    <a:lstStyle/>
-                    <a:p>
-                      <a:pPr algn="ctr" indent="0" marL="0">
-                        <a:buNone/>
-                      </a:pPr>
-                      <a:r>
-                        <a:rPr lang="en-US" sz="500" dirty="0">
-                          <a:solidFill>
-                            <a:srgbClr val="777777"/>
-                          </a:solidFill>
-                          <a:latin typeface="Calibri" pitchFamily="34" charset="0"/>
-                          <a:ea typeface="Calibri" pitchFamily="34" charset="-122"/>
-                          <a:cs typeface="Calibri" pitchFamily="34" charset="-120"/>
-                        </a:rPr>
-                        <a:t>0.04%</a:t>
-                      </a:r>
-                      <a:endParaRPr lang="en-US" sz="500" dirty="0">
-                        <a:latin typeface="Calibri" charset="0"/>
-                        <a:ea typeface="Calibri" charset="0"/>
-                        <a:cs typeface="Calibri" charset="0"/>
-                      </a:endParaRPr>
-                    </a:p>
-                  </a:txBody>
-                  <a:tcPr marL="91440" marR="91440" marT="45720" marB="45720">
-                    <a:lnL w="2540" cap="flat" cmpd="sng" algn="ctr">
-                      <a:solidFill>
-                        <a:srgbClr val="EEEEEE"/>
-                      </a:solidFill>
-                      <a:prstDash val="solid"/>
-                      <a:round/>
-                      <a:headEnd type="none" w="med" len="med"/>
-                      <a:tailEnd type="none" w="med" len="med"/>
-                    </a:lnL>
-                    <a:lnR w="2540" cap="flat" cmpd="sng" algn="ctr">
-                      <a:solidFill>
-                        <a:srgbClr val="EEEEEE"/>
-                      </a:solidFill>
-                      <a:prstDash val="solid"/>
-                      <a:round/>
-                      <a:headEnd type="none" w="med" len="med"/>
-                      <a:tailEnd type="none" w="med" len="med"/>
-                    </a:lnR>
-                    <a:lnT w="2540" cap="flat" cmpd="sng" algn="ctr">
-                      <a:solidFill>
-                        <a:srgbClr val="EEEEEE"/>
-                      </a:solidFill>
-                      <a:prstDash val="solid"/>
-                      <a:round/>
-                      <a:headEnd type="none" w="med" len="med"/>
-                      <a:tailEnd type="none" w="med" len="med"/>
-                    </a:lnT>
-                    <a:lnB w="2540" cap="flat" cmpd="sng" algn="ctr">
-                      <a:solidFill>
-                        <a:srgbClr val="EEEEEE"/>
-                      </a:solidFill>
-                      <a:prstDash val="solid"/>
-                      <a:round/>
-                      <a:headEnd type="none" w="med" len="med"/>
-                      <a:tailEnd type="none" w="med" len="med"/>
-                    </a:lnB>
-                  </a:tcPr>
-                </a:tc>
-                <a:tc>
-                  <a:txBody>
-                    <a:bodyPr/>
-                    <a:lstStyle/>
-                    <a:p>
-                      <a:pPr algn="ctr" indent="0" marL="0">
-                        <a:buNone/>
-                      </a:pPr>
-                      <a:r>
-                        <a:rPr lang="en-US" sz="500" b="1" dirty="0">
-                          <a:solidFill>
-                            <a:srgbClr val="777777"/>
-                          </a:solidFill>
-                          <a:latin typeface="Calibri" pitchFamily="34" charset="0"/>
-                          <a:ea typeface="Calibri" pitchFamily="34" charset="-122"/>
-                          <a:cs typeface="Calibri" pitchFamily="34" charset="-120"/>
-                        </a:rPr>
-                        <a:t>0.78%</a:t>
+                        <a:t>0.50%</a:t>
                       </a:r>
                       <a:endParaRPr lang="en-US" sz="500" dirty="0">
                         <a:latin typeface="Calibri" charset="0"/>
@@ -7114,6 +8204,222 @@
                       <a:pPr algn="ctr" indent="0" marL="0">
                         <a:buNone/>
                       </a:pPr>
+                      <a:endParaRPr lang="en-US" sz="500" dirty="0">
+                        <a:latin typeface="Calibri" charset="0"/>
+                        <a:ea typeface="Calibri" charset="0"/>
+                        <a:cs typeface="Calibri" charset="0"/>
+                      </a:endParaRPr>
+                    </a:p>
+                  </a:txBody>
+                  <a:tcPr marL="91440" marR="91440" marT="45720" marB="45720">
+                    <a:lnL w="2540" cap="flat" cmpd="sng" algn="ctr">
+                      <a:solidFill>
+                        <a:srgbClr val="EEEEEE"/>
+                      </a:solidFill>
+                      <a:prstDash val="solid"/>
+                      <a:round/>
+                      <a:headEnd type="none" w="med" len="med"/>
+                      <a:tailEnd type="none" w="med" len="med"/>
+                    </a:lnL>
+                    <a:lnR w="2540" cap="flat" cmpd="sng" algn="ctr">
+                      <a:solidFill>
+                        <a:srgbClr val="EEEEEE"/>
+                      </a:solidFill>
+                      <a:prstDash val="solid"/>
+                      <a:round/>
+                      <a:headEnd type="none" w="med" len="med"/>
+                      <a:tailEnd type="none" w="med" len="med"/>
+                    </a:lnR>
+                    <a:lnT w="2540" cap="flat" cmpd="sng" algn="ctr">
+                      <a:solidFill>
+                        <a:srgbClr val="EEEEEE"/>
+                      </a:solidFill>
+                      <a:prstDash val="solid"/>
+                      <a:round/>
+                      <a:headEnd type="none" w="med" len="med"/>
+                      <a:tailEnd type="none" w="med" len="med"/>
+                    </a:lnT>
+                    <a:lnB w="2540" cap="flat" cmpd="sng" algn="ctr">
+                      <a:solidFill>
+                        <a:srgbClr val="EEEEEE"/>
+                      </a:solidFill>
+                      <a:prstDash val="solid"/>
+                      <a:round/>
+                      <a:headEnd type="none" w="med" len="med"/>
+                      <a:tailEnd type="none" w="med" len="med"/>
+                    </a:lnB>
+                  </a:tcPr>
+                </a:tc>
+                <a:tc>
+                  <a:txBody>
+                    <a:bodyPr/>
+                    <a:lstStyle/>
+                    <a:p>
+                      <a:pPr algn="ctr" indent="0" marL="0">
+                        <a:buNone/>
+                      </a:pPr>
+                      <a:endParaRPr lang="en-US" sz="500" dirty="0">
+                        <a:latin typeface="Calibri" charset="0"/>
+                        <a:ea typeface="Calibri" charset="0"/>
+                        <a:cs typeface="Calibri" charset="0"/>
+                      </a:endParaRPr>
+                    </a:p>
+                  </a:txBody>
+                  <a:tcPr marL="91440" marR="91440" marT="45720" marB="45720">
+                    <a:lnL w="2540" cap="flat" cmpd="sng" algn="ctr">
+                      <a:solidFill>
+                        <a:srgbClr val="EEEEEE"/>
+                      </a:solidFill>
+                      <a:prstDash val="solid"/>
+                      <a:round/>
+                      <a:headEnd type="none" w="med" len="med"/>
+                      <a:tailEnd type="none" w="med" len="med"/>
+                    </a:lnL>
+                    <a:lnR w="2540" cap="flat" cmpd="sng" algn="ctr">
+                      <a:solidFill>
+                        <a:srgbClr val="EEEEEE"/>
+                      </a:solidFill>
+                      <a:prstDash val="solid"/>
+                      <a:round/>
+                      <a:headEnd type="none" w="med" len="med"/>
+                      <a:tailEnd type="none" w="med" len="med"/>
+                    </a:lnR>
+                    <a:lnT w="2540" cap="flat" cmpd="sng" algn="ctr">
+                      <a:solidFill>
+                        <a:srgbClr val="EEEEEE"/>
+                      </a:solidFill>
+                      <a:prstDash val="solid"/>
+                      <a:round/>
+                      <a:headEnd type="none" w="med" len="med"/>
+                      <a:tailEnd type="none" w="med" len="med"/>
+                    </a:lnT>
+                    <a:lnB w="2540" cap="flat" cmpd="sng" algn="ctr">
+                      <a:solidFill>
+                        <a:srgbClr val="EEEEEE"/>
+                      </a:solidFill>
+                      <a:prstDash val="solid"/>
+                      <a:round/>
+                      <a:headEnd type="none" w="med" len="med"/>
+                      <a:tailEnd type="none" w="med" len="med"/>
+                    </a:lnB>
+                  </a:tcPr>
+                </a:tc>
+                <a:tc>
+                  <a:txBody>
+                    <a:bodyPr/>
+                    <a:lstStyle/>
+                    <a:p>
+                      <a:pPr algn="ctr" indent="0" marL="0">
+                        <a:buNone/>
+                      </a:pPr>
+                      <a:endParaRPr lang="en-US" sz="500" dirty="0">
+                        <a:latin typeface="Calibri" charset="0"/>
+                        <a:ea typeface="Calibri" charset="0"/>
+                        <a:cs typeface="Calibri" charset="0"/>
+                      </a:endParaRPr>
+                    </a:p>
+                  </a:txBody>
+                  <a:tcPr marL="91440" marR="91440" marT="45720" marB="45720">
+                    <a:lnL w="2540" cap="flat" cmpd="sng" algn="ctr">
+                      <a:solidFill>
+                        <a:srgbClr val="EEEEEE"/>
+                      </a:solidFill>
+                      <a:prstDash val="solid"/>
+                      <a:round/>
+                      <a:headEnd type="none" w="med" len="med"/>
+                      <a:tailEnd type="none" w="med" len="med"/>
+                    </a:lnL>
+                    <a:lnR w="2540" cap="flat" cmpd="sng" algn="ctr">
+                      <a:solidFill>
+                        <a:srgbClr val="EEEEEE"/>
+                      </a:solidFill>
+                      <a:prstDash val="solid"/>
+                      <a:round/>
+                      <a:headEnd type="none" w="med" len="med"/>
+                      <a:tailEnd type="none" w="med" len="med"/>
+                    </a:lnR>
+                    <a:lnT w="2540" cap="flat" cmpd="sng" algn="ctr">
+                      <a:solidFill>
+                        <a:srgbClr val="EEEEEE"/>
+                      </a:solidFill>
+                      <a:prstDash val="solid"/>
+                      <a:round/>
+                      <a:headEnd type="none" w="med" len="med"/>
+                      <a:tailEnd type="none" w="med" len="med"/>
+                    </a:lnT>
+                    <a:lnB w="2540" cap="flat" cmpd="sng" algn="ctr">
+                      <a:solidFill>
+                        <a:srgbClr val="EEEEEE"/>
+                      </a:solidFill>
+                      <a:prstDash val="solid"/>
+                      <a:round/>
+                      <a:headEnd type="none" w="med" len="med"/>
+                      <a:tailEnd type="none" w="med" len="med"/>
+                    </a:lnB>
+                  </a:tcPr>
+                </a:tc>
+                <a:tc>
+                  <a:txBody>
+                    <a:bodyPr/>
+                    <a:lstStyle/>
+                    <a:p>
+                      <a:pPr algn="ctr" indent="0" marL="0">
+                        <a:buNone/>
+                      </a:pPr>
+                      <a:endParaRPr lang="en-US" sz="500" dirty="0">
+                        <a:latin typeface="Calibri" charset="0"/>
+                        <a:ea typeface="Calibri" charset="0"/>
+                        <a:cs typeface="Calibri" charset="0"/>
+                      </a:endParaRPr>
+                    </a:p>
+                  </a:txBody>
+                  <a:tcPr marL="91440" marR="91440" marT="45720" marB="45720">
+                    <a:lnL w="2540" cap="flat" cmpd="sng" algn="ctr">
+                      <a:solidFill>
+                        <a:srgbClr val="EEEEEE"/>
+                      </a:solidFill>
+                      <a:prstDash val="solid"/>
+                      <a:round/>
+                      <a:headEnd type="none" w="med" len="med"/>
+                      <a:tailEnd type="none" w="med" len="med"/>
+                    </a:lnL>
+                    <a:lnR w="2540" cap="flat" cmpd="sng" algn="ctr">
+                      <a:solidFill>
+                        <a:srgbClr val="EEEEEE"/>
+                      </a:solidFill>
+                      <a:prstDash val="solid"/>
+                      <a:round/>
+                      <a:headEnd type="none" w="med" len="med"/>
+                      <a:tailEnd type="none" w="med" len="med"/>
+                    </a:lnR>
+                    <a:lnT w="2540" cap="flat" cmpd="sng" algn="ctr">
+                      <a:solidFill>
+                        <a:srgbClr val="EEEEEE"/>
+                      </a:solidFill>
+                      <a:prstDash val="solid"/>
+                      <a:round/>
+                      <a:headEnd type="none" w="med" len="med"/>
+                      <a:tailEnd type="none" w="med" len="med"/>
+                    </a:lnT>
+                    <a:lnB w="2540" cap="flat" cmpd="sng" algn="ctr">
+                      <a:solidFill>
+                        <a:srgbClr val="EEEEEE"/>
+                      </a:solidFill>
+                      <a:prstDash val="solid"/>
+                      <a:round/>
+                      <a:headEnd type="none" w="med" len="med"/>
+                      <a:tailEnd type="none" w="med" len="med"/>
+                    </a:lnB>
+                  </a:tcPr>
+                </a:tc>
+                <a:tc>
+                  <a:txBody>
+                    <a:bodyPr/>
+                    <a:lstStyle/>
+                    <a:p>
+                      <a:pPr algn="ctr" indent="0" marL="0">
+                        <a:buNone/>
+                      </a:pPr>
                       <a:r>
                         <a:rPr lang="en-US" sz="500" dirty="0">
                           <a:solidFill>
@@ -7123,170 +8429,8 @@
                           <a:ea typeface="Calibri" pitchFamily="34" charset="-122"/>
                           <a:cs typeface="Calibri" pitchFamily="34" charset="-120"/>
                         </a:rPr>
-                        <a:t>0.00%</a:t>
-                      </a:r>
-                      <a:endParaRPr lang="en-US" sz="500" dirty="0">
-                        <a:latin typeface="Calibri" charset="0"/>
-                        <a:ea typeface="Calibri" charset="0"/>
-                        <a:cs typeface="Calibri" charset="0"/>
-                      </a:endParaRPr>
-                    </a:p>
-                  </a:txBody>
-                  <a:tcPr marL="91440" marR="91440" marT="45720" marB="45720">
-                    <a:lnL w="2540" cap="flat" cmpd="sng" algn="ctr">
-                      <a:solidFill>
-                        <a:srgbClr val="EEEEEE"/>
-                      </a:solidFill>
-                      <a:prstDash val="solid"/>
-                      <a:round/>
-                      <a:headEnd type="none" w="med" len="med"/>
-                      <a:tailEnd type="none" w="med" len="med"/>
-                    </a:lnL>
-                    <a:lnR w="2540" cap="flat" cmpd="sng" algn="ctr">
-                      <a:solidFill>
-                        <a:srgbClr val="EEEEEE"/>
-                      </a:solidFill>
-                      <a:prstDash val="solid"/>
-                      <a:round/>
-                      <a:headEnd type="none" w="med" len="med"/>
-                      <a:tailEnd type="none" w="med" len="med"/>
-                    </a:lnR>
-                    <a:lnT w="2540" cap="flat" cmpd="sng" algn="ctr">
-                      <a:solidFill>
-                        <a:srgbClr val="EEEEEE"/>
-                      </a:solidFill>
-                      <a:prstDash val="solid"/>
-                      <a:round/>
-                      <a:headEnd type="none" w="med" len="med"/>
-                      <a:tailEnd type="none" w="med" len="med"/>
-                    </a:lnT>
-                    <a:lnB w="2540" cap="flat" cmpd="sng" algn="ctr">
-                      <a:solidFill>
-                        <a:srgbClr val="EEEEEE"/>
-                      </a:solidFill>
-                      <a:prstDash val="solid"/>
-                      <a:round/>
-                      <a:headEnd type="none" w="med" len="med"/>
-                      <a:tailEnd type="none" w="med" len="med"/>
-                    </a:lnB>
-                  </a:tcPr>
-                </a:tc>
-                <a:tc>
-                  <a:txBody>
-                    <a:bodyPr/>
-                    <a:lstStyle/>
-                    <a:p>
-                      <a:pPr algn="ctr" indent="0" marL="0">
-                        <a:buNone/>
-                      </a:pPr>
-                      <a:endParaRPr lang="en-US" sz="500" dirty="0">
-                        <a:latin typeface="Calibri" charset="0"/>
-                        <a:ea typeface="Calibri" charset="0"/>
-                        <a:cs typeface="Calibri" charset="0"/>
-                      </a:endParaRPr>
-                    </a:p>
-                  </a:txBody>
-                  <a:tcPr marL="91440" marR="91440" marT="45720" marB="45720">
-                    <a:lnL w="2540" cap="flat" cmpd="sng" algn="ctr">
-                      <a:solidFill>
-                        <a:srgbClr val="EEEEEE"/>
-                      </a:solidFill>
-                      <a:prstDash val="solid"/>
-                      <a:round/>
-                      <a:headEnd type="none" w="med" len="med"/>
-                      <a:tailEnd type="none" w="med" len="med"/>
-                    </a:lnL>
-                    <a:lnR w="2540" cap="flat" cmpd="sng" algn="ctr">
-                      <a:solidFill>
-                        <a:srgbClr val="EEEEEE"/>
-                      </a:solidFill>
-                      <a:prstDash val="solid"/>
-                      <a:round/>
-                      <a:headEnd type="none" w="med" len="med"/>
-                      <a:tailEnd type="none" w="med" len="med"/>
-                    </a:lnR>
-                    <a:lnT w="2540" cap="flat" cmpd="sng" algn="ctr">
-                      <a:solidFill>
-                        <a:srgbClr val="EEEEEE"/>
-                      </a:solidFill>
-                      <a:prstDash val="solid"/>
-                      <a:round/>
-                      <a:headEnd type="none" w="med" len="med"/>
-                      <a:tailEnd type="none" w="med" len="med"/>
-                    </a:lnT>
-                    <a:lnB w="2540" cap="flat" cmpd="sng" algn="ctr">
-                      <a:solidFill>
-                        <a:srgbClr val="EEEEEE"/>
-                      </a:solidFill>
-                      <a:prstDash val="solid"/>
-                      <a:round/>
-                      <a:headEnd type="none" w="med" len="med"/>
-                      <a:tailEnd type="none" w="med" len="med"/>
-                    </a:lnB>
-                  </a:tcPr>
-                </a:tc>
-                <a:tc>
-                  <a:txBody>
-                    <a:bodyPr/>
-                    <a:lstStyle/>
-                    <a:p>
-                      <a:pPr algn="ctr" indent="0" marL="0">
-                        <a:buNone/>
-                      </a:pPr>
-                      <a:endParaRPr lang="en-US" sz="500" dirty="0">
-                        <a:latin typeface="Calibri" charset="0"/>
-                        <a:ea typeface="Calibri" charset="0"/>
-                        <a:cs typeface="Calibri" charset="0"/>
-                      </a:endParaRPr>
-                    </a:p>
-                  </a:txBody>
-                  <a:tcPr marL="91440" marR="91440" marT="45720" marB="45720">
-                    <a:lnL w="2540" cap="flat" cmpd="sng" algn="ctr">
-                      <a:solidFill>
-                        <a:srgbClr val="EEEEEE"/>
-                      </a:solidFill>
-                      <a:prstDash val="solid"/>
-                      <a:round/>
-                      <a:headEnd type="none" w="med" len="med"/>
-                      <a:tailEnd type="none" w="med" len="med"/>
-                    </a:lnL>
-                    <a:lnR w="2540" cap="flat" cmpd="sng" algn="ctr">
-                      <a:solidFill>
-                        <a:srgbClr val="EEEEEE"/>
-                      </a:solidFill>
-                      <a:prstDash val="solid"/>
-                      <a:round/>
-                      <a:headEnd type="none" w="med" len="med"/>
-                      <a:tailEnd type="none" w="med" len="med"/>
-                    </a:lnR>
-                    <a:lnT w="2540" cap="flat" cmpd="sng" algn="ctr">
-                      <a:solidFill>
-                        <a:srgbClr val="EEEEEE"/>
-                      </a:solidFill>
-                      <a:prstDash val="solid"/>
-                      <a:round/>
-                      <a:headEnd type="none" w="med" len="med"/>
-                      <a:tailEnd type="none" w="med" len="med"/>
-                    </a:lnT>
-                    <a:lnB w="2540" cap="flat" cmpd="sng" algn="ctr">
-                      <a:solidFill>
-                        <a:srgbClr val="EEEEEE"/>
-                      </a:solidFill>
-                      <a:prstDash val="solid"/>
-                      <a:round/>
-                      <a:headEnd type="none" w="med" len="med"/>
-                      <a:tailEnd type="none" w="med" len="med"/>
-                    </a:lnB>
-                  </a:tcPr>
-                </a:tc>
-                <a:tc>
-                  <a:txBody>
-                    <a:bodyPr/>
-                    <a:lstStyle/>
-                    <a:p>
-                      <a:pPr algn="ctr" indent="0" marL="0">
-                        <a:buNone/>
-                      </a:pPr>
+                        <a:t>0.03%</a:t>
+                      </a:r>
                       <a:endParaRPr lang="en-US" sz="500" dirty="0">
                         <a:latin typeface="Calibri" charset="0"/>
                         <a:ea typeface="Calibri" charset="0"/>
@@ -7350,7 +8494,7 @@
                           <a:ea typeface="Calibri" pitchFamily="34" charset="-122"/>
                           <a:cs typeface="Calibri" pitchFamily="34" charset="-120"/>
                         </a:rPr>
-                        <a:t>0.03%</a:t>
+                        <a:t>0.01%</a:t>
                       </a:r>
                       <a:endParaRPr lang="en-US" sz="500" dirty="0">
                         <a:latin typeface="Calibri" charset="0"/>
@@ -7797,7 +8941,7 @@
                         <a:buNone/>
                       </a:pPr>
                       <a:r>
-                        <a:rPr lang="en-US" sz="500" dirty="0">
+                        <a:rPr lang="en-US" sz="500" b="1" dirty="0">
                           <a:solidFill>
                             <a:srgbClr val="999999"/>
                           </a:solidFill>
@@ -7805,72 +8949,7 @@
                           <a:ea typeface="Calibri" pitchFamily="34" charset="-122"/>
                           <a:cs typeface="Calibri" pitchFamily="34" charset="-120"/>
                         </a:rPr>
-                        <a:t>0.89%</a:t>
-                      </a:r>
-                      <a:endParaRPr lang="en-US" sz="500" dirty="0">
-                        <a:latin typeface="Calibri" charset="0"/>
-                        <a:ea typeface="Calibri" charset="0"/>
-                        <a:cs typeface="Calibri" charset="0"/>
-                      </a:endParaRPr>
-                    </a:p>
-                  </a:txBody>
-                  <a:tcPr marL="91440" marR="91440" marT="45720" marB="45720">
-                    <a:lnL w="2540" cap="flat" cmpd="sng" algn="ctr">
-                      <a:solidFill>
-                        <a:srgbClr val="EEEEEE"/>
-                      </a:solidFill>
-                      <a:prstDash val="solid"/>
-                      <a:round/>
-                      <a:headEnd type="none" w="med" len="med"/>
-                      <a:tailEnd type="none" w="med" len="med"/>
-                    </a:lnL>
-                    <a:lnR w="2540" cap="flat" cmpd="sng" algn="ctr">
-                      <a:solidFill>
-                        <a:srgbClr val="EEEEEE"/>
-                      </a:solidFill>
-                      <a:prstDash val="solid"/>
-                      <a:round/>
-                      <a:headEnd type="none" w="med" len="med"/>
-                      <a:tailEnd type="none" w="med" len="med"/>
-                    </a:lnR>
-                    <a:lnT w="2540" cap="flat" cmpd="sng" algn="ctr">
-                      <a:solidFill>
-                        <a:srgbClr val="EEEEEE"/>
-                      </a:solidFill>
-                      <a:prstDash val="solid"/>
-                      <a:round/>
-                      <a:headEnd type="none" w="med" len="med"/>
-                      <a:tailEnd type="none" w="med" len="med"/>
-                    </a:lnT>
-                    <a:lnB w="2540" cap="flat" cmpd="sng" algn="ctr">
-                      <a:solidFill>
-                        <a:srgbClr val="EEEEEE"/>
-                      </a:solidFill>
-                      <a:prstDash val="solid"/>
-                      <a:round/>
-                      <a:headEnd type="none" w="med" len="med"/>
-                      <a:tailEnd type="none" w="med" len="med"/>
-                    </a:lnB>
-                  </a:tcPr>
-                </a:tc>
-                <a:tc>
-                  <a:txBody>
-                    <a:bodyPr/>
-                    <a:lstStyle/>
-                    <a:p>
-                      <a:pPr algn="ctr" indent="0" marL="0">
-                        <a:buNone/>
-                      </a:pPr>
-                      <a:r>
-                        <a:rPr lang="en-US" sz="500" b="1" dirty="0">
-                          <a:solidFill>
-                            <a:srgbClr val="999999"/>
-                          </a:solidFill>
-                          <a:latin typeface="Calibri" pitchFamily="34" charset="0"/>
-                          <a:ea typeface="Calibri" pitchFamily="34" charset="-122"/>
-                          <a:cs typeface="Calibri" pitchFamily="34" charset="-120"/>
-                        </a:rPr>
-                        <a:t>0.97%</a:t>
+                        <a:t>0.16%</a:t>
                       </a:r>
                       <a:endParaRPr lang="en-US" sz="500" dirty="0">
                         <a:latin typeface="Calibri" charset="0"/>
@@ -8792,7 +9871,7 @@
                           <a:ea typeface="Calibri" pitchFamily="34" charset="-122"/>
                           <a:cs typeface="Calibri" pitchFamily="34" charset="-120"/>
                         </a:rPr>
-                        <a:t>1.87%</a:t>
+                        <a:t>2.78%</a:t>
                       </a:r>
                       <a:endParaRPr lang="en-US" sz="500" dirty="0">
                         <a:latin typeface="Calibri" charset="0"/>
@@ -8989,7 +10068,7 @@
                           <a:ea typeface="Calibri" pitchFamily="34" charset="-122"/>
                           <a:cs typeface="Calibri" pitchFamily="34" charset="-120"/>
                         </a:rPr>
-                        <a:t>0.04%</a:t>
+                        <a:t>0.03%</a:t>
                       </a:r>
                       <a:endParaRPr lang="en-US" sz="500" dirty="0">
                         <a:latin typeface="Calibri" charset="0"/>
@@ -9054,7 +10133,7 @@
                           <a:ea typeface="Calibri" pitchFamily="34" charset="-122"/>
                           <a:cs typeface="Calibri" pitchFamily="34" charset="-120"/>
                         </a:rPr>
-                        <a:t>0.04%</a:t>
+                        <a:t>0.02%</a:t>
                       </a:r>
                       <a:endParaRPr lang="en-US" sz="500" dirty="0">
                         <a:latin typeface="Calibri" charset="0"/>
@@ -9119,7 +10198,7 @@
                           <a:ea typeface="Calibri" pitchFamily="34" charset="-122"/>
                           <a:cs typeface="Calibri" pitchFamily="34" charset="-120"/>
                         </a:rPr>
-                        <a:t>0.04%</a:t>
+                        <a:t>0.03%</a:t>
                       </a:r>
                       <a:endParaRPr lang="en-US" sz="500" dirty="0">
                         <a:latin typeface="Calibri" charset="0"/>
@@ -9184,7 +10263,7 @@
                           <a:ea typeface="Calibri" pitchFamily="34" charset="-122"/>
                           <a:cs typeface="Calibri" pitchFamily="34" charset="-120"/>
                         </a:rPr>
-                        <a:t>0.04%</a:t>
+                        <a:t>0.03%</a:t>
                       </a:r>
                       <a:endParaRPr lang="en-US" sz="500" dirty="0">
                         <a:latin typeface="Calibri" charset="0"/>
@@ -9249,7 +10328,7 @@
                           <a:ea typeface="Calibri" pitchFamily="34" charset="-122"/>
                           <a:cs typeface="Calibri" pitchFamily="34" charset="-120"/>
                         </a:rPr>
-                        <a:t>0.04%</a:t>
+                        <a:t>0.02%</a:t>
                       </a:r>
                       <a:endParaRPr lang="en-US" sz="500" dirty="0">
                         <a:latin typeface="Calibri" charset="0"/>
@@ -9314,7 +10393,7 @@
                           <a:ea typeface="Calibri" pitchFamily="34" charset="-122"/>
                           <a:cs typeface="Calibri" pitchFamily="34" charset="-120"/>
                         </a:rPr>
-                        <a:t>0.04%</a:t>
+                        <a:t>0.03%</a:t>
                       </a:r>
                       <a:endParaRPr lang="en-US" sz="500" dirty="0">
                         <a:latin typeface="Calibri" charset="0"/>
@@ -9574,7 +10653,7 @@
                           <a:ea typeface="Calibri" pitchFamily="34" charset="-122"/>
                           <a:cs typeface="Calibri" pitchFamily="34" charset="-120"/>
                         </a:rPr>
-                        <a:t>0.19%</a:t>
+                        <a:t>0.21%</a:t>
                       </a:r>
                       <a:endParaRPr lang="en-US" sz="500" dirty="0">
                         <a:latin typeface="Calibri" charset="0"/>
@@ -9639,7 +10718,7 @@
                           <a:ea typeface="Calibri" pitchFamily="34" charset="-122"/>
                           <a:cs typeface="Calibri" pitchFamily="34" charset="-120"/>
                         </a:rPr>
-                        <a:t>0.23%</a:t>
+                        <a:t>0.21%</a:t>
                       </a:r>
                       <a:endParaRPr lang="en-US" sz="500" dirty="0">
                         <a:latin typeface="Calibri" charset="0"/>
@@ -9704,7 +10783,7 @@
                           <a:ea typeface="Calibri" pitchFamily="34" charset="-122"/>
                           <a:cs typeface="Calibri" pitchFamily="34" charset="-120"/>
                         </a:rPr>
-                        <a:t>0.29%</a:t>
+                        <a:t>0.32%</a:t>
                       </a:r>
                       <a:endParaRPr lang="en-US" sz="500" dirty="0">
                         <a:latin typeface="Calibri" charset="0"/>
@@ -9769,7 +10848,7 @@
                           <a:ea typeface="Calibri" pitchFamily="34" charset="-122"/>
                           <a:cs typeface="Calibri" pitchFamily="34" charset="-120"/>
                         </a:rPr>
-                        <a:t>1.20%</a:t>
+                        <a:t>1.14%</a:t>
                       </a:r>
                       <a:endParaRPr lang="en-US" sz="500" dirty="0">
                         <a:latin typeface="Calibri" charset="0"/>
@@ -10670,7 +11749,7 @@
                           <a:ea typeface="Calibri" pitchFamily="34" charset="-122"/>
                           <a:cs typeface="Calibri" pitchFamily="34" charset="-120"/>
                         </a:rPr>
-                        <a:t>0.60%</a:t>
+                        <a:t>0.18%</a:t>
                       </a:r>
                       <a:endParaRPr lang="en-US" sz="500" dirty="0">
                         <a:latin typeface="Calibri" charset="0"/>
@@ -10735,7 +11814,7 @@
                           <a:ea typeface="Calibri" pitchFamily="34" charset="-122"/>
                           <a:cs typeface="Calibri" pitchFamily="34" charset="-120"/>
                         </a:rPr>
-                        <a:t>0.86%</a:t>
+                        <a:t>0.45%</a:t>
                       </a:r>
                       <a:endParaRPr lang="en-US" sz="500" dirty="0">
                         <a:latin typeface="Calibri" charset="0"/>
@@ -11898,7 +12977,7 @@
                           <a:ea typeface="Calibri" pitchFamily="34" charset="-122"/>
                           <a:cs typeface="Calibri" pitchFamily="34" charset="-120"/>
                         </a:rPr>
-                        <a:t>0.35%</a:t>
+                        <a:t>0.34%</a:t>
                       </a:r>
                       <a:endParaRPr lang="en-US" sz="500" dirty="0">
                         <a:latin typeface="Calibri" charset="0"/>
@@ -11963,7 +13042,7 @@
                           <a:ea typeface="Calibri" pitchFamily="34" charset="-122"/>
                           <a:cs typeface="Calibri" pitchFamily="34" charset="-120"/>
                         </a:rPr>
-                        <a:t>0.46%</a:t>
+                        <a:t>0.43%</a:t>
                       </a:r>
                       <a:endParaRPr lang="en-US" sz="500" dirty="0">
                         <a:latin typeface="Calibri" charset="0"/>
@@ -12028,7 +13107,7 @@
                           <a:ea typeface="Calibri" pitchFamily="34" charset="-122"/>
                           <a:cs typeface="Calibri" pitchFamily="34" charset="-120"/>
                         </a:rPr>
-                        <a:t>0.47%</a:t>
+                        <a:t>0.48%</a:t>
                       </a:r>
                       <a:endParaRPr lang="en-US" sz="500" dirty="0">
                         <a:latin typeface="Calibri" charset="0"/>
@@ -12093,7 +13172,7 @@
                           <a:ea typeface="Calibri" pitchFamily="34" charset="-122"/>
                           <a:cs typeface="Calibri" pitchFamily="34" charset="-120"/>
                         </a:rPr>
-                        <a:t>0.58%</a:t>
+                        <a:t>0.55%</a:t>
                       </a:r>
                       <a:endParaRPr lang="en-US" sz="500" dirty="0">
                         <a:latin typeface="Calibri" charset="0"/>
@@ -12158,7 +13237,7 @@
                           <a:ea typeface="Calibri" pitchFamily="34" charset="-122"/>
                           <a:cs typeface="Calibri" pitchFamily="34" charset="-120"/>
                         </a:rPr>
-                        <a:t>0.67%</a:t>
+                        <a:t>0.71%</a:t>
                       </a:r>
                       <a:endParaRPr lang="en-US" sz="500" dirty="0">
                         <a:latin typeface="Calibri" charset="0"/>
@@ -12223,7 +13302,7 @@
                           <a:ea typeface="Calibri" pitchFamily="34" charset="-122"/>
                           <a:cs typeface="Calibri" pitchFamily="34" charset="-120"/>
                         </a:rPr>
-                        <a:t>0.73%</a:t>
+                        <a:t>0.74%</a:t>
                       </a:r>
                       <a:endParaRPr lang="en-US" sz="500" dirty="0">
                         <a:latin typeface="Calibri" charset="0"/>
@@ -12288,7 +13367,7 @@
                           <a:ea typeface="Calibri" pitchFamily="34" charset="-122"/>
                           <a:cs typeface="Calibri" pitchFamily="34" charset="-120"/>
                         </a:rPr>
-                        <a:t>0.79%</a:t>
+                        <a:t>0.76%</a:t>
                       </a:r>
                       <a:endParaRPr lang="en-US" sz="500" dirty="0">
                         <a:latin typeface="Calibri" charset="0"/>
@@ -12353,7 +13432,7 @@
                           <a:ea typeface="Calibri" pitchFamily="34" charset="-122"/>
                           <a:cs typeface="Calibri" pitchFamily="34" charset="-120"/>
                         </a:rPr>
-                        <a:t>0.81%</a:t>
+                        <a:t>0.90%</a:t>
                       </a:r>
                       <a:endParaRPr lang="en-US" sz="500" dirty="0">
                         <a:latin typeface="Calibri" charset="0"/>
@@ -12483,7 +13562,7 @@
                           <a:ea typeface="Calibri" pitchFamily="34" charset="-122"/>
                           <a:cs typeface="Calibri" pitchFamily="34" charset="-120"/>
                         </a:rPr>
-                        <a:t>0.92%</a:t>
+                        <a:t>0.86%</a:t>
                       </a:r>
                       <a:endParaRPr lang="en-US" sz="500" dirty="0">
                         <a:latin typeface="Calibri" charset="0"/>
@@ -12548,6 +13627,71 @@
                           <a:ea typeface="Calibri" pitchFamily="34" charset="-122"/>
                           <a:cs typeface="Calibri" pitchFamily="34" charset="-120"/>
                         </a:rPr>
+                        <a:t>1.04%</a:t>
+                      </a:r>
+                      <a:endParaRPr lang="en-US" sz="500" dirty="0">
+                        <a:latin typeface="Calibri" charset="0"/>
+                        <a:ea typeface="Calibri" charset="0"/>
+                        <a:cs typeface="Calibri" charset="0"/>
+                      </a:endParaRPr>
+                    </a:p>
+                  </a:txBody>
+                  <a:tcPr marL="91440" marR="91440" marT="45720" marB="45720">
+                    <a:lnL w="2540" cap="flat" cmpd="sng" algn="ctr">
+                      <a:solidFill>
+                        <a:srgbClr val="EEEEEE"/>
+                      </a:solidFill>
+                      <a:prstDash val="solid"/>
+                      <a:round/>
+                      <a:headEnd type="none" w="med" len="med"/>
+                      <a:tailEnd type="none" w="med" len="med"/>
+                    </a:lnL>
+                    <a:lnR w="2540" cap="flat" cmpd="sng" algn="ctr">
+                      <a:solidFill>
+                        <a:srgbClr val="EEEEEE"/>
+                      </a:solidFill>
+                      <a:prstDash val="solid"/>
+                      <a:round/>
+                      <a:headEnd type="none" w="med" len="med"/>
+                      <a:tailEnd type="none" w="med" len="med"/>
+                    </a:lnR>
+                    <a:lnT w="2540" cap="flat" cmpd="sng" algn="ctr">
+                      <a:solidFill>
+                        <a:srgbClr val="EEEEEE"/>
+                      </a:solidFill>
+                      <a:prstDash val="solid"/>
+                      <a:round/>
+                      <a:headEnd type="none" w="med" len="med"/>
+                      <a:tailEnd type="none" w="med" len="med"/>
+                    </a:lnT>
+                    <a:lnB w="2540" cap="flat" cmpd="sng" algn="ctr">
+                      <a:solidFill>
+                        <a:srgbClr val="EEEEEE"/>
+                      </a:solidFill>
+                      <a:prstDash val="solid"/>
+                      <a:round/>
+                      <a:headEnd type="none" w="med" len="med"/>
+                      <a:tailEnd type="none" w="med" len="med"/>
+                    </a:lnB>
+                  </a:tcPr>
+                </a:tc>
+                <a:tc>
+                  <a:txBody>
+                    <a:bodyPr/>
+                    <a:lstStyle/>
+                    <a:p>
+                      <a:pPr algn="ctr" indent="0" marL="0">
+                        <a:buNone/>
+                      </a:pPr>
+                      <a:r>
+                        <a:rPr lang="en-US" sz="500" dirty="0">
+                          <a:solidFill>
+                            <a:srgbClr val="777777"/>
+                          </a:solidFill>
+                          <a:latin typeface="Calibri" pitchFamily="34" charset="0"/>
+                          <a:ea typeface="Calibri" pitchFamily="34" charset="-122"/>
+                          <a:cs typeface="Calibri" pitchFamily="34" charset="-120"/>
+                        </a:rPr>
                         <a:t>0.94%</a:t>
                       </a:r>
                       <a:endParaRPr lang="en-US" sz="500" dirty="0">
@@ -12605,7 +13749,7 @@
                         <a:buNone/>
                       </a:pPr>
                       <a:r>
-                        <a:rPr lang="en-US" sz="500" dirty="0">
+                        <a:rPr lang="en-US" sz="500" b="1" dirty="0">
                           <a:solidFill>
                             <a:srgbClr val="777777"/>
                           </a:solidFill>
@@ -12613,72 +13757,7 @@
                           <a:ea typeface="Calibri" pitchFamily="34" charset="-122"/>
                           <a:cs typeface="Calibri" pitchFamily="34" charset="-120"/>
                         </a:rPr>
-                        <a:t>0.94%</a:t>
-                      </a:r>
-                      <a:endParaRPr lang="en-US" sz="500" dirty="0">
-                        <a:latin typeface="Calibri" charset="0"/>
-                        <a:ea typeface="Calibri" charset="0"/>
-                        <a:cs typeface="Calibri" charset="0"/>
-                      </a:endParaRPr>
-                    </a:p>
-                  </a:txBody>
-                  <a:tcPr marL="91440" marR="91440" marT="45720" marB="45720">
-                    <a:lnL w="2540" cap="flat" cmpd="sng" algn="ctr">
-                      <a:solidFill>
-                        <a:srgbClr val="EEEEEE"/>
-                      </a:solidFill>
-                      <a:prstDash val="solid"/>
-                      <a:round/>
-                      <a:headEnd type="none" w="med" len="med"/>
-                      <a:tailEnd type="none" w="med" len="med"/>
-                    </a:lnL>
-                    <a:lnR w="2540" cap="flat" cmpd="sng" algn="ctr">
-                      <a:solidFill>
-                        <a:srgbClr val="EEEEEE"/>
-                      </a:solidFill>
-                      <a:prstDash val="solid"/>
-                      <a:round/>
-                      <a:headEnd type="none" w="med" len="med"/>
-                      <a:tailEnd type="none" w="med" len="med"/>
-                    </a:lnR>
-                    <a:lnT w="2540" cap="flat" cmpd="sng" algn="ctr">
-                      <a:solidFill>
-                        <a:srgbClr val="EEEEEE"/>
-                      </a:solidFill>
-                      <a:prstDash val="solid"/>
-                      <a:round/>
-                      <a:headEnd type="none" w="med" len="med"/>
-                      <a:tailEnd type="none" w="med" len="med"/>
-                    </a:lnT>
-                    <a:lnB w="2540" cap="flat" cmpd="sng" algn="ctr">
-                      <a:solidFill>
-                        <a:srgbClr val="EEEEEE"/>
-                      </a:solidFill>
-                      <a:prstDash val="solid"/>
-                      <a:round/>
-                      <a:headEnd type="none" w="med" len="med"/>
-                      <a:tailEnd type="none" w="med" len="med"/>
-                    </a:lnB>
-                  </a:tcPr>
-                </a:tc>
-                <a:tc>
-                  <a:txBody>
-                    <a:bodyPr/>
-                    <a:lstStyle/>
-                    <a:p>
-                      <a:pPr algn="ctr" indent="0" marL="0">
-                        <a:buNone/>
-                      </a:pPr>
-                      <a:r>
-                        <a:rPr lang="en-US" sz="500" b="1" dirty="0">
-                          <a:solidFill>
-                            <a:srgbClr val="777777"/>
-                          </a:solidFill>
-                          <a:latin typeface="Calibri" pitchFamily="34" charset="0"/>
-                          <a:ea typeface="Calibri" pitchFamily="34" charset="-122"/>
-                          <a:cs typeface="Calibri" pitchFamily="34" charset="-120"/>
-                        </a:rPr>
-                        <a:t>8.88%</a:t>
+                        <a:t>8.97%</a:t>
                       </a:r>
                       <a:endParaRPr lang="en-US" sz="500" dirty="0">
                         <a:latin typeface="Calibri" charset="0"/>
@@ -12864,7 +13943,7 @@
                           <a:ea typeface="Calibri" pitchFamily="34" charset="-122"/>
                           <a:cs typeface="Calibri" pitchFamily="34" charset="-120"/>
                         </a:rPr>
-                        <a:t>0.00%</a:t>
+                        <a:t>0.26%</a:t>
                       </a:r>
                       <a:endParaRPr lang="en-US" sz="500" dirty="0">
                         <a:latin typeface="Calibri" charset="0"/>
@@ -13579,7 +14658,7 @@
                           <a:ea typeface="Calibri" pitchFamily="34" charset="-122"/>
                           <a:cs typeface="Calibri" pitchFamily="34" charset="-120"/>
                         </a:rPr>
-                        <a:t>8.43%</a:t>
+                        <a:t>0.79%</a:t>
                       </a:r>
                       <a:endParaRPr lang="en-US" sz="500" dirty="0">
                         <a:latin typeface="Calibri" charset="0"/>
@@ -13644,7 +14723,7 @@
                           <a:ea typeface="Calibri" pitchFamily="34" charset="-122"/>
                           <a:cs typeface="Calibri" pitchFamily="34" charset="-120"/>
                         </a:rPr>
-                        <a:t>15.11%</a:t>
+                        <a:t>7.27%</a:t>
                       </a:r>
                       <a:endParaRPr lang="en-US" sz="500" dirty="0">
                         <a:latin typeface="Calibri" charset="0"/>
@@ -14807,6 +15886,331 @@
                           <a:ea typeface="Calibri" pitchFamily="34" charset="-122"/>
                           <a:cs typeface="Calibri" pitchFamily="34" charset="-120"/>
                         </a:rPr>
+                        <a:t>1.00%</a:t>
+                      </a:r>
+                      <a:endParaRPr lang="en-US" sz="500" dirty="0">
+                        <a:latin typeface="Calibri" charset="0"/>
+                        <a:ea typeface="Calibri" charset="0"/>
+                        <a:cs typeface="Calibri" charset="0"/>
+                      </a:endParaRPr>
+                    </a:p>
+                  </a:txBody>
+                  <a:tcPr marL="91440" marR="91440" marT="45720" marB="45720">
+                    <a:lnL w="2540" cap="flat" cmpd="sng" algn="ctr">
+                      <a:solidFill>
+                        <a:srgbClr val="EEEEEE"/>
+                      </a:solidFill>
+                      <a:prstDash val="solid"/>
+                      <a:round/>
+                      <a:headEnd type="none" w="med" len="med"/>
+                      <a:tailEnd type="none" w="med" len="med"/>
+                    </a:lnL>
+                    <a:lnR w="2540" cap="flat" cmpd="sng" algn="ctr">
+                      <a:solidFill>
+                        <a:srgbClr val="EEEEEE"/>
+                      </a:solidFill>
+                      <a:prstDash val="solid"/>
+                      <a:round/>
+                      <a:headEnd type="none" w="med" len="med"/>
+                      <a:tailEnd type="none" w="med" len="med"/>
+                    </a:lnR>
+                    <a:lnT w="2540" cap="flat" cmpd="sng" algn="ctr">
+                      <a:solidFill>
+                        <a:srgbClr val="EEEEEE"/>
+                      </a:solidFill>
+                      <a:prstDash val="solid"/>
+                      <a:round/>
+                      <a:headEnd type="none" w="med" len="med"/>
+                      <a:tailEnd type="none" w="med" len="med"/>
+                    </a:lnT>
+                    <a:lnB w="2540" cap="flat" cmpd="sng" algn="ctr">
+                      <a:solidFill>
+                        <a:srgbClr val="EEEEEE"/>
+                      </a:solidFill>
+                      <a:prstDash val="solid"/>
+                      <a:round/>
+                      <a:headEnd type="none" w="med" len="med"/>
+                      <a:tailEnd type="none" w="med" len="med"/>
+                    </a:lnB>
+                  </a:tcPr>
+                </a:tc>
+                <a:tc>
+                  <a:txBody>
+                    <a:bodyPr/>
+                    <a:lstStyle/>
+                    <a:p>
+                      <a:pPr algn="ctr" indent="0" marL="0">
+                        <a:buNone/>
+                      </a:pPr>
+                      <a:r>
+                        <a:rPr lang="en-US" sz="500" dirty="0">
+                          <a:solidFill>
+                            <a:srgbClr val="777777"/>
+                          </a:solidFill>
+                          <a:latin typeface="Calibri" pitchFamily="34" charset="0"/>
+                          <a:ea typeface="Calibri" pitchFamily="34" charset="-122"/>
+                          <a:cs typeface="Calibri" pitchFamily="34" charset="-120"/>
+                        </a:rPr>
+                        <a:t>0.88%</a:t>
+                      </a:r>
+                      <a:endParaRPr lang="en-US" sz="500" dirty="0">
+                        <a:latin typeface="Calibri" charset="0"/>
+                        <a:ea typeface="Calibri" charset="0"/>
+                        <a:cs typeface="Calibri" charset="0"/>
+                      </a:endParaRPr>
+                    </a:p>
+                  </a:txBody>
+                  <a:tcPr marL="91440" marR="91440" marT="45720" marB="45720">
+                    <a:lnL w="2540" cap="flat" cmpd="sng" algn="ctr">
+                      <a:solidFill>
+                        <a:srgbClr val="EEEEEE"/>
+                      </a:solidFill>
+                      <a:prstDash val="solid"/>
+                      <a:round/>
+                      <a:headEnd type="none" w="med" len="med"/>
+                      <a:tailEnd type="none" w="med" len="med"/>
+                    </a:lnL>
+                    <a:lnR w="2540" cap="flat" cmpd="sng" algn="ctr">
+                      <a:solidFill>
+                        <a:srgbClr val="EEEEEE"/>
+                      </a:solidFill>
+                      <a:prstDash val="solid"/>
+                      <a:round/>
+                      <a:headEnd type="none" w="med" len="med"/>
+                      <a:tailEnd type="none" w="med" len="med"/>
+                    </a:lnR>
+                    <a:lnT w="2540" cap="flat" cmpd="sng" algn="ctr">
+                      <a:solidFill>
+                        <a:srgbClr val="EEEEEE"/>
+                      </a:solidFill>
+                      <a:prstDash val="solid"/>
+                      <a:round/>
+                      <a:headEnd type="none" w="med" len="med"/>
+                      <a:tailEnd type="none" w="med" len="med"/>
+                    </a:lnT>
+                    <a:lnB w="2540" cap="flat" cmpd="sng" algn="ctr">
+                      <a:solidFill>
+                        <a:srgbClr val="EEEEEE"/>
+                      </a:solidFill>
+                      <a:prstDash val="solid"/>
+                      <a:round/>
+                      <a:headEnd type="none" w="med" len="med"/>
+                      <a:tailEnd type="none" w="med" len="med"/>
+                    </a:lnB>
+                  </a:tcPr>
+                </a:tc>
+                <a:tc>
+                  <a:txBody>
+                    <a:bodyPr/>
+                    <a:lstStyle/>
+                    <a:p>
+                      <a:pPr algn="ctr" indent="0" marL="0">
+                        <a:buNone/>
+                      </a:pPr>
+                      <a:r>
+                        <a:rPr lang="en-US" sz="500" dirty="0">
+                          <a:solidFill>
+                            <a:srgbClr val="777777"/>
+                          </a:solidFill>
+                          <a:latin typeface="Calibri" pitchFamily="34" charset="0"/>
+                          <a:ea typeface="Calibri" pitchFamily="34" charset="-122"/>
+                          <a:cs typeface="Calibri" pitchFamily="34" charset="-120"/>
+                        </a:rPr>
+                        <a:t>0.97%</a:t>
+                      </a:r>
+                      <a:endParaRPr lang="en-US" sz="500" dirty="0">
+                        <a:latin typeface="Calibri" charset="0"/>
+                        <a:ea typeface="Calibri" charset="0"/>
+                        <a:cs typeface="Calibri" charset="0"/>
+                      </a:endParaRPr>
+                    </a:p>
+                  </a:txBody>
+                  <a:tcPr marL="91440" marR="91440" marT="45720" marB="45720">
+                    <a:lnL w="2540" cap="flat" cmpd="sng" algn="ctr">
+                      <a:solidFill>
+                        <a:srgbClr val="EEEEEE"/>
+                      </a:solidFill>
+                      <a:prstDash val="solid"/>
+                      <a:round/>
+                      <a:headEnd type="none" w="med" len="med"/>
+                      <a:tailEnd type="none" w="med" len="med"/>
+                    </a:lnL>
+                    <a:lnR w="2540" cap="flat" cmpd="sng" algn="ctr">
+                      <a:solidFill>
+                        <a:srgbClr val="EEEEEE"/>
+                      </a:solidFill>
+                      <a:prstDash val="solid"/>
+                      <a:round/>
+                      <a:headEnd type="none" w="med" len="med"/>
+                      <a:tailEnd type="none" w="med" len="med"/>
+                    </a:lnR>
+                    <a:lnT w="2540" cap="flat" cmpd="sng" algn="ctr">
+                      <a:solidFill>
+                        <a:srgbClr val="EEEEEE"/>
+                      </a:solidFill>
+                      <a:prstDash val="solid"/>
+                      <a:round/>
+                      <a:headEnd type="none" w="med" len="med"/>
+                      <a:tailEnd type="none" w="med" len="med"/>
+                    </a:lnT>
+                    <a:lnB w="2540" cap="flat" cmpd="sng" algn="ctr">
+                      <a:solidFill>
+                        <a:srgbClr val="EEEEEE"/>
+                      </a:solidFill>
+                      <a:prstDash val="solid"/>
+                      <a:round/>
+                      <a:headEnd type="none" w="med" len="med"/>
+                      <a:tailEnd type="none" w="med" len="med"/>
+                    </a:lnB>
+                  </a:tcPr>
+                </a:tc>
+                <a:tc>
+                  <a:txBody>
+                    <a:bodyPr/>
+                    <a:lstStyle/>
+                    <a:p>
+                      <a:pPr algn="ctr" indent="0" marL="0">
+                        <a:buNone/>
+                      </a:pPr>
+                      <a:r>
+                        <a:rPr lang="en-US" sz="500" dirty="0">
+                          <a:solidFill>
+                            <a:srgbClr val="777777"/>
+                          </a:solidFill>
+                          <a:latin typeface="Calibri" pitchFamily="34" charset="0"/>
+                          <a:ea typeface="Calibri" pitchFamily="34" charset="-122"/>
+                          <a:cs typeface="Calibri" pitchFamily="34" charset="-120"/>
+                        </a:rPr>
+                        <a:t>0.88%</a:t>
+                      </a:r>
+                      <a:endParaRPr lang="en-US" sz="500" dirty="0">
+                        <a:latin typeface="Calibri" charset="0"/>
+                        <a:ea typeface="Calibri" charset="0"/>
+                        <a:cs typeface="Calibri" charset="0"/>
+                      </a:endParaRPr>
+                    </a:p>
+                  </a:txBody>
+                  <a:tcPr marL="91440" marR="91440" marT="45720" marB="45720">
+                    <a:lnL w="2540" cap="flat" cmpd="sng" algn="ctr">
+                      <a:solidFill>
+                        <a:srgbClr val="EEEEEE"/>
+                      </a:solidFill>
+                      <a:prstDash val="solid"/>
+                      <a:round/>
+                      <a:headEnd type="none" w="med" len="med"/>
+                      <a:tailEnd type="none" w="med" len="med"/>
+                    </a:lnL>
+                    <a:lnR w="2540" cap="flat" cmpd="sng" algn="ctr">
+                      <a:solidFill>
+                        <a:srgbClr val="EEEEEE"/>
+                      </a:solidFill>
+                      <a:prstDash val="solid"/>
+                      <a:round/>
+                      <a:headEnd type="none" w="med" len="med"/>
+                      <a:tailEnd type="none" w="med" len="med"/>
+                    </a:lnR>
+                    <a:lnT w="2540" cap="flat" cmpd="sng" algn="ctr">
+                      <a:solidFill>
+                        <a:srgbClr val="EEEEEE"/>
+                      </a:solidFill>
+                      <a:prstDash val="solid"/>
+                      <a:round/>
+                      <a:headEnd type="none" w="med" len="med"/>
+                      <a:tailEnd type="none" w="med" len="med"/>
+                    </a:lnT>
+                    <a:lnB w="2540" cap="flat" cmpd="sng" algn="ctr">
+                      <a:solidFill>
+                        <a:srgbClr val="EEEEEE"/>
+                      </a:solidFill>
+                      <a:prstDash val="solid"/>
+                      <a:round/>
+                      <a:headEnd type="none" w="med" len="med"/>
+                      <a:tailEnd type="none" w="med" len="med"/>
+                    </a:lnB>
+                  </a:tcPr>
+                </a:tc>
+                <a:tc>
+                  <a:txBody>
+                    <a:bodyPr/>
+                    <a:lstStyle/>
+                    <a:p>
+                      <a:pPr algn="ctr" indent="0" marL="0">
+                        <a:buNone/>
+                      </a:pPr>
+                      <a:r>
+                        <a:rPr lang="en-US" sz="500" dirty="0">
+                          <a:solidFill>
+                            <a:srgbClr val="777777"/>
+                          </a:solidFill>
+                          <a:latin typeface="Calibri" pitchFamily="34" charset="0"/>
+                          <a:ea typeface="Calibri" pitchFamily="34" charset="-122"/>
+                          <a:cs typeface="Calibri" pitchFamily="34" charset="-120"/>
+                        </a:rPr>
+                        <a:t>1.04%</a:t>
+                      </a:r>
+                      <a:endParaRPr lang="en-US" sz="500" dirty="0">
+                        <a:latin typeface="Calibri" charset="0"/>
+                        <a:ea typeface="Calibri" charset="0"/>
+                        <a:cs typeface="Calibri" charset="0"/>
+                      </a:endParaRPr>
+                    </a:p>
+                  </a:txBody>
+                  <a:tcPr marL="91440" marR="91440" marT="45720" marB="45720">
+                    <a:lnL w="2540" cap="flat" cmpd="sng" algn="ctr">
+                      <a:solidFill>
+                        <a:srgbClr val="EEEEEE"/>
+                      </a:solidFill>
+                      <a:prstDash val="solid"/>
+                      <a:round/>
+                      <a:headEnd type="none" w="med" len="med"/>
+                      <a:tailEnd type="none" w="med" len="med"/>
+                    </a:lnL>
+                    <a:lnR w="2540" cap="flat" cmpd="sng" algn="ctr">
+                      <a:solidFill>
+                        <a:srgbClr val="EEEEEE"/>
+                      </a:solidFill>
+                      <a:prstDash val="solid"/>
+                      <a:round/>
+                      <a:headEnd type="none" w="med" len="med"/>
+                      <a:tailEnd type="none" w="med" len="med"/>
+                    </a:lnR>
+                    <a:lnT w="2540" cap="flat" cmpd="sng" algn="ctr">
+                      <a:solidFill>
+                        <a:srgbClr val="EEEEEE"/>
+                      </a:solidFill>
+                      <a:prstDash val="solid"/>
+                      <a:round/>
+                      <a:headEnd type="none" w="med" len="med"/>
+                      <a:tailEnd type="none" w="med" len="med"/>
+                    </a:lnT>
+                    <a:lnB w="2540" cap="flat" cmpd="sng" algn="ctr">
+                      <a:solidFill>
+                        <a:srgbClr val="EEEEEE"/>
+                      </a:solidFill>
+                      <a:prstDash val="solid"/>
+                      <a:round/>
+                      <a:headEnd type="none" w="med" len="med"/>
+                      <a:tailEnd type="none" w="med" len="med"/>
+                    </a:lnB>
+                  </a:tcPr>
+                </a:tc>
+                <a:tc>
+                  <a:txBody>
+                    <a:bodyPr/>
+                    <a:lstStyle/>
+                    <a:p>
+                      <a:pPr algn="ctr" indent="0" marL="0">
+                        <a:buNone/>
+                      </a:pPr>
+                      <a:r>
+                        <a:rPr lang="en-US" sz="500" dirty="0">
+                          <a:solidFill>
+                            <a:srgbClr val="777777"/>
+                          </a:solidFill>
+                          <a:latin typeface="Calibri" pitchFamily="34" charset="0"/>
+                          <a:ea typeface="Calibri" pitchFamily="34" charset="-122"/>
+                          <a:cs typeface="Calibri" pitchFamily="34" charset="-120"/>
+                        </a:rPr>
                         <a:t>0.94%</a:t>
                       </a:r>
                       <a:endParaRPr lang="en-US" sz="500" dirty="0">
@@ -14872,7 +16276,7 @@
                           <a:ea typeface="Calibri" pitchFamily="34" charset="-122"/>
                           <a:cs typeface="Calibri" pitchFamily="34" charset="-120"/>
                         </a:rPr>
-                        <a:t>0.94%</a:t>
+                        <a:t>0.97%</a:t>
                       </a:r>
                       <a:endParaRPr lang="en-US" sz="500" dirty="0">
                         <a:latin typeface="Calibri" charset="0"/>
@@ -14937,7 +16341,7 @@
                           <a:ea typeface="Calibri" pitchFamily="34" charset="-122"/>
                           <a:cs typeface="Calibri" pitchFamily="34" charset="-120"/>
                         </a:rPr>
-                        <a:t>0.94%</a:t>
+                        <a:t>0.89%</a:t>
                       </a:r>
                       <a:endParaRPr lang="en-US" sz="500" dirty="0">
                         <a:latin typeface="Calibri" charset="0"/>
@@ -15002,7 +16406,7 @@
                           <a:ea typeface="Calibri" pitchFamily="34" charset="-122"/>
                           <a:cs typeface="Calibri" pitchFamily="34" charset="-120"/>
                         </a:rPr>
-                        <a:t>0.94%</a:t>
+                        <a:t>0.78%</a:t>
                       </a:r>
                       <a:endParaRPr lang="en-US" sz="500" dirty="0">
                         <a:latin typeface="Calibri" charset="0"/>
@@ -15067,7 +16471,7 @@
                           <a:ea typeface="Calibri" pitchFamily="34" charset="-122"/>
                           <a:cs typeface="Calibri" pitchFamily="34" charset="-120"/>
                         </a:rPr>
-                        <a:t>0.94%</a:t>
+                        <a:t>0.85%</a:t>
                       </a:r>
                       <a:endParaRPr lang="en-US" sz="500" dirty="0">
                         <a:latin typeface="Calibri" charset="0"/>
@@ -15132,7 +16536,7 @@
                           <a:ea typeface="Calibri" pitchFamily="34" charset="-122"/>
                           <a:cs typeface="Calibri" pitchFamily="34" charset="-120"/>
                         </a:rPr>
-                        <a:t>0.94%</a:t>
+                        <a:t>0.75%</a:t>
                       </a:r>
                       <a:endParaRPr lang="en-US" sz="500" dirty="0">
                         <a:latin typeface="Calibri" charset="0"/>
@@ -15197,64 +16601,64 @@
                           <a:ea typeface="Calibri" pitchFamily="34" charset="-122"/>
                           <a:cs typeface="Calibri" pitchFamily="34" charset="-120"/>
                         </a:rPr>
-                        <a:t>0.93%</a:t>
-                      </a:r>
-                      <a:endParaRPr lang="en-US" sz="500" dirty="0">
-                        <a:latin typeface="Calibri" charset="0"/>
-                        <a:ea typeface="Calibri" charset="0"/>
-                        <a:cs typeface="Calibri" charset="0"/>
-                      </a:endParaRPr>
-                    </a:p>
-                  </a:txBody>
-                  <a:tcPr marL="91440" marR="91440" marT="45720" marB="45720">
-                    <a:lnL w="2540" cap="flat" cmpd="sng" algn="ctr">
-                      <a:solidFill>
-                        <a:srgbClr val="EEEEEE"/>
-                      </a:solidFill>
-                      <a:prstDash val="solid"/>
-                      <a:round/>
-                      <a:headEnd type="none" w="med" len="med"/>
-                      <a:tailEnd type="none" w="med" len="med"/>
-                    </a:lnL>
-                    <a:lnR w="2540" cap="flat" cmpd="sng" algn="ctr">
-                      <a:solidFill>
-                        <a:srgbClr val="EEEEEE"/>
-                      </a:solidFill>
-                      <a:prstDash val="solid"/>
-                      <a:round/>
-                      <a:headEnd type="none" w="med" len="med"/>
-                      <a:tailEnd type="none" w="med" len="med"/>
-                    </a:lnR>
-                    <a:lnT w="2540" cap="flat" cmpd="sng" algn="ctr">
-                      <a:solidFill>
-                        <a:srgbClr val="EEEEEE"/>
-                      </a:solidFill>
-                      <a:prstDash val="solid"/>
-                      <a:round/>
-                      <a:headEnd type="none" w="med" len="med"/>
-                      <a:tailEnd type="none" w="med" len="med"/>
-                    </a:lnT>
-                    <a:lnB w="2540" cap="flat" cmpd="sng" algn="ctr">
-                      <a:solidFill>
-                        <a:srgbClr val="EEEEEE"/>
-                      </a:solidFill>
-                      <a:prstDash val="solid"/>
-                      <a:round/>
-                      <a:headEnd type="none" w="med" len="med"/>
-                      <a:tailEnd type="none" w="med" len="med"/>
-                    </a:lnB>
-                  </a:tcPr>
-                </a:tc>
-                <a:tc>
-                  <a:txBody>
-                    <a:bodyPr/>
-                    <a:lstStyle/>
-                    <a:p>
-                      <a:pPr algn="ctr" indent="0" marL="0">
-                        <a:buNone/>
-                      </a:pPr>
-                      <a:r>
-                        <a:rPr lang="en-US" sz="500" dirty="0">
+                        <a:t>0.71%</a:t>
+                      </a:r>
+                      <a:endParaRPr lang="en-US" sz="500" dirty="0">
+                        <a:latin typeface="Calibri" charset="0"/>
+                        <a:ea typeface="Calibri" charset="0"/>
+                        <a:cs typeface="Calibri" charset="0"/>
+                      </a:endParaRPr>
+                    </a:p>
+                  </a:txBody>
+                  <a:tcPr marL="91440" marR="91440" marT="45720" marB="45720">
+                    <a:lnL w="2540" cap="flat" cmpd="sng" algn="ctr">
+                      <a:solidFill>
+                        <a:srgbClr val="EEEEEE"/>
+                      </a:solidFill>
+                      <a:prstDash val="solid"/>
+                      <a:round/>
+                      <a:headEnd type="none" w="med" len="med"/>
+                      <a:tailEnd type="none" w="med" len="med"/>
+                    </a:lnL>
+                    <a:lnR w="2540" cap="flat" cmpd="sng" algn="ctr">
+                      <a:solidFill>
+                        <a:srgbClr val="EEEEEE"/>
+                      </a:solidFill>
+                      <a:prstDash val="solid"/>
+                      <a:round/>
+                      <a:headEnd type="none" w="med" len="med"/>
+                      <a:tailEnd type="none" w="med" len="med"/>
+                    </a:lnR>
+                    <a:lnT w="2540" cap="flat" cmpd="sng" algn="ctr">
+                      <a:solidFill>
+                        <a:srgbClr val="EEEEEE"/>
+                      </a:solidFill>
+                      <a:prstDash val="solid"/>
+                      <a:round/>
+                      <a:headEnd type="none" w="med" len="med"/>
+                      <a:tailEnd type="none" w="med" len="med"/>
+                    </a:lnT>
+                    <a:lnB w="2540" cap="flat" cmpd="sng" algn="ctr">
+                      <a:solidFill>
+                        <a:srgbClr val="EEEEEE"/>
+                      </a:solidFill>
+                      <a:prstDash val="solid"/>
+                      <a:round/>
+                      <a:headEnd type="none" w="med" len="med"/>
+                      <a:tailEnd type="none" w="med" len="med"/>
+                    </a:lnB>
+                  </a:tcPr>
+                </a:tc>
+                <a:tc>
+                  <a:txBody>
+                    <a:bodyPr/>
+                    <a:lstStyle/>
+                    <a:p>
+                      <a:pPr algn="ctr" indent="0" marL="0">
+                        <a:buNone/>
+                      </a:pPr>
+                      <a:r>
+                        <a:rPr lang="en-US" sz="500" b="1" dirty="0">
                           <a:solidFill>
                             <a:srgbClr val="777777"/>
                           </a:solidFill>
@@ -15262,332 +16666,7 @@
                           <a:ea typeface="Calibri" pitchFamily="34" charset="-122"/>
                           <a:cs typeface="Calibri" pitchFamily="34" charset="-120"/>
                         </a:rPr>
-                        <a:t>0.85%</a:t>
-                      </a:r>
-                      <a:endParaRPr lang="en-US" sz="500" dirty="0">
-                        <a:latin typeface="Calibri" charset="0"/>
-                        <a:ea typeface="Calibri" charset="0"/>
-                        <a:cs typeface="Calibri" charset="0"/>
-                      </a:endParaRPr>
-                    </a:p>
-                  </a:txBody>
-                  <a:tcPr marL="91440" marR="91440" marT="45720" marB="45720">
-                    <a:lnL w="2540" cap="flat" cmpd="sng" algn="ctr">
-                      <a:solidFill>
-                        <a:srgbClr val="EEEEEE"/>
-                      </a:solidFill>
-                      <a:prstDash val="solid"/>
-                      <a:round/>
-                      <a:headEnd type="none" w="med" len="med"/>
-                      <a:tailEnd type="none" w="med" len="med"/>
-                    </a:lnL>
-                    <a:lnR w="2540" cap="flat" cmpd="sng" algn="ctr">
-                      <a:solidFill>
-                        <a:srgbClr val="EEEEEE"/>
-                      </a:solidFill>
-                      <a:prstDash val="solid"/>
-                      <a:round/>
-                      <a:headEnd type="none" w="med" len="med"/>
-                      <a:tailEnd type="none" w="med" len="med"/>
-                    </a:lnR>
-                    <a:lnT w="2540" cap="flat" cmpd="sng" algn="ctr">
-                      <a:solidFill>
-                        <a:srgbClr val="EEEEEE"/>
-                      </a:solidFill>
-                      <a:prstDash val="solid"/>
-                      <a:round/>
-                      <a:headEnd type="none" w="med" len="med"/>
-                      <a:tailEnd type="none" w="med" len="med"/>
-                    </a:lnT>
-                    <a:lnB w="2540" cap="flat" cmpd="sng" algn="ctr">
-                      <a:solidFill>
-                        <a:srgbClr val="EEEEEE"/>
-                      </a:solidFill>
-                      <a:prstDash val="solid"/>
-                      <a:round/>
-                      <a:headEnd type="none" w="med" len="med"/>
-                      <a:tailEnd type="none" w="med" len="med"/>
-                    </a:lnB>
-                  </a:tcPr>
-                </a:tc>
-                <a:tc>
-                  <a:txBody>
-                    <a:bodyPr/>
-                    <a:lstStyle/>
-                    <a:p>
-                      <a:pPr algn="ctr" indent="0" marL="0">
-                        <a:buNone/>
-                      </a:pPr>
-                      <a:r>
-                        <a:rPr lang="en-US" sz="500" dirty="0">
-                          <a:solidFill>
-                            <a:srgbClr val="777777"/>
-                          </a:solidFill>
-                          <a:latin typeface="Calibri" pitchFamily="34" charset="0"/>
-                          <a:ea typeface="Calibri" pitchFamily="34" charset="-122"/>
-                          <a:cs typeface="Calibri" pitchFamily="34" charset="-120"/>
-                        </a:rPr>
-                        <a:t>0.80%</a:t>
-                      </a:r>
-                      <a:endParaRPr lang="en-US" sz="500" dirty="0">
-                        <a:latin typeface="Calibri" charset="0"/>
-                        <a:ea typeface="Calibri" charset="0"/>
-                        <a:cs typeface="Calibri" charset="0"/>
-                      </a:endParaRPr>
-                    </a:p>
-                  </a:txBody>
-                  <a:tcPr marL="91440" marR="91440" marT="45720" marB="45720">
-                    <a:lnL w="2540" cap="flat" cmpd="sng" algn="ctr">
-                      <a:solidFill>
-                        <a:srgbClr val="EEEEEE"/>
-                      </a:solidFill>
-                      <a:prstDash val="solid"/>
-                      <a:round/>
-                      <a:headEnd type="none" w="med" len="med"/>
-                      <a:tailEnd type="none" w="med" len="med"/>
-                    </a:lnL>
-                    <a:lnR w="2540" cap="flat" cmpd="sng" algn="ctr">
-                      <a:solidFill>
-                        <a:srgbClr val="EEEEEE"/>
-                      </a:solidFill>
-                      <a:prstDash val="solid"/>
-                      <a:round/>
-                      <a:headEnd type="none" w="med" len="med"/>
-                      <a:tailEnd type="none" w="med" len="med"/>
-                    </a:lnR>
-                    <a:lnT w="2540" cap="flat" cmpd="sng" algn="ctr">
-                      <a:solidFill>
-                        <a:srgbClr val="EEEEEE"/>
-                      </a:solidFill>
-                      <a:prstDash val="solid"/>
-                      <a:round/>
-                      <a:headEnd type="none" w="med" len="med"/>
-                      <a:tailEnd type="none" w="med" len="med"/>
-                    </a:lnT>
-                    <a:lnB w="2540" cap="flat" cmpd="sng" algn="ctr">
-                      <a:solidFill>
-                        <a:srgbClr val="EEEEEE"/>
-                      </a:solidFill>
-                      <a:prstDash val="solid"/>
-                      <a:round/>
-                      <a:headEnd type="none" w="med" len="med"/>
-                      <a:tailEnd type="none" w="med" len="med"/>
-                    </a:lnB>
-                  </a:tcPr>
-                </a:tc>
-                <a:tc>
-                  <a:txBody>
-                    <a:bodyPr/>
-                    <a:lstStyle/>
-                    <a:p>
-                      <a:pPr algn="ctr" indent="0" marL="0">
-                        <a:buNone/>
-                      </a:pPr>
-                      <a:r>
-                        <a:rPr lang="en-US" sz="500" dirty="0">
-                          <a:solidFill>
-                            <a:srgbClr val="777777"/>
-                          </a:solidFill>
-                          <a:latin typeface="Calibri" pitchFamily="34" charset="0"/>
-                          <a:ea typeface="Calibri" pitchFamily="34" charset="-122"/>
-                          <a:cs typeface="Calibri" pitchFamily="34" charset="-120"/>
-                        </a:rPr>
-                        <a:t>0.79%</a:t>
-                      </a:r>
-                      <a:endParaRPr lang="en-US" sz="500" dirty="0">
-                        <a:latin typeface="Calibri" charset="0"/>
-                        <a:ea typeface="Calibri" charset="0"/>
-                        <a:cs typeface="Calibri" charset="0"/>
-                      </a:endParaRPr>
-                    </a:p>
-                  </a:txBody>
-                  <a:tcPr marL="91440" marR="91440" marT="45720" marB="45720">
-                    <a:lnL w="2540" cap="flat" cmpd="sng" algn="ctr">
-                      <a:solidFill>
-                        <a:srgbClr val="EEEEEE"/>
-                      </a:solidFill>
-                      <a:prstDash val="solid"/>
-                      <a:round/>
-                      <a:headEnd type="none" w="med" len="med"/>
-                      <a:tailEnd type="none" w="med" len="med"/>
-                    </a:lnL>
-                    <a:lnR w="2540" cap="flat" cmpd="sng" algn="ctr">
-                      <a:solidFill>
-                        <a:srgbClr val="EEEEEE"/>
-                      </a:solidFill>
-                      <a:prstDash val="solid"/>
-                      <a:round/>
-                      <a:headEnd type="none" w="med" len="med"/>
-                      <a:tailEnd type="none" w="med" len="med"/>
-                    </a:lnR>
-                    <a:lnT w="2540" cap="flat" cmpd="sng" algn="ctr">
-                      <a:solidFill>
-                        <a:srgbClr val="EEEEEE"/>
-                      </a:solidFill>
-                      <a:prstDash val="solid"/>
-                      <a:round/>
-                      <a:headEnd type="none" w="med" len="med"/>
-                      <a:tailEnd type="none" w="med" len="med"/>
-                    </a:lnT>
-                    <a:lnB w="2540" cap="flat" cmpd="sng" algn="ctr">
-                      <a:solidFill>
-                        <a:srgbClr val="EEEEEE"/>
-                      </a:solidFill>
-                      <a:prstDash val="solid"/>
-                      <a:round/>
-                      <a:headEnd type="none" w="med" len="med"/>
-                      <a:tailEnd type="none" w="med" len="med"/>
-                    </a:lnB>
-                  </a:tcPr>
-                </a:tc>
-                <a:tc>
-                  <a:txBody>
-                    <a:bodyPr/>
-                    <a:lstStyle/>
-                    <a:p>
-                      <a:pPr algn="ctr" indent="0" marL="0">
-                        <a:buNone/>
-                      </a:pPr>
-                      <a:r>
-                        <a:rPr lang="en-US" sz="500" dirty="0">
-                          <a:solidFill>
-                            <a:srgbClr val="777777"/>
-                          </a:solidFill>
-                          <a:latin typeface="Calibri" pitchFamily="34" charset="0"/>
-                          <a:ea typeface="Calibri" pitchFamily="34" charset="-122"/>
-                          <a:cs typeface="Calibri" pitchFamily="34" charset="-120"/>
-                        </a:rPr>
-                        <a:t>0.75%</a:t>
-                      </a:r>
-                      <a:endParaRPr lang="en-US" sz="500" dirty="0">
-                        <a:latin typeface="Calibri" charset="0"/>
-                        <a:ea typeface="Calibri" charset="0"/>
-                        <a:cs typeface="Calibri" charset="0"/>
-                      </a:endParaRPr>
-                    </a:p>
-                  </a:txBody>
-                  <a:tcPr marL="91440" marR="91440" marT="45720" marB="45720">
-                    <a:lnL w="2540" cap="flat" cmpd="sng" algn="ctr">
-                      <a:solidFill>
-                        <a:srgbClr val="EEEEEE"/>
-                      </a:solidFill>
-                      <a:prstDash val="solid"/>
-                      <a:round/>
-                      <a:headEnd type="none" w="med" len="med"/>
-                      <a:tailEnd type="none" w="med" len="med"/>
-                    </a:lnL>
-                    <a:lnR w="2540" cap="flat" cmpd="sng" algn="ctr">
-                      <a:solidFill>
-                        <a:srgbClr val="EEEEEE"/>
-                      </a:solidFill>
-                      <a:prstDash val="solid"/>
-                      <a:round/>
-                      <a:headEnd type="none" w="med" len="med"/>
-                      <a:tailEnd type="none" w="med" len="med"/>
-                    </a:lnR>
-                    <a:lnT w="2540" cap="flat" cmpd="sng" algn="ctr">
-                      <a:solidFill>
-                        <a:srgbClr val="EEEEEE"/>
-                      </a:solidFill>
-                      <a:prstDash val="solid"/>
-                      <a:round/>
-                      <a:headEnd type="none" w="med" len="med"/>
-                      <a:tailEnd type="none" w="med" len="med"/>
-                    </a:lnT>
-                    <a:lnB w="2540" cap="flat" cmpd="sng" algn="ctr">
-                      <a:solidFill>
-                        <a:srgbClr val="EEEEEE"/>
-                      </a:solidFill>
-                      <a:prstDash val="solid"/>
-                      <a:round/>
-                      <a:headEnd type="none" w="med" len="med"/>
-                      <a:tailEnd type="none" w="med" len="med"/>
-                    </a:lnB>
-                  </a:tcPr>
-                </a:tc>
-                <a:tc>
-                  <a:txBody>
-                    <a:bodyPr/>
-                    <a:lstStyle/>
-                    <a:p>
-                      <a:pPr algn="ctr" indent="0" marL="0">
-                        <a:buNone/>
-                      </a:pPr>
-                      <a:r>
-                        <a:rPr lang="en-US" sz="500" dirty="0">
-                          <a:solidFill>
-                            <a:srgbClr val="777777"/>
-                          </a:solidFill>
-                          <a:latin typeface="Calibri" pitchFamily="34" charset="0"/>
-                          <a:ea typeface="Calibri" pitchFamily="34" charset="-122"/>
-                          <a:cs typeface="Calibri" pitchFamily="34" charset="-120"/>
-                        </a:rPr>
-                        <a:t>0.73%</a:t>
-                      </a:r>
-                      <a:endParaRPr lang="en-US" sz="500" dirty="0">
-                        <a:latin typeface="Calibri" charset="0"/>
-                        <a:ea typeface="Calibri" charset="0"/>
-                        <a:cs typeface="Calibri" charset="0"/>
-                      </a:endParaRPr>
-                    </a:p>
-                  </a:txBody>
-                  <a:tcPr marL="91440" marR="91440" marT="45720" marB="45720">
-                    <a:lnL w="2540" cap="flat" cmpd="sng" algn="ctr">
-                      <a:solidFill>
-                        <a:srgbClr val="EEEEEE"/>
-                      </a:solidFill>
-                      <a:prstDash val="solid"/>
-                      <a:round/>
-                      <a:headEnd type="none" w="med" len="med"/>
-                      <a:tailEnd type="none" w="med" len="med"/>
-                    </a:lnL>
-                    <a:lnR w="2540" cap="flat" cmpd="sng" algn="ctr">
-                      <a:solidFill>
-                        <a:srgbClr val="EEEEEE"/>
-                      </a:solidFill>
-                      <a:prstDash val="solid"/>
-                      <a:round/>
-                      <a:headEnd type="none" w="med" len="med"/>
-                      <a:tailEnd type="none" w="med" len="med"/>
-                    </a:lnR>
-                    <a:lnT w="2540" cap="flat" cmpd="sng" algn="ctr">
-                      <a:solidFill>
-                        <a:srgbClr val="EEEEEE"/>
-                      </a:solidFill>
-                      <a:prstDash val="solid"/>
-                      <a:round/>
-                      <a:headEnd type="none" w="med" len="med"/>
-                      <a:tailEnd type="none" w="med" len="med"/>
-                    </a:lnT>
-                    <a:lnB w="2540" cap="flat" cmpd="sng" algn="ctr">
-                      <a:solidFill>
-                        <a:srgbClr val="EEEEEE"/>
-                      </a:solidFill>
-                      <a:prstDash val="solid"/>
-                      <a:round/>
-                      <a:headEnd type="none" w="med" len="med"/>
-                      <a:tailEnd type="none" w="med" len="med"/>
-                    </a:lnB>
-                  </a:tcPr>
-                </a:tc>
-                <a:tc>
-                  <a:txBody>
-                    <a:bodyPr/>
-                    <a:lstStyle/>
-                    <a:p>
-                      <a:pPr algn="ctr" indent="0" marL="0">
-                        <a:buNone/>
-                      </a:pPr>
-                      <a:r>
-                        <a:rPr lang="en-US" sz="500" b="1" dirty="0">
-                          <a:solidFill>
-                            <a:srgbClr val="777777"/>
-                          </a:solidFill>
-                          <a:latin typeface="Calibri" pitchFamily="34" charset="0"/>
-                          <a:ea typeface="Calibri" pitchFamily="34" charset="-122"/>
-                          <a:cs typeface="Calibri" pitchFamily="34" charset="-120"/>
-                        </a:rPr>
-                        <a:t>11.00%</a:t>
+                        <a:t>11.19%</a:t>
                       </a:r>
                       <a:endParaRPr lang="en-US" sz="500" dirty="0">
                         <a:latin typeface="Calibri" charset="0"/>
@@ -15773,7 +16852,7 @@
                           <a:ea typeface="Calibri" pitchFamily="34" charset="-122"/>
                           <a:cs typeface="Calibri" pitchFamily="34" charset="-120"/>
                         </a:rPr>
-                        <a:t>0.00%</a:t>
+                        <a:t>0.84%</a:t>
                       </a:r>
                       <a:endParaRPr lang="en-US" sz="500" dirty="0">
                         <a:latin typeface="Calibri" charset="0"/>
@@ -16488,7 +17567,7 @@
                           <a:ea typeface="Calibri" pitchFamily="34" charset="-122"/>
                           <a:cs typeface="Calibri" pitchFamily="34" charset="-120"/>
                         </a:rPr>
-                        <a:t>7.49%</a:t>
+                        <a:t>0.61%</a:t>
                       </a:r>
                       <a:endParaRPr lang="en-US" sz="500" dirty="0">
                         <a:latin typeface="Calibri" charset="0"/>
@@ -16553,7 +17632,7 @@
                           <a:ea typeface="Calibri" pitchFamily="34" charset="-122"/>
                           <a:cs typeface="Calibri" pitchFamily="34" charset="-120"/>
                         </a:rPr>
-                        <a:t>15.86%</a:t>
+                        <a:t>9.36%</a:t>
                       </a:r>
                       <a:endParaRPr lang="en-US" sz="500" dirty="0">
                         <a:latin typeface="Calibri" charset="0"/>
@@ -17716,7 +18795,7 @@
                           <a:ea typeface="Calibri" pitchFamily="34" charset="-122"/>
                           <a:cs typeface="Calibri" pitchFamily="34" charset="-120"/>
                         </a:rPr>
-                        <a:t>0.69%</a:t>
+                        <a:t>0.74%</a:t>
                       </a:r>
                       <a:endParaRPr lang="en-US" sz="500" dirty="0">
                         <a:latin typeface="Calibri" charset="0"/>
@@ -17781,7 +18860,7 @@
                           <a:ea typeface="Calibri" pitchFamily="34" charset="-122"/>
                           <a:cs typeface="Calibri" pitchFamily="34" charset="-120"/>
                         </a:rPr>
-                        <a:t>0.60%</a:t>
+                        <a:t>0.61%</a:t>
                       </a:r>
                       <a:endParaRPr lang="en-US" sz="500" dirty="0">
                         <a:latin typeface="Calibri" charset="0"/>
@@ -17846,7 +18925,7 @@
                           <a:ea typeface="Calibri" pitchFamily="34" charset="-122"/>
                           <a:cs typeface="Calibri" pitchFamily="34" charset="-120"/>
                         </a:rPr>
-                        <a:t>0.60%</a:t>
+                        <a:t>0.56%</a:t>
                       </a:r>
                       <a:endParaRPr lang="en-US" sz="500" dirty="0">
                         <a:latin typeface="Calibri" charset="0"/>
@@ -17911,6 +18990,71 @@
                           <a:ea typeface="Calibri" pitchFamily="34" charset="-122"/>
                           <a:cs typeface="Calibri" pitchFamily="34" charset="-120"/>
                         </a:rPr>
+                        <a:t>0.61%</a:t>
+                      </a:r>
+                      <a:endParaRPr lang="en-US" sz="500" dirty="0">
+                        <a:latin typeface="Calibri" charset="0"/>
+                        <a:ea typeface="Calibri" charset="0"/>
+                        <a:cs typeface="Calibri" charset="0"/>
+                      </a:endParaRPr>
+                    </a:p>
+                  </a:txBody>
+                  <a:tcPr marL="91440" marR="91440" marT="45720" marB="45720">
+                    <a:lnL w="2540" cap="flat" cmpd="sng" algn="ctr">
+                      <a:solidFill>
+                        <a:srgbClr val="EEEEEE"/>
+                      </a:solidFill>
+                      <a:prstDash val="solid"/>
+                      <a:round/>
+                      <a:headEnd type="none" w="med" len="med"/>
+                      <a:tailEnd type="none" w="med" len="med"/>
+                    </a:lnL>
+                    <a:lnR w="2540" cap="flat" cmpd="sng" algn="ctr">
+                      <a:solidFill>
+                        <a:srgbClr val="EEEEEE"/>
+                      </a:solidFill>
+                      <a:prstDash val="solid"/>
+                      <a:round/>
+                      <a:headEnd type="none" w="med" len="med"/>
+                      <a:tailEnd type="none" w="med" len="med"/>
+                    </a:lnR>
+                    <a:lnT w="2540" cap="flat" cmpd="sng" algn="ctr">
+                      <a:solidFill>
+                        <a:srgbClr val="EEEEEE"/>
+                      </a:solidFill>
+                      <a:prstDash val="solid"/>
+                      <a:round/>
+                      <a:headEnd type="none" w="med" len="med"/>
+                      <a:tailEnd type="none" w="med" len="med"/>
+                    </a:lnT>
+                    <a:lnB w="2540" cap="flat" cmpd="sng" algn="ctr">
+                      <a:solidFill>
+                        <a:srgbClr val="EEEEEE"/>
+                      </a:solidFill>
+                      <a:prstDash val="solid"/>
+                      <a:round/>
+                      <a:headEnd type="none" w="med" len="med"/>
+                      <a:tailEnd type="none" w="med" len="med"/>
+                    </a:lnB>
+                  </a:tcPr>
+                </a:tc>
+                <a:tc>
+                  <a:txBody>
+                    <a:bodyPr/>
+                    <a:lstStyle/>
+                    <a:p>
+                      <a:pPr algn="ctr" indent="0" marL="0">
+                        <a:buNone/>
+                      </a:pPr>
+                      <a:r>
+                        <a:rPr lang="en-US" sz="500" dirty="0">
+                          <a:solidFill>
+                            <a:srgbClr val="777777"/>
+                          </a:solidFill>
+                          <a:latin typeface="Calibri" pitchFamily="34" charset="0"/>
+                          <a:ea typeface="Calibri" pitchFamily="34" charset="-122"/>
+                          <a:cs typeface="Calibri" pitchFamily="34" charset="-120"/>
+                        </a:rPr>
                         <a:t>0.55%</a:t>
                       </a:r>
                       <a:endParaRPr lang="en-US" sz="500" dirty="0">
@@ -17976,6 +19120,71 @@
                           <a:ea typeface="Calibri" pitchFamily="34" charset="-122"/>
                           <a:cs typeface="Calibri" pitchFamily="34" charset="-120"/>
                         </a:rPr>
+                        <a:t>0.46%</a:t>
+                      </a:r>
+                      <a:endParaRPr lang="en-US" sz="500" dirty="0">
+                        <a:latin typeface="Calibri" charset="0"/>
+                        <a:ea typeface="Calibri" charset="0"/>
+                        <a:cs typeface="Calibri" charset="0"/>
+                      </a:endParaRPr>
+                    </a:p>
+                  </a:txBody>
+                  <a:tcPr marL="91440" marR="91440" marT="45720" marB="45720">
+                    <a:lnL w="2540" cap="flat" cmpd="sng" algn="ctr">
+                      <a:solidFill>
+                        <a:srgbClr val="EEEEEE"/>
+                      </a:solidFill>
+                      <a:prstDash val="solid"/>
+                      <a:round/>
+                      <a:headEnd type="none" w="med" len="med"/>
+                      <a:tailEnd type="none" w="med" len="med"/>
+                    </a:lnL>
+                    <a:lnR w="2540" cap="flat" cmpd="sng" algn="ctr">
+                      <a:solidFill>
+                        <a:srgbClr val="EEEEEE"/>
+                      </a:solidFill>
+                      <a:prstDash val="solid"/>
+                      <a:round/>
+                      <a:headEnd type="none" w="med" len="med"/>
+                      <a:tailEnd type="none" w="med" len="med"/>
+                    </a:lnR>
+                    <a:lnT w="2540" cap="flat" cmpd="sng" algn="ctr">
+                      <a:solidFill>
+                        <a:srgbClr val="EEEEEE"/>
+                      </a:solidFill>
+                      <a:prstDash val="solid"/>
+                      <a:round/>
+                      <a:headEnd type="none" w="med" len="med"/>
+                      <a:tailEnd type="none" w="med" len="med"/>
+                    </a:lnT>
+                    <a:lnB w="2540" cap="flat" cmpd="sng" algn="ctr">
+                      <a:solidFill>
+                        <a:srgbClr val="EEEEEE"/>
+                      </a:solidFill>
+                      <a:prstDash val="solid"/>
+                      <a:round/>
+                      <a:headEnd type="none" w="med" len="med"/>
+                      <a:tailEnd type="none" w="med" len="med"/>
+                    </a:lnB>
+                  </a:tcPr>
+                </a:tc>
+                <a:tc>
+                  <a:txBody>
+                    <a:bodyPr/>
+                    <a:lstStyle/>
+                    <a:p>
+                      <a:pPr algn="ctr" indent="0" marL="0">
+                        <a:buNone/>
+                      </a:pPr>
+                      <a:r>
+                        <a:rPr lang="en-US" sz="500" dirty="0">
+                          <a:solidFill>
+                            <a:srgbClr val="777777"/>
+                          </a:solidFill>
+                          <a:latin typeface="Calibri" pitchFamily="34" charset="0"/>
+                          <a:ea typeface="Calibri" pitchFamily="34" charset="-122"/>
+                          <a:cs typeface="Calibri" pitchFamily="34" charset="-120"/>
+                        </a:rPr>
                         <a:t>0.53%</a:t>
                       </a:r>
                       <a:endParaRPr lang="en-US" sz="500" dirty="0">
@@ -18041,7 +19250,7 @@
                           <a:ea typeface="Calibri" pitchFamily="34" charset="-122"/>
                           <a:cs typeface="Calibri" pitchFamily="34" charset="-120"/>
                         </a:rPr>
-                        <a:t>0.49%</a:t>
+                        <a:t>0.48%</a:t>
                       </a:r>
                       <a:endParaRPr lang="en-US" sz="500" dirty="0">
                         <a:latin typeface="Calibri" charset="0"/>
@@ -18171,7 +19380,7 @@
                           <a:ea typeface="Calibri" pitchFamily="34" charset="-122"/>
                           <a:cs typeface="Calibri" pitchFamily="34" charset="-120"/>
                         </a:rPr>
-                        <a:t>0.48%</a:t>
+                        <a:t>0.45%</a:t>
                       </a:r>
                       <a:endParaRPr lang="en-US" sz="500" dirty="0">
                         <a:latin typeface="Calibri" charset="0"/>
@@ -18236,7 +19445,7 @@
                           <a:ea typeface="Calibri" pitchFamily="34" charset="-122"/>
                           <a:cs typeface="Calibri" pitchFamily="34" charset="-120"/>
                         </a:rPr>
-                        <a:t>0.46%</a:t>
+                        <a:t>0.44%</a:t>
                       </a:r>
                       <a:endParaRPr lang="en-US" sz="500" dirty="0">
                         <a:latin typeface="Calibri" charset="0"/>
@@ -18301,64 +19510,64 @@
                           <a:ea typeface="Calibri" pitchFamily="34" charset="-122"/>
                           <a:cs typeface="Calibri" pitchFamily="34" charset="-120"/>
                         </a:rPr>
-                        <a:t>0.45%</a:t>
-                      </a:r>
-                      <a:endParaRPr lang="en-US" sz="500" dirty="0">
-                        <a:latin typeface="Calibri" charset="0"/>
-                        <a:ea typeface="Calibri" charset="0"/>
-                        <a:cs typeface="Calibri" charset="0"/>
-                      </a:endParaRPr>
-                    </a:p>
-                  </a:txBody>
-                  <a:tcPr marL="91440" marR="91440" marT="45720" marB="45720">
-                    <a:lnL w="2540" cap="flat" cmpd="sng" algn="ctr">
-                      <a:solidFill>
-                        <a:srgbClr val="EEEEEE"/>
-                      </a:solidFill>
-                      <a:prstDash val="solid"/>
-                      <a:round/>
-                      <a:headEnd type="none" w="med" len="med"/>
-                      <a:tailEnd type="none" w="med" len="med"/>
-                    </a:lnL>
-                    <a:lnR w="2540" cap="flat" cmpd="sng" algn="ctr">
-                      <a:solidFill>
-                        <a:srgbClr val="EEEEEE"/>
-                      </a:solidFill>
-                      <a:prstDash val="solid"/>
-                      <a:round/>
-                      <a:headEnd type="none" w="med" len="med"/>
-                      <a:tailEnd type="none" w="med" len="med"/>
-                    </a:lnR>
-                    <a:lnT w="2540" cap="flat" cmpd="sng" algn="ctr">
-                      <a:solidFill>
-                        <a:srgbClr val="EEEEEE"/>
-                      </a:solidFill>
-                      <a:prstDash val="solid"/>
-                      <a:round/>
-                      <a:headEnd type="none" w="med" len="med"/>
-                      <a:tailEnd type="none" w="med" len="med"/>
-                    </a:lnT>
-                    <a:lnB w="2540" cap="flat" cmpd="sng" algn="ctr">
-                      <a:solidFill>
-                        <a:srgbClr val="EEEEEE"/>
-                      </a:solidFill>
-                      <a:prstDash val="solid"/>
-                      <a:round/>
-                      <a:headEnd type="none" w="med" len="med"/>
-                      <a:tailEnd type="none" w="med" len="med"/>
-                    </a:lnB>
-                  </a:tcPr>
-                </a:tc>
-                <a:tc>
-                  <a:txBody>
-                    <a:bodyPr/>
-                    <a:lstStyle/>
-                    <a:p>
-                      <a:pPr algn="ctr" indent="0" marL="0">
-                        <a:buNone/>
-                      </a:pPr>
-                      <a:r>
-                        <a:rPr lang="en-US" sz="500" dirty="0">
+                        <a:t>0.44%</a:t>
+                      </a:r>
+                      <a:endParaRPr lang="en-US" sz="500" dirty="0">
+                        <a:latin typeface="Calibri" charset="0"/>
+                        <a:ea typeface="Calibri" charset="0"/>
+                        <a:cs typeface="Calibri" charset="0"/>
+                      </a:endParaRPr>
+                    </a:p>
+                  </a:txBody>
+                  <a:tcPr marL="91440" marR="91440" marT="45720" marB="45720">
+                    <a:lnL w="2540" cap="flat" cmpd="sng" algn="ctr">
+                      <a:solidFill>
+                        <a:srgbClr val="EEEEEE"/>
+                      </a:solidFill>
+                      <a:prstDash val="solid"/>
+                      <a:round/>
+                      <a:headEnd type="none" w="med" len="med"/>
+                      <a:tailEnd type="none" w="med" len="med"/>
+                    </a:lnL>
+                    <a:lnR w="2540" cap="flat" cmpd="sng" algn="ctr">
+                      <a:solidFill>
+                        <a:srgbClr val="EEEEEE"/>
+                      </a:solidFill>
+                      <a:prstDash val="solid"/>
+                      <a:round/>
+                      <a:headEnd type="none" w="med" len="med"/>
+                      <a:tailEnd type="none" w="med" len="med"/>
+                    </a:lnR>
+                    <a:lnT w="2540" cap="flat" cmpd="sng" algn="ctr">
+                      <a:solidFill>
+                        <a:srgbClr val="EEEEEE"/>
+                      </a:solidFill>
+                      <a:prstDash val="solid"/>
+                      <a:round/>
+                      <a:headEnd type="none" w="med" len="med"/>
+                      <a:tailEnd type="none" w="med" len="med"/>
+                    </a:lnT>
+                    <a:lnB w="2540" cap="flat" cmpd="sng" algn="ctr">
+                      <a:solidFill>
+                        <a:srgbClr val="EEEEEE"/>
+                      </a:solidFill>
+                      <a:prstDash val="solid"/>
+                      <a:round/>
+                      <a:headEnd type="none" w="med" len="med"/>
+                      <a:tailEnd type="none" w="med" len="med"/>
+                    </a:lnB>
+                  </a:tcPr>
+                </a:tc>
+                <a:tc>
+                  <a:txBody>
+                    <a:bodyPr/>
+                    <a:lstStyle/>
+                    <a:p>
+                      <a:pPr algn="ctr" indent="0" marL="0">
+                        <a:buNone/>
+                      </a:pPr>
+                      <a:r>
+                        <a:rPr lang="en-US" sz="500" b="1" dirty="0">
                           <a:solidFill>
                             <a:srgbClr val="777777"/>
                           </a:solidFill>
@@ -18366,137 +19575,7 @@
                           <a:ea typeface="Calibri" pitchFamily="34" charset="-122"/>
                           <a:cs typeface="Calibri" pitchFamily="34" charset="-120"/>
                         </a:rPr>
-                        <a:t>0.44%</a:t>
-                      </a:r>
-                      <a:endParaRPr lang="en-US" sz="500" dirty="0">
-                        <a:latin typeface="Calibri" charset="0"/>
-                        <a:ea typeface="Calibri" charset="0"/>
-                        <a:cs typeface="Calibri" charset="0"/>
-                      </a:endParaRPr>
-                    </a:p>
-                  </a:txBody>
-                  <a:tcPr marL="91440" marR="91440" marT="45720" marB="45720">
-                    <a:lnL w="2540" cap="flat" cmpd="sng" algn="ctr">
-                      <a:solidFill>
-                        <a:srgbClr val="EEEEEE"/>
-                      </a:solidFill>
-                      <a:prstDash val="solid"/>
-                      <a:round/>
-                      <a:headEnd type="none" w="med" len="med"/>
-                      <a:tailEnd type="none" w="med" len="med"/>
-                    </a:lnL>
-                    <a:lnR w="2540" cap="flat" cmpd="sng" algn="ctr">
-                      <a:solidFill>
-                        <a:srgbClr val="EEEEEE"/>
-                      </a:solidFill>
-                      <a:prstDash val="solid"/>
-                      <a:round/>
-                      <a:headEnd type="none" w="med" len="med"/>
-                      <a:tailEnd type="none" w="med" len="med"/>
-                    </a:lnR>
-                    <a:lnT w="2540" cap="flat" cmpd="sng" algn="ctr">
-                      <a:solidFill>
-                        <a:srgbClr val="EEEEEE"/>
-                      </a:solidFill>
-                      <a:prstDash val="solid"/>
-                      <a:round/>
-                      <a:headEnd type="none" w="med" len="med"/>
-                      <a:tailEnd type="none" w="med" len="med"/>
-                    </a:lnT>
-                    <a:lnB w="2540" cap="flat" cmpd="sng" algn="ctr">
-                      <a:solidFill>
-                        <a:srgbClr val="EEEEEE"/>
-                      </a:solidFill>
-                      <a:prstDash val="solid"/>
-                      <a:round/>
-                      <a:headEnd type="none" w="med" len="med"/>
-                      <a:tailEnd type="none" w="med" len="med"/>
-                    </a:lnB>
-                  </a:tcPr>
-                </a:tc>
-                <a:tc>
-                  <a:txBody>
-                    <a:bodyPr/>
-                    <a:lstStyle/>
-                    <a:p>
-                      <a:pPr algn="ctr" indent="0" marL="0">
-                        <a:buNone/>
-                      </a:pPr>
-                      <a:r>
-                        <a:rPr lang="en-US" sz="500" dirty="0">
-                          <a:solidFill>
-                            <a:srgbClr val="777777"/>
-                          </a:solidFill>
-                          <a:latin typeface="Calibri" pitchFamily="34" charset="0"/>
-                          <a:ea typeface="Calibri" pitchFamily="34" charset="-122"/>
-                          <a:cs typeface="Calibri" pitchFamily="34" charset="-120"/>
-                        </a:rPr>
-                        <a:t>0.43%</a:t>
-                      </a:r>
-                      <a:endParaRPr lang="en-US" sz="500" dirty="0">
-                        <a:latin typeface="Calibri" charset="0"/>
-                        <a:ea typeface="Calibri" charset="0"/>
-                        <a:cs typeface="Calibri" charset="0"/>
-                      </a:endParaRPr>
-                    </a:p>
-                  </a:txBody>
-                  <a:tcPr marL="91440" marR="91440" marT="45720" marB="45720">
-                    <a:lnL w="2540" cap="flat" cmpd="sng" algn="ctr">
-                      <a:solidFill>
-                        <a:srgbClr val="EEEEEE"/>
-                      </a:solidFill>
-                      <a:prstDash val="solid"/>
-                      <a:round/>
-                      <a:headEnd type="none" w="med" len="med"/>
-                      <a:tailEnd type="none" w="med" len="med"/>
-                    </a:lnL>
-                    <a:lnR w="2540" cap="flat" cmpd="sng" algn="ctr">
-                      <a:solidFill>
-                        <a:srgbClr val="EEEEEE"/>
-                      </a:solidFill>
-                      <a:prstDash val="solid"/>
-                      <a:round/>
-                      <a:headEnd type="none" w="med" len="med"/>
-                      <a:tailEnd type="none" w="med" len="med"/>
-                    </a:lnR>
-                    <a:lnT w="2540" cap="flat" cmpd="sng" algn="ctr">
-                      <a:solidFill>
-                        <a:srgbClr val="EEEEEE"/>
-                      </a:solidFill>
-                      <a:prstDash val="solid"/>
-                      <a:round/>
-                      <a:headEnd type="none" w="med" len="med"/>
-                      <a:tailEnd type="none" w="med" len="med"/>
-                    </a:lnT>
-                    <a:lnB w="2540" cap="flat" cmpd="sng" algn="ctr">
-                      <a:solidFill>
-                        <a:srgbClr val="EEEEEE"/>
-                      </a:solidFill>
-                      <a:prstDash val="solid"/>
-                      <a:round/>
-                      <a:headEnd type="none" w="med" len="med"/>
-                      <a:tailEnd type="none" w="med" len="med"/>
-                    </a:lnB>
-                  </a:tcPr>
-                </a:tc>
-                <a:tc>
-                  <a:txBody>
-                    <a:bodyPr/>
-                    <a:lstStyle/>
-                    <a:p>
-                      <a:pPr algn="ctr" indent="0" marL="0">
-                        <a:buNone/>
-                      </a:pPr>
-                      <a:r>
-                        <a:rPr lang="en-US" sz="500" b="1" dirty="0">
-                          <a:solidFill>
-                            <a:srgbClr val="777777"/>
-                          </a:solidFill>
-                          <a:latin typeface="Calibri" pitchFamily="34" charset="0"/>
-                          <a:ea typeface="Calibri" pitchFamily="34" charset="-122"/>
-                          <a:cs typeface="Calibri" pitchFamily="34" charset="-120"/>
-                        </a:rPr>
-                        <a:t>6.38%</a:t>
+                        <a:t>6.54%</a:t>
                       </a:r>
                       <a:endParaRPr lang="en-US" sz="500" dirty="0">
                         <a:latin typeface="Calibri" charset="0"/>
@@ -18682,7 +19761,7 @@
                           <a:ea typeface="Calibri" pitchFamily="34" charset="-122"/>
                           <a:cs typeface="Calibri" pitchFamily="34" charset="-120"/>
                         </a:rPr>
-                        <a:t>0.00%</a:t>
+                        <a:t>0.59%</a:t>
                       </a:r>
                       <a:endParaRPr lang="en-US" sz="500" dirty="0">
                         <a:latin typeface="Calibri" charset="0"/>
@@ -19397,7 +20476,7 @@
                           <a:ea typeface="Calibri" pitchFamily="34" charset="-122"/>
                           <a:cs typeface="Calibri" pitchFamily="34" charset="-120"/>
                         </a:rPr>
-                        <a:t>-2.99%</a:t>
+                        <a:t>0.32%</a:t>
                       </a:r>
                       <a:endParaRPr lang="en-US" sz="500" dirty="0">
                         <a:latin typeface="Calibri" charset="0"/>
@@ -19462,7 +20541,7 @@
                           <a:ea typeface="Calibri" pitchFamily="34" charset="-122"/>
                           <a:cs typeface="Calibri" pitchFamily="34" charset="-120"/>
                         </a:rPr>
-                        <a:t>0.90%</a:t>
+                        <a:t>4.95%</a:t>
                       </a:r>
                       <a:endParaRPr lang="en-US" sz="500" dirty="0">
                         <a:latin typeface="Calibri" charset="0"/>
@@ -20625,6 +21704,201 @@
                           <a:ea typeface="Calibri" pitchFamily="34" charset="-122"/>
                           <a:cs typeface="Calibri" pitchFamily="34" charset="-120"/>
                         </a:rPr>
+                        <a:t>0.45%</a:t>
+                      </a:r>
+                      <a:endParaRPr lang="en-US" sz="500" dirty="0">
+                        <a:latin typeface="Calibri" charset="0"/>
+                        <a:ea typeface="Calibri" charset="0"/>
+                        <a:cs typeface="Calibri" charset="0"/>
+                      </a:endParaRPr>
+                    </a:p>
+                  </a:txBody>
+                  <a:tcPr marL="91440" marR="91440" marT="45720" marB="45720">
+                    <a:lnL w="2540" cap="flat" cmpd="sng" algn="ctr">
+                      <a:solidFill>
+                        <a:srgbClr val="EEEEEE"/>
+                      </a:solidFill>
+                      <a:prstDash val="solid"/>
+                      <a:round/>
+                      <a:headEnd type="none" w="med" len="med"/>
+                      <a:tailEnd type="none" w="med" len="med"/>
+                    </a:lnL>
+                    <a:lnR w="2540" cap="flat" cmpd="sng" algn="ctr">
+                      <a:solidFill>
+                        <a:srgbClr val="EEEEEE"/>
+                      </a:solidFill>
+                      <a:prstDash val="solid"/>
+                      <a:round/>
+                      <a:headEnd type="none" w="med" len="med"/>
+                      <a:tailEnd type="none" w="med" len="med"/>
+                    </a:lnR>
+                    <a:lnT w="2540" cap="flat" cmpd="sng" algn="ctr">
+                      <a:solidFill>
+                        <a:srgbClr val="EEEEEE"/>
+                      </a:solidFill>
+                      <a:prstDash val="solid"/>
+                      <a:round/>
+                      <a:headEnd type="none" w="med" len="med"/>
+                      <a:tailEnd type="none" w="med" len="med"/>
+                    </a:lnT>
+                    <a:lnB w="2540" cap="flat" cmpd="sng" algn="ctr">
+                      <a:solidFill>
+                        <a:srgbClr val="EEEEEE"/>
+                      </a:solidFill>
+                      <a:prstDash val="solid"/>
+                      <a:round/>
+                      <a:headEnd type="none" w="med" len="med"/>
+                      <a:tailEnd type="none" w="med" len="med"/>
+                    </a:lnB>
+                  </a:tcPr>
+                </a:tc>
+                <a:tc>
+                  <a:txBody>
+                    <a:bodyPr/>
+                    <a:lstStyle/>
+                    <a:p>
+                      <a:pPr algn="ctr" indent="0" marL="0">
+                        <a:buNone/>
+                      </a:pPr>
+                      <a:r>
+                        <a:rPr lang="en-US" sz="500" dirty="0">
+                          <a:solidFill>
+                            <a:srgbClr val="777777"/>
+                          </a:solidFill>
+                          <a:latin typeface="Calibri" pitchFamily="34" charset="0"/>
+                          <a:ea typeface="Calibri" pitchFamily="34" charset="-122"/>
+                          <a:cs typeface="Calibri" pitchFamily="34" charset="-120"/>
+                        </a:rPr>
+                        <a:t>0.39%</a:t>
+                      </a:r>
+                      <a:endParaRPr lang="en-US" sz="500" dirty="0">
+                        <a:latin typeface="Calibri" charset="0"/>
+                        <a:ea typeface="Calibri" charset="0"/>
+                        <a:cs typeface="Calibri" charset="0"/>
+                      </a:endParaRPr>
+                    </a:p>
+                  </a:txBody>
+                  <a:tcPr marL="91440" marR="91440" marT="45720" marB="45720">
+                    <a:lnL w="2540" cap="flat" cmpd="sng" algn="ctr">
+                      <a:solidFill>
+                        <a:srgbClr val="EEEEEE"/>
+                      </a:solidFill>
+                      <a:prstDash val="solid"/>
+                      <a:round/>
+                      <a:headEnd type="none" w="med" len="med"/>
+                      <a:tailEnd type="none" w="med" len="med"/>
+                    </a:lnL>
+                    <a:lnR w="2540" cap="flat" cmpd="sng" algn="ctr">
+                      <a:solidFill>
+                        <a:srgbClr val="EEEEEE"/>
+                      </a:solidFill>
+                      <a:prstDash val="solid"/>
+                      <a:round/>
+                      <a:headEnd type="none" w="med" len="med"/>
+                      <a:tailEnd type="none" w="med" len="med"/>
+                    </a:lnR>
+                    <a:lnT w="2540" cap="flat" cmpd="sng" algn="ctr">
+                      <a:solidFill>
+                        <a:srgbClr val="EEEEEE"/>
+                      </a:solidFill>
+                      <a:prstDash val="solid"/>
+                      <a:round/>
+                      <a:headEnd type="none" w="med" len="med"/>
+                      <a:tailEnd type="none" w="med" len="med"/>
+                    </a:lnT>
+                    <a:lnB w="2540" cap="flat" cmpd="sng" algn="ctr">
+                      <a:solidFill>
+                        <a:srgbClr val="EEEEEE"/>
+                      </a:solidFill>
+                      <a:prstDash val="solid"/>
+                      <a:round/>
+                      <a:headEnd type="none" w="med" len="med"/>
+                      <a:tailEnd type="none" w="med" len="med"/>
+                    </a:lnB>
+                  </a:tcPr>
+                </a:tc>
+                <a:tc>
+                  <a:txBody>
+                    <a:bodyPr/>
+                    <a:lstStyle/>
+                    <a:p>
+                      <a:pPr algn="ctr" indent="0" marL="0">
+                        <a:buNone/>
+                      </a:pPr>
+                      <a:r>
+                        <a:rPr lang="en-US" sz="500" dirty="0">
+                          <a:solidFill>
+                            <a:srgbClr val="777777"/>
+                          </a:solidFill>
+                          <a:latin typeface="Calibri" pitchFamily="34" charset="0"/>
+                          <a:ea typeface="Calibri" pitchFamily="34" charset="-122"/>
+                          <a:cs typeface="Calibri" pitchFamily="34" charset="-120"/>
+                        </a:rPr>
+                        <a:t>0.43%</a:t>
+                      </a:r>
+                      <a:endParaRPr lang="en-US" sz="500" dirty="0">
+                        <a:latin typeface="Calibri" charset="0"/>
+                        <a:ea typeface="Calibri" charset="0"/>
+                        <a:cs typeface="Calibri" charset="0"/>
+                      </a:endParaRPr>
+                    </a:p>
+                  </a:txBody>
+                  <a:tcPr marL="91440" marR="91440" marT="45720" marB="45720">
+                    <a:lnL w="2540" cap="flat" cmpd="sng" algn="ctr">
+                      <a:solidFill>
+                        <a:srgbClr val="EEEEEE"/>
+                      </a:solidFill>
+                      <a:prstDash val="solid"/>
+                      <a:round/>
+                      <a:headEnd type="none" w="med" len="med"/>
+                      <a:tailEnd type="none" w="med" len="med"/>
+                    </a:lnL>
+                    <a:lnR w="2540" cap="flat" cmpd="sng" algn="ctr">
+                      <a:solidFill>
+                        <a:srgbClr val="EEEEEE"/>
+                      </a:solidFill>
+                      <a:prstDash val="solid"/>
+                      <a:round/>
+                      <a:headEnd type="none" w="med" len="med"/>
+                      <a:tailEnd type="none" w="med" len="med"/>
+                    </a:lnR>
+                    <a:lnT w="2540" cap="flat" cmpd="sng" algn="ctr">
+                      <a:solidFill>
+                        <a:srgbClr val="EEEEEE"/>
+                      </a:solidFill>
+                      <a:prstDash val="solid"/>
+                      <a:round/>
+                      <a:headEnd type="none" w="med" len="med"/>
+                      <a:tailEnd type="none" w="med" len="med"/>
+                    </a:lnT>
+                    <a:lnB w="2540" cap="flat" cmpd="sng" algn="ctr">
+                      <a:solidFill>
+                        <a:srgbClr val="EEEEEE"/>
+                      </a:solidFill>
+                      <a:prstDash val="solid"/>
+                      <a:round/>
+                      <a:headEnd type="none" w="med" len="med"/>
+                      <a:tailEnd type="none" w="med" len="med"/>
+                    </a:lnB>
+                  </a:tcPr>
+                </a:tc>
+                <a:tc>
+                  <a:txBody>
+                    <a:bodyPr/>
+                    <a:lstStyle/>
+                    <a:p>
+                      <a:pPr algn="ctr" indent="0" marL="0">
+                        <a:buNone/>
+                      </a:pPr>
+                      <a:r>
+                        <a:rPr lang="en-US" sz="500" dirty="0">
+                          <a:solidFill>
+                            <a:srgbClr val="777777"/>
+                          </a:solidFill>
+                          <a:latin typeface="Calibri" pitchFamily="34" charset="0"/>
+                          <a:ea typeface="Calibri" pitchFamily="34" charset="-122"/>
+                          <a:cs typeface="Calibri" pitchFamily="34" charset="-120"/>
+                        </a:rPr>
                         <a:t>0.42%</a:t>
                       </a:r>
                       <a:endParaRPr lang="en-US" sz="500" dirty="0">
@@ -20755,6 +22029,201 @@
                           <a:ea typeface="Calibri" pitchFamily="34" charset="-122"/>
                           <a:cs typeface="Calibri" pitchFamily="34" charset="-120"/>
                         </a:rPr>
+                        <a:t>0.43%</a:t>
+                      </a:r>
+                      <a:endParaRPr lang="en-US" sz="500" dirty="0">
+                        <a:latin typeface="Calibri" charset="0"/>
+                        <a:ea typeface="Calibri" charset="0"/>
+                        <a:cs typeface="Calibri" charset="0"/>
+                      </a:endParaRPr>
+                    </a:p>
+                  </a:txBody>
+                  <a:tcPr marL="91440" marR="91440" marT="45720" marB="45720">
+                    <a:lnL w="2540" cap="flat" cmpd="sng" algn="ctr">
+                      <a:solidFill>
+                        <a:srgbClr val="EEEEEE"/>
+                      </a:solidFill>
+                      <a:prstDash val="solid"/>
+                      <a:round/>
+                      <a:headEnd type="none" w="med" len="med"/>
+                      <a:tailEnd type="none" w="med" len="med"/>
+                    </a:lnL>
+                    <a:lnR w="2540" cap="flat" cmpd="sng" algn="ctr">
+                      <a:solidFill>
+                        <a:srgbClr val="EEEEEE"/>
+                      </a:solidFill>
+                      <a:prstDash val="solid"/>
+                      <a:round/>
+                      <a:headEnd type="none" w="med" len="med"/>
+                      <a:tailEnd type="none" w="med" len="med"/>
+                    </a:lnR>
+                    <a:lnT w="2540" cap="flat" cmpd="sng" algn="ctr">
+                      <a:solidFill>
+                        <a:srgbClr val="EEEEEE"/>
+                      </a:solidFill>
+                      <a:prstDash val="solid"/>
+                      <a:round/>
+                      <a:headEnd type="none" w="med" len="med"/>
+                      <a:tailEnd type="none" w="med" len="med"/>
+                    </a:lnT>
+                    <a:lnB w="2540" cap="flat" cmpd="sng" algn="ctr">
+                      <a:solidFill>
+                        <a:srgbClr val="EEEEEE"/>
+                      </a:solidFill>
+                      <a:prstDash val="solid"/>
+                      <a:round/>
+                      <a:headEnd type="none" w="med" len="med"/>
+                      <a:tailEnd type="none" w="med" len="med"/>
+                    </a:lnB>
+                  </a:tcPr>
+                </a:tc>
+                <a:tc>
+                  <a:txBody>
+                    <a:bodyPr/>
+                    <a:lstStyle/>
+                    <a:p>
+                      <a:pPr algn="ctr" indent="0" marL="0">
+                        <a:buNone/>
+                      </a:pPr>
+                      <a:r>
+                        <a:rPr lang="en-US" sz="500" dirty="0">
+                          <a:solidFill>
+                            <a:srgbClr val="777777"/>
+                          </a:solidFill>
+                          <a:latin typeface="Calibri" pitchFamily="34" charset="0"/>
+                          <a:ea typeface="Calibri" pitchFamily="34" charset="-122"/>
+                          <a:cs typeface="Calibri" pitchFamily="34" charset="-120"/>
+                        </a:rPr>
+                        <a:t>0.43%</a:t>
+                      </a:r>
+                      <a:endParaRPr lang="en-US" sz="500" dirty="0">
+                        <a:latin typeface="Calibri" charset="0"/>
+                        <a:ea typeface="Calibri" charset="0"/>
+                        <a:cs typeface="Calibri" charset="0"/>
+                      </a:endParaRPr>
+                    </a:p>
+                  </a:txBody>
+                  <a:tcPr marL="91440" marR="91440" marT="45720" marB="45720">
+                    <a:lnL w="2540" cap="flat" cmpd="sng" algn="ctr">
+                      <a:solidFill>
+                        <a:srgbClr val="EEEEEE"/>
+                      </a:solidFill>
+                      <a:prstDash val="solid"/>
+                      <a:round/>
+                      <a:headEnd type="none" w="med" len="med"/>
+                      <a:tailEnd type="none" w="med" len="med"/>
+                    </a:lnL>
+                    <a:lnR w="2540" cap="flat" cmpd="sng" algn="ctr">
+                      <a:solidFill>
+                        <a:srgbClr val="EEEEEE"/>
+                      </a:solidFill>
+                      <a:prstDash val="solid"/>
+                      <a:round/>
+                      <a:headEnd type="none" w="med" len="med"/>
+                      <a:tailEnd type="none" w="med" len="med"/>
+                    </a:lnR>
+                    <a:lnT w="2540" cap="flat" cmpd="sng" algn="ctr">
+                      <a:solidFill>
+                        <a:srgbClr val="EEEEEE"/>
+                      </a:solidFill>
+                      <a:prstDash val="solid"/>
+                      <a:round/>
+                      <a:headEnd type="none" w="med" len="med"/>
+                      <a:tailEnd type="none" w="med" len="med"/>
+                    </a:lnT>
+                    <a:lnB w="2540" cap="flat" cmpd="sng" algn="ctr">
+                      <a:solidFill>
+                        <a:srgbClr val="EEEEEE"/>
+                      </a:solidFill>
+                      <a:prstDash val="solid"/>
+                      <a:round/>
+                      <a:headEnd type="none" w="med" len="med"/>
+                      <a:tailEnd type="none" w="med" len="med"/>
+                    </a:lnB>
+                  </a:tcPr>
+                </a:tc>
+                <a:tc>
+                  <a:txBody>
+                    <a:bodyPr/>
+                    <a:lstStyle/>
+                    <a:p>
+                      <a:pPr algn="ctr" indent="0" marL="0">
+                        <a:buNone/>
+                      </a:pPr>
+                      <a:r>
+                        <a:rPr lang="en-US" sz="500" dirty="0">
+                          <a:solidFill>
+                            <a:srgbClr val="777777"/>
+                          </a:solidFill>
+                          <a:latin typeface="Calibri" pitchFamily="34" charset="0"/>
+                          <a:ea typeface="Calibri" pitchFamily="34" charset="-122"/>
+                          <a:cs typeface="Calibri" pitchFamily="34" charset="-120"/>
+                        </a:rPr>
+                        <a:t>0.38%</a:t>
+                      </a:r>
+                      <a:endParaRPr lang="en-US" sz="500" dirty="0">
+                        <a:latin typeface="Calibri" charset="0"/>
+                        <a:ea typeface="Calibri" charset="0"/>
+                        <a:cs typeface="Calibri" charset="0"/>
+                      </a:endParaRPr>
+                    </a:p>
+                  </a:txBody>
+                  <a:tcPr marL="91440" marR="91440" marT="45720" marB="45720">
+                    <a:lnL w="2540" cap="flat" cmpd="sng" algn="ctr">
+                      <a:solidFill>
+                        <a:srgbClr val="EEEEEE"/>
+                      </a:solidFill>
+                      <a:prstDash val="solid"/>
+                      <a:round/>
+                      <a:headEnd type="none" w="med" len="med"/>
+                      <a:tailEnd type="none" w="med" len="med"/>
+                    </a:lnL>
+                    <a:lnR w="2540" cap="flat" cmpd="sng" algn="ctr">
+                      <a:solidFill>
+                        <a:srgbClr val="EEEEEE"/>
+                      </a:solidFill>
+                      <a:prstDash val="solid"/>
+                      <a:round/>
+                      <a:headEnd type="none" w="med" len="med"/>
+                      <a:tailEnd type="none" w="med" len="med"/>
+                    </a:lnR>
+                    <a:lnT w="2540" cap="flat" cmpd="sng" algn="ctr">
+                      <a:solidFill>
+                        <a:srgbClr val="EEEEEE"/>
+                      </a:solidFill>
+                      <a:prstDash val="solid"/>
+                      <a:round/>
+                      <a:headEnd type="none" w="med" len="med"/>
+                      <a:tailEnd type="none" w="med" len="med"/>
+                    </a:lnT>
+                    <a:lnB w="2540" cap="flat" cmpd="sng" algn="ctr">
+                      <a:solidFill>
+                        <a:srgbClr val="EEEEEE"/>
+                      </a:solidFill>
+                      <a:prstDash val="solid"/>
+                      <a:round/>
+                      <a:headEnd type="none" w="med" len="med"/>
+                      <a:tailEnd type="none" w="med" len="med"/>
+                    </a:lnB>
+                  </a:tcPr>
+                </a:tc>
+                <a:tc>
+                  <a:txBody>
+                    <a:bodyPr/>
+                    <a:lstStyle/>
+                    <a:p>
+                      <a:pPr algn="ctr" indent="0" marL="0">
+                        <a:buNone/>
+                      </a:pPr>
+                      <a:r>
+                        <a:rPr lang="en-US" sz="500" dirty="0">
+                          <a:solidFill>
+                            <a:srgbClr val="777777"/>
+                          </a:solidFill>
+                          <a:latin typeface="Calibri" pitchFamily="34" charset="0"/>
+                          <a:ea typeface="Calibri" pitchFamily="34" charset="-122"/>
+                          <a:cs typeface="Calibri" pitchFamily="34" charset="-120"/>
+                        </a:rPr>
                         <a:t>0.42%</a:t>
                       </a:r>
                       <a:endParaRPr lang="en-US" sz="500" dirty="0">
@@ -20820,7 +22289,7 @@
                           <a:ea typeface="Calibri" pitchFamily="34" charset="-122"/>
                           <a:cs typeface="Calibri" pitchFamily="34" charset="-120"/>
                         </a:rPr>
-                        <a:t>0.42%</a:t>
+                        <a:t>0.40%</a:t>
                       </a:r>
                       <a:endParaRPr lang="en-US" sz="500" dirty="0">
                         <a:latin typeface="Calibri" charset="0"/>
@@ -20885,7 +22354,7 @@
                           <a:ea typeface="Calibri" pitchFamily="34" charset="-122"/>
                           <a:cs typeface="Calibri" pitchFamily="34" charset="-120"/>
                         </a:rPr>
-                        <a:t>0.42%</a:t>
+                        <a:t>0.38%</a:t>
                       </a:r>
                       <a:endParaRPr lang="en-US" sz="500" dirty="0">
                         <a:latin typeface="Calibri" charset="0"/>
@@ -20950,64 +22419,64 @@
                           <a:ea typeface="Calibri" pitchFamily="34" charset="-122"/>
                           <a:cs typeface="Calibri" pitchFamily="34" charset="-120"/>
                         </a:rPr>
-                        <a:t>0.42%</a:t>
-                      </a:r>
-                      <a:endParaRPr lang="en-US" sz="500" dirty="0">
-                        <a:latin typeface="Calibri" charset="0"/>
-                        <a:ea typeface="Calibri" charset="0"/>
-                        <a:cs typeface="Calibri" charset="0"/>
-                      </a:endParaRPr>
-                    </a:p>
-                  </a:txBody>
-                  <a:tcPr marL="91440" marR="91440" marT="45720" marB="45720">
-                    <a:lnL w="2540" cap="flat" cmpd="sng" algn="ctr">
-                      <a:solidFill>
-                        <a:srgbClr val="EEEEEE"/>
-                      </a:solidFill>
-                      <a:prstDash val="solid"/>
-                      <a:round/>
-                      <a:headEnd type="none" w="med" len="med"/>
-                      <a:tailEnd type="none" w="med" len="med"/>
-                    </a:lnL>
-                    <a:lnR w="2540" cap="flat" cmpd="sng" algn="ctr">
-                      <a:solidFill>
-                        <a:srgbClr val="EEEEEE"/>
-                      </a:solidFill>
-                      <a:prstDash val="solid"/>
-                      <a:round/>
-                      <a:headEnd type="none" w="med" len="med"/>
-                      <a:tailEnd type="none" w="med" len="med"/>
-                    </a:lnR>
-                    <a:lnT w="2540" cap="flat" cmpd="sng" algn="ctr">
-                      <a:solidFill>
-                        <a:srgbClr val="EEEEEE"/>
-                      </a:solidFill>
-                      <a:prstDash val="solid"/>
-                      <a:round/>
-                      <a:headEnd type="none" w="med" len="med"/>
-                      <a:tailEnd type="none" w="med" len="med"/>
-                    </a:lnT>
-                    <a:lnB w="2540" cap="flat" cmpd="sng" algn="ctr">
-                      <a:solidFill>
-                        <a:srgbClr val="EEEEEE"/>
-                      </a:solidFill>
-                      <a:prstDash val="solid"/>
-                      <a:round/>
-                      <a:headEnd type="none" w="med" len="med"/>
-                      <a:tailEnd type="none" w="med" len="med"/>
-                    </a:lnB>
-                  </a:tcPr>
-                </a:tc>
-                <a:tc>
-                  <a:txBody>
-                    <a:bodyPr/>
-                    <a:lstStyle/>
-                    <a:p>
-                      <a:pPr algn="ctr" indent="0" marL="0">
-                        <a:buNone/>
-                      </a:pPr>
-                      <a:r>
-                        <a:rPr lang="en-US" sz="500" dirty="0">
+                        <a:t>0.41%</a:t>
+                      </a:r>
+                      <a:endParaRPr lang="en-US" sz="500" dirty="0">
+                        <a:latin typeface="Calibri" charset="0"/>
+                        <a:ea typeface="Calibri" charset="0"/>
+                        <a:cs typeface="Calibri" charset="0"/>
+                      </a:endParaRPr>
+                    </a:p>
+                  </a:txBody>
+                  <a:tcPr marL="91440" marR="91440" marT="45720" marB="45720">
+                    <a:lnL w="2540" cap="flat" cmpd="sng" algn="ctr">
+                      <a:solidFill>
+                        <a:srgbClr val="EEEEEE"/>
+                      </a:solidFill>
+                      <a:prstDash val="solid"/>
+                      <a:round/>
+                      <a:headEnd type="none" w="med" len="med"/>
+                      <a:tailEnd type="none" w="med" len="med"/>
+                    </a:lnL>
+                    <a:lnR w="2540" cap="flat" cmpd="sng" algn="ctr">
+                      <a:solidFill>
+                        <a:srgbClr val="EEEEEE"/>
+                      </a:solidFill>
+                      <a:prstDash val="solid"/>
+                      <a:round/>
+                      <a:headEnd type="none" w="med" len="med"/>
+                      <a:tailEnd type="none" w="med" len="med"/>
+                    </a:lnR>
+                    <a:lnT w="2540" cap="flat" cmpd="sng" algn="ctr">
+                      <a:solidFill>
+                        <a:srgbClr val="EEEEEE"/>
+                      </a:solidFill>
+                      <a:prstDash val="solid"/>
+                      <a:round/>
+                      <a:headEnd type="none" w="med" len="med"/>
+                      <a:tailEnd type="none" w="med" len="med"/>
+                    </a:lnT>
+                    <a:lnB w="2540" cap="flat" cmpd="sng" algn="ctr">
+                      <a:solidFill>
+                        <a:srgbClr val="EEEEEE"/>
+                      </a:solidFill>
+                      <a:prstDash val="solid"/>
+                      <a:round/>
+                      <a:headEnd type="none" w="med" len="med"/>
+                      <a:tailEnd type="none" w="med" len="med"/>
+                    </a:lnB>
+                  </a:tcPr>
+                </a:tc>
+                <a:tc>
+                  <a:txBody>
+                    <a:bodyPr/>
+                    <a:lstStyle/>
+                    <a:p>
+                      <a:pPr algn="ctr" indent="0" marL="0">
+                        <a:buNone/>
+                      </a:pPr>
+                      <a:r>
+                        <a:rPr lang="en-US" sz="500" b="1" dirty="0">
                           <a:solidFill>
                             <a:srgbClr val="777777"/>
                           </a:solidFill>
@@ -21015,397 +22484,7 @@
                           <a:ea typeface="Calibri" pitchFamily="34" charset="-122"/>
                           <a:cs typeface="Calibri" pitchFamily="34" charset="-120"/>
                         </a:rPr>
-                        <a:t>0.41%</a:t>
-                      </a:r>
-                      <a:endParaRPr lang="en-US" sz="500" dirty="0">
-                        <a:latin typeface="Calibri" charset="0"/>
-                        <a:ea typeface="Calibri" charset="0"/>
-                        <a:cs typeface="Calibri" charset="0"/>
-                      </a:endParaRPr>
-                    </a:p>
-                  </a:txBody>
-                  <a:tcPr marL="91440" marR="91440" marT="45720" marB="45720">
-                    <a:lnL w="2540" cap="flat" cmpd="sng" algn="ctr">
-                      <a:solidFill>
-                        <a:srgbClr val="EEEEEE"/>
-                      </a:solidFill>
-                      <a:prstDash val="solid"/>
-                      <a:round/>
-                      <a:headEnd type="none" w="med" len="med"/>
-                      <a:tailEnd type="none" w="med" len="med"/>
-                    </a:lnL>
-                    <a:lnR w="2540" cap="flat" cmpd="sng" algn="ctr">
-                      <a:solidFill>
-                        <a:srgbClr val="EEEEEE"/>
-                      </a:solidFill>
-                      <a:prstDash val="solid"/>
-                      <a:round/>
-                      <a:headEnd type="none" w="med" len="med"/>
-                      <a:tailEnd type="none" w="med" len="med"/>
-                    </a:lnR>
-                    <a:lnT w="2540" cap="flat" cmpd="sng" algn="ctr">
-                      <a:solidFill>
-                        <a:srgbClr val="EEEEEE"/>
-                      </a:solidFill>
-                      <a:prstDash val="solid"/>
-                      <a:round/>
-                      <a:headEnd type="none" w="med" len="med"/>
-                      <a:tailEnd type="none" w="med" len="med"/>
-                    </a:lnT>
-                    <a:lnB w="2540" cap="flat" cmpd="sng" algn="ctr">
-                      <a:solidFill>
-                        <a:srgbClr val="EEEEEE"/>
-                      </a:solidFill>
-                      <a:prstDash val="solid"/>
-                      <a:round/>
-                      <a:headEnd type="none" w="med" len="med"/>
-                      <a:tailEnd type="none" w="med" len="med"/>
-                    </a:lnB>
-                  </a:tcPr>
-                </a:tc>
-                <a:tc>
-                  <a:txBody>
-                    <a:bodyPr/>
-                    <a:lstStyle/>
-                    <a:p>
-                      <a:pPr algn="ctr" indent="0" marL="0">
-                        <a:buNone/>
-                      </a:pPr>
-                      <a:r>
-                        <a:rPr lang="en-US" sz="500" dirty="0">
-                          <a:solidFill>
-                            <a:srgbClr val="777777"/>
-                          </a:solidFill>
-                          <a:latin typeface="Calibri" pitchFamily="34" charset="0"/>
-                          <a:ea typeface="Calibri" pitchFamily="34" charset="-122"/>
-                          <a:cs typeface="Calibri" pitchFamily="34" charset="-120"/>
-                        </a:rPr>
-                        <a:t>0.40%</a:t>
-                      </a:r>
-                      <a:endParaRPr lang="en-US" sz="500" dirty="0">
-                        <a:latin typeface="Calibri" charset="0"/>
-                        <a:ea typeface="Calibri" charset="0"/>
-                        <a:cs typeface="Calibri" charset="0"/>
-                      </a:endParaRPr>
-                    </a:p>
-                  </a:txBody>
-                  <a:tcPr marL="91440" marR="91440" marT="45720" marB="45720">
-                    <a:lnL w="2540" cap="flat" cmpd="sng" algn="ctr">
-                      <a:solidFill>
-                        <a:srgbClr val="EEEEEE"/>
-                      </a:solidFill>
-                      <a:prstDash val="solid"/>
-                      <a:round/>
-                      <a:headEnd type="none" w="med" len="med"/>
-                      <a:tailEnd type="none" w="med" len="med"/>
-                    </a:lnL>
-                    <a:lnR w="2540" cap="flat" cmpd="sng" algn="ctr">
-                      <a:solidFill>
-                        <a:srgbClr val="EEEEEE"/>
-                      </a:solidFill>
-                      <a:prstDash val="solid"/>
-                      <a:round/>
-                      <a:headEnd type="none" w="med" len="med"/>
-                      <a:tailEnd type="none" w="med" len="med"/>
-                    </a:lnR>
-                    <a:lnT w="2540" cap="flat" cmpd="sng" algn="ctr">
-                      <a:solidFill>
-                        <a:srgbClr val="EEEEEE"/>
-                      </a:solidFill>
-                      <a:prstDash val="solid"/>
-                      <a:round/>
-                      <a:headEnd type="none" w="med" len="med"/>
-                      <a:tailEnd type="none" w="med" len="med"/>
-                    </a:lnT>
-                    <a:lnB w="2540" cap="flat" cmpd="sng" algn="ctr">
-                      <a:solidFill>
-                        <a:srgbClr val="EEEEEE"/>
-                      </a:solidFill>
-                      <a:prstDash val="solid"/>
-                      <a:round/>
-                      <a:headEnd type="none" w="med" len="med"/>
-                      <a:tailEnd type="none" w="med" len="med"/>
-                    </a:lnB>
-                  </a:tcPr>
-                </a:tc>
-                <a:tc>
-                  <a:txBody>
-                    <a:bodyPr/>
-                    <a:lstStyle/>
-                    <a:p>
-                      <a:pPr algn="ctr" indent="0" marL="0">
-                        <a:buNone/>
-                      </a:pPr>
-                      <a:r>
-                        <a:rPr lang="en-US" sz="500" dirty="0">
-                          <a:solidFill>
-                            <a:srgbClr val="777777"/>
-                          </a:solidFill>
-                          <a:latin typeface="Calibri" pitchFamily="34" charset="0"/>
-                          <a:ea typeface="Calibri" pitchFamily="34" charset="-122"/>
-                          <a:cs typeface="Calibri" pitchFamily="34" charset="-120"/>
-                        </a:rPr>
-                        <a:t>0.40%</a:t>
-                      </a:r>
-                      <a:endParaRPr lang="en-US" sz="500" dirty="0">
-                        <a:latin typeface="Calibri" charset="0"/>
-                        <a:ea typeface="Calibri" charset="0"/>
-                        <a:cs typeface="Calibri" charset="0"/>
-                      </a:endParaRPr>
-                    </a:p>
-                  </a:txBody>
-                  <a:tcPr marL="91440" marR="91440" marT="45720" marB="45720">
-                    <a:lnL w="2540" cap="flat" cmpd="sng" algn="ctr">
-                      <a:solidFill>
-                        <a:srgbClr val="EEEEEE"/>
-                      </a:solidFill>
-                      <a:prstDash val="solid"/>
-                      <a:round/>
-                      <a:headEnd type="none" w="med" len="med"/>
-                      <a:tailEnd type="none" w="med" len="med"/>
-                    </a:lnL>
-                    <a:lnR w="2540" cap="flat" cmpd="sng" algn="ctr">
-                      <a:solidFill>
-                        <a:srgbClr val="EEEEEE"/>
-                      </a:solidFill>
-                      <a:prstDash val="solid"/>
-                      <a:round/>
-                      <a:headEnd type="none" w="med" len="med"/>
-                      <a:tailEnd type="none" w="med" len="med"/>
-                    </a:lnR>
-                    <a:lnT w="2540" cap="flat" cmpd="sng" algn="ctr">
-                      <a:solidFill>
-                        <a:srgbClr val="EEEEEE"/>
-                      </a:solidFill>
-                      <a:prstDash val="solid"/>
-                      <a:round/>
-                      <a:headEnd type="none" w="med" len="med"/>
-                      <a:tailEnd type="none" w="med" len="med"/>
-                    </a:lnT>
-                    <a:lnB w="2540" cap="flat" cmpd="sng" algn="ctr">
-                      <a:solidFill>
-                        <a:srgbClr val="EEEEEE"/>
-                      </a:solidFill>
-                      <a:prstDash val="solid"/>
-                      <a:round/>
-                      <a:headEnd type="none" w="med" len="med"/>
-                      <a:tailEnd type="none" w="med" len="med"/>
-                    </a:lnB>
-                  </a:tcPr>
-                </a:tc>
-                <a:tc>
-                  <a:txBody>
-                    <a:bodyPr/>
-                    <a:lstStyle/>
-                    <a:p>
-                      <a:pPr algn="ctr" indent="0" marL="0">
-                        <a:buNone/>
-                      </a:pPr>
-                      <a:r>
-                        <a:rPr lang="en-US" sz="500" dirty="0">
-                          <a:solidFill>
-                            <a:srgbClr val="777777"/>
-                          </a:solidFill>
-                          <a:latin typeface="Calibri" pitchFamily="34" charset="0"/>
-                          <a:ea typeface="Calibri" pitchFamily="34" charset="-122"/>
-                          <a:cs typeface="Calibri" pitchFamily="34" charset="-120"/>
-                        </a:rPr>
-                        <a:t>0.40%</a:t>
-                      </a:r>
-                      <a:endParaRPr lang="en-US" sz="500" dirty="0">
-                        <a:latin typeface="Calibri" charset="0"/>
-                        <a:ea typeface="Calibri" charset="0"/>
-                        <a:cs typeface="Calibri" charset="0"/>
-                      </a:endParaRPr>
-                    </a:p>
-                  </a:txBody>
-                  <a:tcPr marL="91440" marR="91440" marT="45720" marB="45720">
-                    <a:lnL w="2540" cap="flat" cmpd="sng" algn="ctr">
-                      <a:solidFill>
-                        <a:srgbClr val="EEEEEE"/>
-                      </a:solidFill>
-                      <a:prstDash val="solid"/>
-                      <a:round/>
-                      <a:headEnd type="none" w="med" len="med"/>
-                      <a:tailEnd type="none" w="med" len="med"/>
-                    </a:lnL>
-                    <a:lnR w="2540" cap="flat" cmpd="sng" algn="ctr">
-                      <a:solidFill>
-                        <a:srgbClr val="EEEEEE"/>
-                      </a:solidFill>
-                      <a:prstDash val="solid"/>
-                      <a:round/>
-                      <a:headEnd type="none" w="med" len="med"/>
-                      <a:tailEnd type="none" w="med" len="med"/>
-                    </a:lnR>
-                    <a:lnT w="2540" cap="flat" cmpd="sng" algn="ctr">
-                      <a:solidFill>
-                        <a:srgbClr val="EEEEEE"/>
-                      </a:solidFill>
-                      <a:prstDash val="solid"/>
-                      <a:round/>
-                      <a:headEnd type="none" w="med" len="med"/>
-                      <a:tailEnd type="none" w="med" len="med"/>
-                    </a:lnT>
-                    <a:lnB w="2540" cap="flat" cmpd="sng" algn="ctr">
-                      <a:solidFill>
-                        <a:srgbClr val="EEEEEE"/>
-                      </a:solidFill>
-                      <a:prstDash val="solid"/>
-                      <a:round/>
-                      <a:headEnd type="none" w="med" len="med"/>
-                      <a:tailEnd type="none" w="med" len="med"/>
-                    </a:lnB>
-                  </a:tcPr>
-                </a:tc>
-                <a:tc>
-                  <a:txBody>
-                    <a:bodyPr/>
-                    <a:lstStyle/>
-                    <a:p>
-                      <a:pPr algn="ctr" indent="0" marL="0">
-                        <a:buNone/>
-                      </a:pPr>
-                      <a:r>
-                        <a:rPr lang="en-US" sz="500" dirty="0">
-                          <a:solidFill>
-                            <a:srgbClr val="777777"/>
-                          </a:solidFill>
-                          <a:latin typeface="Calibri" pitchFamily="34" charset="0"/>
-                          <a:ea typeface="Calibri" pitchFamily="34" charset="-122"/>
-                          <a:cs typeface="Calibri" pitchFamily="34" charset="-120"/>
-                        </a:rPr>
-                        <a:t>0.40%</a:t>
-                      </a:r>
-                      <a:endParaRPr lang="en-US" sz="500" dirty="0">
-                        <a:latin typeface="Calibri" charset="0"/>
-                        <a:ea typeface="Calibri" charset="0"/>
-                        <a:cs typeface="Calibri" charset="0"/>
-                      </a:endParaRPr>
-                    </a:p>
-                  </a:txBody>
-                  <a:tcPr marL="91440" marR="91440" marT="45720" marB="45720">
-                    <a:lnL w="2540" cap="flat" cmpd="sng" algn="ctr">
-                      <a:solidFill>
-                        <a:srgbClr val="EEEEEE"/>
-                      </a:solidFill>
-                      <a:prstDash val="solid"/>
-                      <a:round/>
-                      <a:headEnd type="none" w="med" len="med"/>
-                      <a:tailEnd type="none" w="med" len="med"/>
-                    </a:lnL>
-                    <a:lnR w="2540" cap="flat" cmpd="sng" algn="ctr">
-                      <a:solidFill>
-                        <a:srgbClr val="EEEEEE"/>
-                      </a:solidFill>
-                      <a:prstDash val="solid"/>
-                      <a:round/>
-                      <a:headEnd type="none" w="med" len="med"/>
-                      <a:tailEnd type="none" w="med" len="med"/>
-                    </a:lnR>
-                    <a:lnT w="2540" cap="flat" cmpd="sng" algn="ctr">
-                      <a:solidFill>
-                        <a:srgbClr val="EEEEEE"/>
-                      </a:solidFill>
-                      <a:prstDash val="solid"/>
-                      <a:round/>
-                      <a:headEnd type="none" w="med" len="med"/>
-                      <a:tailEnd type="none" w="med" len="med"/>
-                    </a:lnT>
-                    <a:lnB w="2540" cap="flat" cmpd="sng" algn="ctr">
-                      <a:solidFill>
-                        <a:srgbClr val="EEEEEE"/>
-                      </a:solidFill>
-                      <a:prstDash val="solid"/>
-                      <a:round/>
-                      <a:headEnd type="none" w="med" len="med"/>
-                      <a:tailEnd type="none" w="med" len="med"/>
-                    </a:lnB>
-                  </a:tcPr>
-                </a:tc>
-                <a:tc>
-                  <a:txBody>
-                    <a:bodyPr/>
-                    <a:lstStyle/>
-                    <a:p>
-                      <a:pPr algn="ctr" indent="0" marL="0">
-                        <a:buNone/>
-                      </a:pPr>
-                      <a:r>
-                        <a:rPr lang="en-US" sz="500" dirty="0">
-                          <a:solidFill>
-                            <a:srgbClr val="777777"/>
-                          </a:solidFill>
-                          <a:latin typeface="Calibri" pitchFamily="34" charset="0"/>
-                          <a:ea typeface="Calibri" pitchFamily="34" charset="-122"/>
-                          <a:cs typeface="Calibri" pitchFamily="34" charset="-120"/>
-                        </a:rPr>
-                        <a:t>0.39%</a:t>
-                      </a:r>
-                      <a:endParaRPr lang="en-US" sz="500" dirty="0">
-                        <a:latin typeface="Calibri" charset="0"/>
-                        <a:ea typeface="Calibri" charset="0"/>
-                        <a:cs typeface="Calibri" charset="0"/>
-                      </a:endParaRPr>
-                    </a:p>
-                  </a:txBody>
-                  <a:tcPr marL="91440" marR="91440" marT="45720" marB="45720">
-                    <a:lnL w="2540" cap="flat" cmpd="sng" algn="ctr">
-                      <a:solidFill>
-                        <a:srgbClr val="EEEEEE"/>
-                      </a:solidFill>
-                      <a:prstDash val="solid"/>
-                      <a:round/>
-                      <a:headEnd type="none" w="med" len="med"/>
-                      <a:tailEnd type="none" w="med" len="med"/>
-                    </a:lnL>
-                    <a:lnR w="2540" cap="flat" cmpd="sng" algn="ctr">
-                      <a:solidFill>
-                        <a:srgbClr val="EEEEEE"/>
-                      </a:solidFill>
-                      <a:prstDash val="solid"/>
-                      <a:round/>
-                      <a:headEnd type="none" w="med" len="med"/>
-                      <a:tailEnd type="none" w="med" len="med"/>
-                    </a:lnR>
-                    <a:lnT w="2540" cap="flat" cmpd="sng" algn="ctr">
-                      <a:solidFill>
-                        <a:srgbClr val="EEEEEE"/>
-                      </a:solidFill>
-                      <a:prstDash val="solid"/>
-                      <a:round/>
-                      <a:headEnd type="none" w="med" len="med"/>
-                      <a:tailEnd type="none" w="med" len="med"/>
-                    </a:lnT>
-                    <a:lnB w="2540" cap="flat" cmpd="sng" algn="ctr">
-                      <a:solidFill>
-                        <a:srgbClr val="EEEEEE"/>
-                      </a:solidFill>
-                      <a:prstDash val="solid"/>
-                      <a:round/>
-                      <a:headEnd type="none" w="med" len="med"/>
-                      <a:tailEnd type="none" w="med" len="med"/>
-                    </a:lnB>
-                  </a:tcPr>
-                </a:tc>
-                <a:tc>
-                  <a:txBody>
-                    <a:bodyPr/>
-                    <a:lstStyle/>
-                    <a:p>
-                      <a:pPr algn="ctr" indent="0" marL="0">
-                        <a:buNone/>
-                      </a:pPr>
-                      <a:r>
-                        <a:rPr lang="en-US" sz="500" b="1" dirty="0">
-                          <a:solidFill>
-                            <a:srgbClr val="777777"/>
-                          </a:solidFill>
-                          <a:latin typeface="Calibri" pitchFamily="34" charset="0"/>
-                          <a:ea typeface="Calibri" pitchFamily="34" charset="-122"/>
-                          <a:cs typeface="Calibri" pitchFamily="34" charset="-120"/>
-                        </a:rPr>
-                        <a:t>4.99%</a:t>
+                        <a:t>4.61%</a:t>
                       </a:r>
                       <a:endParaRPr lang="en-US" sz="500" dirty="0">
                         <a:latin typeface="Calibri" charset="0"/>
@@ -21591,7 +22670,7 @@
                           <a:ea typeface="Calibri" pitchFamily="34" charset="-122"/>
                           <a:cs typeface="Calibri" pitchFamily="34" charset="-120"/>
                         </a:rPr>
-                        <a:t>0.00%</a:t>
+                        <a:t>0.30%</a:t>
                       </a:r>
                       <a:endParaRPr lang="en-US" sz="500" dirty="0">
                         <a:latin typeface="Calibri" charset="0"/>
@@ -22306,7 +23385,7 @@
                           <a:ea typeface="Calibri" pitchFamily="34" charset="-122"/>
                           <a:cs typeface="Calibri" pitchFamily="34" charset="-120"/>
                         </a:rPr>
-                        <a:t>0.56%</a:t>
+                        <a:t>0.28%</a:t>
                       </a:r>
                       <a:endParaRPr lang="en-US" sz="500" dirty="0">
                         <a:latin typeface="Calibri" charset="0"/>
@@ -22371,7 +23450,7 @@
                           <a:ea typeface="Calibri" pitchFamily="34" charset="-122"/>
                           <a:cs typeface="Calibri" pitchFamily="34" charset="-120"/>
                         </a:rPr>
-                        <a:t>3.54%</a:t>
+                        <a:t>2.96%</a:t>
                       </a:r>
                       <a:endParaRPr lang="en-US" sz="500" dirty="0">
                         <a:latin typeface="Calibri" charset="0"/>
@@ -23012,6 +24091,136 @@
                           <a:ea typeface="Calibri" pitchFamily="34" charset="-122"/>
                           <a:cs typeface="Calibri" pitchFamily="34" charset="-120"/>
                         </a:rPr>
+                        <a:t>0.58%</a:t>
+                      </a:r>
+                      <a:endParaRPr lang="en-US" sz="500" dirty="0">
+                        <a:latin typeface="Calibri" charset="0"/>
+                        <a:ea typeface="Calibri" charset="0"/>
+                        <a:cs typeface="Calibri" charset="0"/>
+                      </a:endParaRPr>
+                    </a:p>
+                  </a:txBody>
+                  <a:tcPr marL="91440" marR="91440" marT="45720" marB="45720">
+                    <a:lnL w="2540" cap="flat" cmpd="sng" algn="ctr">
+                      <a:solidFill>
+                        <a:srgbClr val="EEEEEE"/>
+                      </a:solidFill>
+                      <a:prstDash val="solid"/>
+                      <a:round/>
+                      <a:headEnd type="none" w="med" len="med"/>
+                      <a:tailEnd type="none" w="med" len="med"/>
+                    </a:lnL>
+                    <a:lnR w="2540" cap="flat" cmpd="sng" algn="ctr">
+                      <a:solidFill>
+                        <a:srgbClr val="EEEEEE"/>
+                      </a:solidFill>
+                      <a:prstDash val="solid"/>
+                      <a:round/>
+                      <a:headEnd type="none" w="med" len="med"/>
+                      <a:tailEnd type="none" w="med" len="med"/>
+                    </a:lnR>
+                    <a:lnT w="2540" cap="flat" cmpd="sng" algn="ctr">
+                      <a:solidFill>
+                        <a:srgbClr val="EEEEEE"/>
+                      </a:solidFill>
+                      <a:prstDash val="solid"/>
+                      <a:round/>
+                      <a:headEnd type="none" w="med" len="med"/>
+                      <a:tailEnd type="none" w="med" len="med"/>
+                    </a:lnT>
+                    <a:lnB w="2540" cap="flat" cmpd="sng" algn="ctr">
+                      <a:solidFill>
+                        <a:srgbClr val="EEEEEE"/>
+                      </a:solidFill>
+                      <a:prstDash val="solid"/>
+                      <a:round/>
+                      <a:headEnd type="none" w="med" len="med"/>
+                      <a:tailEnd type="none" w="med" len="med"/>
+                    </a:lnB>
+                  </a:tcPr>
+                </a:tc>
+                <a:tc>
+                  <a:txBody>
+                    <a:bodyPr/>
+                    <a:lstStyle/>
+                    <a:p>
+                      <a:pPr algn="ctr" indent="0" marL="0">
+                        <a:buNone/>
+                      </a:pPr>
+                      <a:r>
+                        <a:rPr lang="en-US" sz="500" dirty="0">
+                          <a:solidFill>
+                            <a:srgbClr val="000000"/>
+                          </a:solidFill>
+                          <a:latin typeface="Calibri" pitchFamily="34" charset="0"/>
+                          <a:ea typeface="Calibri" pitchFamily="34" charset="-122"/>
+                          <a:cs typeface="Calibri" pitchFamily="34" charset="-120"/>
+                        </a:rPr>
+                        <a:t>0.54%</a:t>
+                      </a:r>
+                      <a:endParaRPr lang="en-US" sz="500" dirty="0">
+                        <a:latin typeface="Calibri" charset="0"/>
+                        <a:ea typeface="Calibri" charset="0"/>
+                        <a:cs typeface="Calibri" charset="0"/>
+                      </a:endParaRPr>
+                    </a:p>
+                  </a:txBody>
+                  <a:tcPr marL="91440" marR="91440" marT="45720" marB="45720">
+                    <a:lnL w="2540" cap="flat" cmpd="sng" algn="ctr">
+                      <a:solidFill>
+                        <a:srgbClr val="EEEEEE"/>
+                      </a:solidFill>
+                      <a:prstDash val="solid"/>
+                      <a:round/>
+                      <a:headEnd type="none" w="med" len="med"/>
+                      <a:tailEnd type="none" w="med" len="med"/>
+                    </a:lnL>
+                    <a:lnR w="2540" cap="flat" cmpd="sng" algn="ctr">
+                      <a:solidFill>
+                        <a:srgbClr val="EEEEEE"/>
+                      </a:solidFill>
+                      <a:prstDash val="solid"/>
+                      <a:round/>
+                      <a:headEnd type="none" w="med" len="med"/>
+                      <a:tailEnd type="none" w="med" len="med"/>
+                    </a:lnR>
+                    <a:lnT w="2540" cap="flat" cmpd="sng" algn="ctr">
+                      <a:solidFill>
+                        <a:srgbClr val="EEEEEE"/>
+                      </a:solidFill>
+                      <a:prstDash val="solid"/>
+                      <a:round/>
+                      <a:headEnd type="none" w="med" len="med"/>
+                      <a:tailEnd type="none" w="med" len="med"/>
+                    </a:lnT>
+                    <a:lnB w="2540" cap="flat" cmpd="sng" algn="ctr">
+                      <a:solidFill>
+                        <a:srgbClr val="EEEEEE"/>
+                      </a:solidFill>
+                      <a:prstDash val="solid"/>
+                      <a:round/>
+                      <a:headEnd type="none" w="med" len="med"/>
+                      <a:tailEnd type="none" w="med" len="med"/>
+                    </a:lnB>
+                  </a:tcPr>
+                </a:tc>
+                <a:tc>
+                  <a:txBody>
+                    <a:bodyPr/>
+                    <a:lstStyle/>
+                    <a:p>
+                      <a:pPr algn="ctr" indent="0" marL="0">
+                        <a:buNone/>
+                      </a:pPr>
+                      <a:r>
+                        <a:rPr lang="en-US" sz="500" dirty="0">
+                          <a:solidFill>
+                            <a:srgbClr val="000000"/>
+                          </a:solidFill>
+                          <a:latin typeface="Calibri" pitchFamily="34" charset="0"/>
+                          <a:ea typeface="Calibri" pitchFamily="34" charset="-122"/>
+                          <a:cs typeface="Calibri" pitchFamily="34" charset="-120"/>
+                        </a:rPr>
                         <a:t>0.56%</a:t>
                       </a:r>
                       <a:endParaRPr lang="en-US" sz="500" dirty="0">
@@ -23077,7 +24286,7 @@
                           <a:ea typeface="Calibri" pitchFamily="34" charset="-122"/>
                           <a:cs typeface="Calibri" pitchFamily="34" charset="-120"/>
                         </a:rPr>
-                        <a:t>0.51%</a:t>
+                        <a:t>0.55%</a:t>
                       </a:r>
                       <a:endParaRPr lang="en-US" sz="500" dirty="0">
                         <a:latin typeface="Calibri" charset="0"/>
@@ -23142,64 +24351,64 @@
                           <a:ea typeface="Calibri" pitchFamily="34" charset="-122"/>
                           <a:cs typeface="Calibri" pitchFamily="34" charset="-120"/>
                         </a:rPr>
-                        <a:t>0.53%</a:t>
-                      </a:r>
-                      <a:endParaRPr lang="en-US" sz="500" dirty="0">
-                        <a:latin typeface="Calibri" charset="0"/>
-                        <a:ea typeface="Calibri" charset="0"/>
-                        <a:cs typeface="Calibri" charset="0"/>
-                      </a:endParaRPr>
-                    </a:p>
-                  </a:txBody>
-                  <a:tcPr marL="91440" marR="91440" marT="45720" marB="45720">
-                    <a:lnL w="2540" cap="flat" cmpd="sng" algn="ctr">
-                      <a:solidFill>
-                        <a:srgbClr val="EEEEEE"/>
-                      </a:solidFill>
-                      <a:prstDash val="solid"/>
-                      <a:round/>
-                      <a:headEnd type="none" w="med" len="med"/>
-                      <a:tailEnd type="none" w="med" len="med"/>
-                    </a:lnL>
-                    <a:lnR w="2540" cap="flat" cmpd="sng" algn="ctr">
-                      <a:solidFill>
-                        <a:srgbClr val="EEEEEE"/>
-                      </a:solidFill>
-                      <a:prstDash val="solid"/>
-                      <a:round/>
-                      <a:headEnd type="none" w="med" len="med"/>
-                      <a:tailEnd type="none" w="med" len="med"/>
-                    </a:lnR>
-                    <a:lnT w="2540" cap="flat" cmpd="sng" algn="ctr">
-                      <a:solidFill>
-                        <a:srgbClr val="EEEEEE"/>
-                      </a:solidFill>
-                      <a:prstDash val="solid"/>
-                      <a:round/>
-                      <a:headEnd type="none" w="med" len="med"/>
-                      <a:tailEnd type="none" w="med" len="med"/>
-                    </a:lnT>
-                    <a:lnB w="2540" cap="flat" cmpd="sng" algn="ctr">
-                      <a:solidFill>
-                        <a:srgbClr val="EEEEEE"/>
-                      </a:solidFill>
-                      <a:prstDash val="solid"/>
-                      <a:round/>
-                      <a:headEnd type="none" w="med" len="med"/>
-                      <a:tailEnd type="none" w="med" len="med"/>
-                    </a:lnB>
-                  </a:tcPr>
-                </a:tc>
-                <a:tc>
-                  <a:txBody>
-                    <a:bodyPr/>
-                    <a:lstStyle/>
-                    <a:p>
-                      <a:pPr algn="ctr" indent="0" marL="0">
-                        <a:buNone/>
-                      </a:pPr>
-                      <a:r>
-                        <a:rPr lang="en-US" sz="500" dirty="0">
+                        <a:t>0.57%</a:t>
+                      </a:r>
+                      <a:endParaRPr lang="en-US" sz="500" dirty="0">
+                        <a:latin typeface="Calibri" charset="0"/>
+                        <a:ea typeface="Calibri" charset="0"/>
+                        <a:cs typeface="Calibri" charset="0"/>
+                      </a:endParaRPr>
+                    </a:p>
+                  </a:txBody>
+                  <a:tcPr marL="91440" marR="91440" marT="45720" marB="45720">
+                    <a:lnL w="2540" cap="flat" cmpd="sng" algn="ctr">
+                      <a:solidFill>
+                        <a:srgbClr val="EEEEEE"/>
+                      </a:solidFill>
+                      <a:prstDash val="solid"/>
+                      <a:round/>
+                      <a:headEnd type="none" w="med" len="med"/>
+                      <a:tailEnd type="none" w="med" len="med"/>
+                    </a:lnL>
+                    <a:lnR w="2540" cap="flat" cmpd="sng" algn="ctr">
+                      <a:solidFill>
+                        <a:srgbClr val="EEEEEE"/>
+                      </a:solidFill>
+                      <a:prstDash val="solid"/>
+                      <a:round/>
+                      <a:headEnd type="none" w="med" len="med"/>
+                      <a:tailEnd type="none" w="med" len="med"/>
+                    </a:lnR>
+                    <a:lnT w="2540" cap="flat" cmpd="sng" algn="ctr">
+                      <a:solidFill>
+                        <a:srgbClr val="EEEEEE"/>
+                      </a:solidFill>
+                      <a:prstDash val="solid"/>
+                      <a:round/>
+                      <a:headEnd type="none" w="med" len="med"/>
+                      <a:tailEnd type="none" w="med" len="med"/>
+                    </a:lnT>
+                    <a:lnB w="2540" cap="flat" cmpd="sng" algn="ctr">
+                      <a:solidFill>
+                        <a:srgbClr val="EEEEEE"/>
+                      </a:solidFill>
+                      <a:prstDash val="solid"/>
+                      <a:round/>
+                      <a:headEnd type="none" w="med" len="med"/>
+                      <a:tailEnd type="none" w="med" len="med"/>
+                    </a:lnB>
+                  </a:tcPr>
+                </a:tc>
+                <a:tc>
+                  <a:txBody>
+                    <a:bodyPr/>
+                    <a:lstStyle/>
+                    <a:p>
+                      <a:pPr algn="ctr" indent="0" marL="0">
+                        <a:buNone/>
+                      </a:pPr>
+                      <a:r>
+                        <a:rPr lang="en-US" sz="500" b="1" dirty="0">
                           <a:solidFill>
                             <a:srgbClr val="000000"/>
                           </a:solidFill>
@@ -23207,137 +24416,7 @@
                           <a:ea typeface="Calibri" pitchFamily="34" charset="-122"/>
                           <a:cs typeface="Calibri" pitchFamily="34" charset="-120"/>
                         </a:rPr>
-                        <a:t>0.53%</a:t>
-                      </a:r>
-                      <a:endParaRPr lang="en-US" sz="500" dirty="0">
-                        <a:latin typeface="Calibri" charset="0"/>
-                        <a:ea typeface="Calibri" charset="0"/>
-                        <a:cs typeface="Calibri" charset="0"/>
-                      </a:endParaRPr>
-                    </a:p>
-                  </a:txBody>
-                  <a:tcPr marL="91440" marR="91440" marT="45720" marB="45720">
-                    <a:lnL w="2540" cap="flat" cmpd="sng" algn="ctr">
-                      <a:solidFill>
-                        <a:srgbClr val="EEEEEE"/>
-                      </a:solidFill>
-                      <a:prstDash val="solid"/>
-                      <a:round/>
-                      <a:headEnd type="none" w="med" len="med"/>
-                      <a:tailEnd type="none" w="med" len="med"/>
-                    </a:lnL>
-                    <a:lnR w="2540" cap="flat" cmpd="sng" algn="ctr">
-                      <a:solidFill>
-                        <a:srgbClr val="EEEEEE"/>
-                      </a:solidFill>
-                      <a:prstDash val="solid"/>
-                      <a:round/>
-                      <a:headEnd type="none" w="med" len="med"/>
-                      <a:tailEnd type="none" w="med" len="med"/>
-                    </a:lnR>
-                    <a:lnT w="2540" cap="flat" cmpd="sng" algn="ctr">
-                      <a:solidFill>
-                        <a:srgbClr val="EEEEEE"/>
-                      </a:solidFill>
-                      <a:prstDash val="solid"/>
-                      <a:round/>
-                      <a:headEnd type="none" w="med" len="med"/>
-                      <a:tailEnd type="none" w="med" len="med"/>
-                    </a:lnT>
-                    <a:lnB w="2540" cap="flat" cmpd="sng" algn="ctr">
-                      <a:solidFill>
-                        <a:srgbClr val="EEEEEE"/>
-                      </a:solidFill>
-                      <a:prstDash val="solid"/>
-                      <a:round/>
-                      <a:headEnd type="none" w="med" len="med"/>
-                      <a:tailEnd type="none" w="med" len="med"/>
-                    </a:lnB>
-                  </a:tcPr>
-                </a:tc>
-                <a:tc>
-                  <a:txBody>
-                    <a:bodyPr/>
-                    <a:lstStyle/>
-                    <a:p>
-                      <a:pPr algn="ctr" indent="0" marL="0">
-                        <a:buNone/>
-                      </a:pPr>
-                      <a:r>
-                        <a:rPr lang="en-US" sz="500" dirty="0">
-                          <a:solidFill>
-                            <a:srgbClr val="000000"/>
-                          </a:solidFill>
-                          <a:latin typeface="Calibri" pitchFamily="34" charset="0"/>
-                          <a:ea typeface="Calibri" pitchFamily="34" charset="-122"/>
-                          <a:cs typeface="Calibri" pitchFamily="34" charset="-120"/>
-                        </a:rPr>
-                        <a:t>0.54%</a:t>
-                      </a:r>
-                      <a:endParaRPr lang="en-US" sz="500" dirty="0">
-                        <a:latin typeface="Calibri" charset="0"/>
-                        <a:ea typeface="Calibri" charset="0"/>
-                        <a:cs typeface="Calibri" charset="0"/>
-                      </a:endParaRPr>
-                    </a:p>
-                  </a:txBody>
-                  <a:tcPr marL="91440" marR="91440" marT="45720" marB="45720">
-                    <a:lnL w="2540" cap="flat" cmpd="sng" algn="ctr">
-                      <a:solidFill>
-                        <a:srgbClr val="EEEEEE"/>
-                      </a:solidFill>
-                      <a:prstDash val="solid"/>
-                      <a:round/>
-                      <a:headEnd type="none" w="med" len="med"/>
-                      <a:tailEnd type="none" w="med" len="med"/>
-                    </a:lnL>
-                    <a:lnR w="2540" cap="flat" cmpd="sng" algn="ctr">
-                      <a:solidFill>
-                        <a:srgbClr val="EEEEEE"/>
-                      </a:solidFill>
-                      <a:prstDash val="solid"/>
-                      <a:round/>
-                      <a:headEnd type="none" w="med" len="med"/>
-                      <a:tailEnd type="none" w="med" len="med"/>
-                    </a:lnR>
-                    <a:lnT w="2540" cap="flat" cmpd="sng" algn="ctr">
-                      <a:solidFill>
-                        <a:srgbClr val="EEEEEE"/>
-                      </a:solidFill>
-                      <a:prstDash val="solid"/>
-                      <a:round/>
-                      <a:headEnd type="none" w="med" len="med"/>
-                      <a:tailEnd type="none" w="med" len="med"/>
-                    </a:lnT>
-                    <a:lnB w="2540" cap="flat" cmpd="sng" algn="ctr">
-                      <a:solidFill>
-                        <a:srgbClr val="EEEEEE"/>
-                      </a:solidFill>
-                      <a:prstDash val="solid"/>
-                      <a:round/>
-                      <a:headEnd type="none" w="med" len="med"/>
-                      <a:tailEnd type="none" w="med" len="med"/>
-                    </a:lnB>
-                  </a:tcPr>
-                </a:tc>
-                <a:tc>
-                  <a:txBody>
-                    <a:bodyPr/>
-                    <a:lstStyle/>
-                    <a:p>
-                      <a:pPr algn="ctr" indent="0" marL="0">
-                        <a:buNone/>
-                      </a:pPr>
-                      <a:r>
-                        <a:rPr lang="en-US" sz="500" b="1" dirty="0">
-                          <a:solidFill>
-                            <a:srgbClr val="000000"/>
-                          </a:solidFill>
-                          <a:latin typeface="Calibri" pitchFamily="34" charset="0"/>
-                          <a:ea typeface="Calibri" pitchFamily="34" charset="-122"/>
-                          <a:cs typeface="Calibri" pitchFamily="34" charset="-120"/>
-                        </a:rPr>
-                        <a:t>6.80%</a:t>
+                        <a:t>6.46%</a:t>
                       </a:r>
                       <a:endParaRPr lang="en-US" sz="500" dirty="0">
                         <a:latin typeface="Calibri" charset="0"/>
@@ -23534,7 +24613,7 @@
                           <a:ea typeface="Calibri" pitchFamily="34" charset="-122"/>
                           <a:cs typeface="Calibri" pitchFamily="34" charset="-120"/>
                         </a:rPr>
-                        <a:t>0.37%</a:t>
+                        <a:t>0.39%</a:t>
                       </a:r>
                       <a:endParaRPr lang="en-US" sz="500" dirty="0">
                         <a:latin typeface="Calibri" charset="0"/>
@@ -23599,7 +24678,7 @@
                           <a:ea typeface="Calibri" pitchFamily="34" charset="-122"/>
                           <a:cs typeface="Calibri" pitchFamily="34" charset="-120"/>
                         </a:rPr>
-                        <a:t>0.37%</a:t>
+                        <a:t>0.36%</a:t>
                       </a:r>
                       <a:endParaRPr lang="en-US" sz="500" dirty="0">
                         <a:latin typeface="Calibri" charset="0"/>
@@ -23664,7 +24743,7 @@
                           <a:ea typeface="Calibri" pitchFamily="34" charset="-122"/>
                           <a:cs typeface="Calibri" pitchFamily="34" charset="-120"/>
                         </a:rPr>
-                        <a:t>0.37%</a:t>
+                        <a:t>0.39%</a:t>
                       </a:r>
                       <a:endParaRPr lang="en-US" sz="500" dirty="0">
                         <a:latin typeface="Calibri" charset="0"/>
@@ -23729,7 +24808,7 @@
                           <a:ea typeface="Calibri" pitchFamily="34" charset="-122"/>
                           <a:cs typeface="Calibri" pitchFamily="34" charset="-120"/>
                         </a:rPr>
-                        <a:t>0.37%</a:t>
+                        <a:t>0.38%</a:t>
                       </a:r>
                       <a:endParaRPr lang="en-US" sz="500" dirty="0">
                         <a:latin typeface="Calibri" charset="0"/>
@@ -24412,7 +25491,7 @@
                           <a:ea typeface="Calibri" pitchFamily="34" charset="-122"/>
                           <a:cs typeface="Calibri" pitchFamily="34" charset="-120"/>
                         </a:rPr>
-                        <a:t>0.00%</a:t>
+                        <a:t>0.27%</a:t>
                       </a:r>
                       <a:endParaRPr lang="en-US" sz="500" dirty="0">
                         <a:latin typeface="Calibri" charset="0"/>
@@ -25290,7 +26369,7 @@
                           <a:ea typeface="Calibri" pitchFamily="34" charset="-122"/>
                           <a:cs typeface="Calibri" pitchFamily="34" charset="-120"/>
                         </a:rPr>
-                        <a:t>0.55%</a:t>
+                        <a:t>0.58%</a:t>
                       </a:r>
                       <a:endParaRPr lang="en-US" sz="500" dirty="0">
                         <a:latin typeface="Calibri" charset="0"/>
@@ -25355,7 +26434,7 @@
                           <a:ea typeface="Calibri" pitchFamily="34" charset="-122"/>
                           <a:cs typeface="Calibri" pitchFamily="34" charset="-120"/>
                         </a:rPr>
-                        <a:t>0.51%</a:t>
+                        <a:t>0.54%</a:t>
                       </a:r>
                       <a:endParaRPr lang="en-US" sz="500" dirty="0">
                         <a:latin typeface="Calibri" charset="0"/>
@@ -25420,7 +26499,7 @@
                           <a:ea typeface="Calibri" pitchFamily="34" charset="-122"/>
                           <a:cs typeface="Calibri" pitchFamily="34" charset="-120"/>
                         </a:rPr>
-                        <a:t>0.56%</a:t>
+                        <a:t>0.59%</a:t>
                       </a:r>
                       <a:endParaRPr lang="en-US" sz="500" dirty="0">
                         <a:latin typeface="Calibri" charset="0"/>
@@ -25485,7 +26564,7 @@
                           <a:ea typeface="Calibri" pitchFamily="34" charset="-122"/>
                           <a:cs typeface="Calibri" pitchFamily="34" charset="-120"/>
                         </a:rPr>
-                        <a:t>0.56%</a:t>
+                        <a:t>0.59%</a:t>
                       </a:r>
                       <a:endParaRPr lang="en-US" sz="500" dirty="0">
                         <a:latin typeface="Calibri" charset="0"/>

--- a/folletos/2026-04/pptx/FIP_VANTRUST_LIQUIDEZ_I.pptx
+++ b/folletos/2026-04/pptx/FIP_VANTRUST_LIQUIDEZ_I.pptx
@@ -4247,7 +4247,7 @@
                 <a:ea typeface="Calibri" pitchFamily="34" charset="-122"/>
                 <a:cs typeface="Calibri" pitchFamily="34" charset="-120"/>
               </a:rPr>
-              <a:t>prueba CLP</a:t>
+              <a:t>prueba 13 CLP</a:t>
             </a:r>
             <a:endParaRPr lang="en-US" sz="800" dirty="0"/>
           </a:p>

--- a/folletos/2026-04/pptx/FIP_VANTRUST_LIQUIDEZ_I.pptx
+++ b/folletos/2026-04/pptx/FIP_VANTRUST_LIQUIDEZ_I.pptx
@@ -639,7 +639,7 @@
                   <c:v>139.2</c:v>
                 </c:pt>
                 <c:pt idx="72">
-                  <c:v>139.72</c:v>
+                  <c:v>103.79</c:v>
                 </c:pt>
               </c:numCache>
             </c:numRef>
@@ -1695,7 +1695,7 @@
                   <c:v>129.21</c:v>
                 </c:pt>
                 <c:pt idx="72">
-                  <c:v>129.55</c:v>
+                  <c:v/>
                 </c:pt>
               </c:numCache>
             </c:numRef>
@@ -4247,7 +4247,7 @@
                 <a:ea typeface="Calibri" pitchFamily="34" charset="-122"/>
                 <a:cs typeface="Calibri" pitchFamily="34" charset="-120"/>
               </a:rPr>
-              <a:t>prueba 13 CLP</a:t>
+              <a:t>prueba CLP</a:t>
             </a:r>
             <a:endParaRPr lang="en-US" sz="800" dirty="0"/>
           </a:p>
@@ -4896,7 +4896,7 @@
                           <a:ea typeface="Calibri" pitchFamily="34" charset="-122"/>
                           <a:cs typeface="Calibri" pitchFamily="34" charset="-120"/>
                         </a:rPr>
-                        <a:t>0.38%</a:t>
+                        <a:t>-25.44%</a:t>
                       </a:r>
                       <a:endParaRPr lang="en-US" sz="750" dirty="0">
                         <a:latin typeface="Calibri" charset="0"/>
@@ -4964,7 +4964,7 @@
                           <a:ea typeface="Calibri" pitchFamily="34" charset="-122"/>
                           <a:cs typeface="Calibri" pitchFamily="34" charset="-120"/>
                         </a:rPr>
-                        <a:t>1.13%</a:t>
+                        <a:t>-24.88%</a:t>
                       </a:r>
                       <a:endParaRPr lang="en-US" sz="750" dirty="0">
                         <a:latin typeface="Calibri" charset="0"/>
@@ -5032,7 +5032,7 @@
                           <a:ea typeface="Calibri" pitchFamily="34" charset="-122"/>
                           <a:cs typeface="Calibri" pitchFamily="34" charset="-120"/>
                         </a:rPr>
-                        <a:t>2.33%</a:t>
+                        <a:t>-23.98%</a:t>
                       </a:r>
                       <a:endParaRPr lang="en-US" sz="750" dirty="0">
                         <a:latin typeface="Calibri" charset="0"/>
@@ -5100,7 +5100,7 @@
                           <a:ea typeface="Calibri" pitchFamily="34" charset="-122"/>
                           <a:cs typeface="Calibri" pitchFamily="34" charset="-120"/>
                         </a:rPr>
-                        <a:t>4.90%</a:t>
+                        <a:t>-22.07%</a:t>
                       </a:r>
                       <a:endParaRPr lang="en-US" sz="750" dirty="0">
                         <a:latin typeface="Calibri" charset="0"/>
@@ -5168,7 +5168,7 @@
                           <a:ea typeface="Calibri" pitchFamily="34" charset="-122"/>
                           <a:cs typeface="Calibri" pitchFamily="34" charset="-120"/>
                         </a:rPr>
-                        <a:t>3.39%</a:t>
+                        <a:t>-74.63%</a:t>
                       </a:r>
                       <a:endParaRPr lang="en-US" sz="750" dirty="0">
                         <a:latin typeface="Calibri" charset="0"/>
@@ -5306,7 +5306,7 @@
                           <a:ea typeface="Calibri" pitchFamily="34" charset="-122"/>
                           <a:cs typeface="Calibri" pitchFamily="34" charset="-120"/>
                         </a:rPr>
-                        <a:t>0.26%</a:t>
+                        <a:t>-100.00%</a:t>
                       </a:r>
                       <a:endParaRPr lang="en-US" sz="750" dirty="0">
                         <a:latin typeface="Calibri" charset="0"/>
@@ -5374,7 +5374,7 @@
                           <a:ea typeface="Calibri" pitchFamily="34" charset="-122"/>
                           <a:cs typeface="Calibri" pitchFamily="34" charset="-120"/>
                         </a:rPr>
-                        <a:t>0.77%</a:t>
+                        <a:t>-100.00%</a:t>
                       </a:r>
                       <a:endParaRPr lang="en-US" sz="750" dirty="0">
                         <a:latin typeface="Calibri" charset="0"/>
@@ -5442,7 +5442,7 @@
                           <a:ea typeface="Calibri" pitchFamily="34" charset="-122"/>
                           <a:cs typeface="Calibri" pitchFamily="34" charset="-120"/>
                         </a:rPr>
-                        <a:t>1.62%</a:t>
+                        <a:t>-100.00%</a:t>
                       </a:r>
                       <a:endParaRPr lang="en-US" sz="750" dirty="0">
                         <a:latin typeface="Calibri" charset="0"/>
@@ -5510,7 +5510,7 @@
                           <a:ea typeface="Calibri" pitchFamily="34" charset="-122"/>
                           <a:cs typeface="Calibri" pitchFamily="34" charset="-120"/>
                         </a:rPr>
-                        <a:t>3.43%</a:t>
+                        <a:t>-100.00%</a:t>
                       </a:r>
                       <a:endParaRPr lang="en-US" sz="750" dirty="0">
                         <a:latin typeface="Calibri" charset="0"/>
@@ -5578,7 +5578,7 @@
                           <a:ea typeface="Calibri" pitchFamily="34" charset="-122"/>
                           <a:cs typeface="Calibri" pitchFamily="34" charset="-120"/>
                         </a:rPr>
-                        <a:t>2.32%</a:t>
+                        <a:t>-300.00%</a:t>
                       </a:r>
                       <a:endParaRPr lang="en-US" sz="750" dirty="0">
                         <a:latin typeface="Calibri" charset="0"/>
@@ -24808,7 +24808,7 @@
                           <a:ea typeface="Calibri" pitchFamily="34" charset="-122"/>
                           <a:cs typeface="Calibri" pitchFamily="34" charset="-120"/>
                         </a:rPr>
-                        <a:t>0.38%</a:t>
+                        <a:t>-25.44%</a:t>
                       </a:r>
                       <a:endParaRPr lang="en-US" sz="500" dirty="0">
                         <a:latin typeface="Calibri" charset="0"/>
@@ -25305,7 +25305,7 @@
                           <a:ea typeface="Calibri" pitchFamily="34" charset="-122"/>
                           <a:cs typeface="Calibri" pitchFamily="34" charset="-120"/>
                         </a:rPr>
-                        <a:t>3.39%</a:t>
+                        <a:t>-74.63%</a:t>
                       </a:r>
                       <a:endParaRPr lang="en-US" sz="500" dirty="0">
                         <a:latin typeface="Calibri" charset="0"/>
@@ -25686,7 +25686,7 @@
                           <a:ea typeface="Calibri" pitchFamily="34" charset="-122"/>
                           <a:cs typeface="Calibri" pitchFamily="34" charset="-120"/>
                         </a:rPr>
-                        <a:t>0.26%</a:t>
+                        <a:t>-100.00%</a:t>
                       </a:r>
                       <a:endParaRPr lang="en-US" sz="500" dirty="0">
                         <a:latin typeface="Calibri" charset="0"/>
@@ -26183,7 +26183,7 @@
                           <a:ea typeface="Calibri" pitchFamily="34" charset="-122"/>
                           <a:cs typeface="Calibri" pitchFamily="34" charset="-120"/>
                         </a:rPr>
-                        <a:t>2.32%</a:t>
+                        <a:t>-300.00%</a:t>
                       </a:r>
                       <a:endParaRPr lang="en-US" sz="500" dirty="0">
                         <a:latin typeface="Calibri" charset="0"/>

--- a/folletos/2026-04/pptx/FIP_VANTRUST_LIQUIDEZ_I.pptx
+++ b/folletos/2026-04/pptx/FIP_VANTRUST_LIQUIDEZ_I.pptx
@@ -4247,7 +4247,7 @@
                 <a:ea typeface="Calibri" pitchFamily="34" charset="-122"/>
                 <a:cs typeface="Calibri" pitchFamily="34" charset="-120"/>
               </a:rPr>
-              <a:t>prueba CLP</a:t>
+              <a:t>prueba 14 CLP</a:t>
             </a:r>
             <a:endParaRPr lang="en-US" sz="800" dirty="0"/>
           </a:p>
